--- a/docs/MicroRTS_LLM_Competition_Results.pptx
+++ b/docs/MicroRTS_LLM_Competition_Results.pptx
@@ -3756,7 +3756,7 @@
                 </a:solidFill>
                 <a:latin typeface="Calibri"/>
               </a:rPr>
-              <a:t>• Santi Ontañón and collaborators for the open MicroRTS engine.</a:t>
+              <a:t>• Santi Ontañón, Levi Lelis, and Rubens O. Moraes for the open MicroRTS engine.</a:t>
             </a:r>
           </a:p>
           <a:p>

--- a/docs/MicroRTS_LLM_Competition_Results.pptx
+++ b/docs/MicroRTS_LLM_Competition_Results.pptx
@@ -5,22 +5,22 @@
     <p:sldMasterId id="2147483648" r:id="rId1"/>
   </p:sldMasterIdLst>
   <p:sldIdLst>
-    <p:sldId id="256" r:id="rId7"/>
-    <p:sldId id="257" r:id="rId8"/>
-    <p:sldId id="258" r:id="rId9"/>
-    <p:sldId id="259" r:id="rId10"/>
-    <p:sldId id="260" r:id="rId11"/>
-    <p:sldId id="261" r:id="rId12"/>
-    <p:sldId id="262" r:id="rId13"/>
-    <p:sldId id="263" r:id="rId14"/>
-    <p:sldId id="264" r:id="rId15"/>
-    <p:sldId id="265" r:id="rId16"/>
-    <p:sldId id="266" r:id="rId17"/>
-    <p:sldId id="267" r:id="rId18"/>
-    <p:sldId id="268" r:id="rId19"/>
-    <p:sldId id="269" r:id="rId20"/>
+    <p:sldId id="256" r:id="rId2"/>
+    <p:sldId id="257" r:id="rId3"/>
+    <p:sldId id="258" r:id="rId4"/>
+    <p:sldId id="259" r:id="rId5"/>
+    <p:sldId id="260" r:id="rId6"/>
+    <p:sldId id="261" r:id="rId7"/>
+    <p:sldId id="262" r:id="rId8"/>
+    <p:sldId id="263" r:id="rId9"/>
+    <p:sldId id="264" r:id="rId10"/>
+    <p:sldId id="265" r:id="rId11"/>
+    <p:sldId id="266" r:id="rId12"/>
+    <p:sldId id="267" r:id="rId13"/>
+    <p:sldId id="268" r:id="rId14"/>
+    <p:sldId id="269" r:id="rId15"/>
   </p:sldIdLst>
-  <p:sldSz cx="12191695" cy="6858000" type="screen4x3"/>
+  <p:sldSz cx="12192000" cy="6858000"/>
   <p:notesSz cx="6858000" cy="9144000"/>
   <p:defaultTextStyle>
     <a:defPPr>
@@ -117,6 +117,22 @@
       </a:defRPr>
     </a:lvl9pPr>
   </p:defaultTextStyle>
+  <p:extLst>
+    <p:ext uri="{EFAFB233-063F-42B5-8137-9DF3F51BA10A}">
+      <p15:sldGuideLst xmlns:p15="http://schemas.microsoft.com/office/powerpoint/2012/main">
+        <p15:guide id="1" orient="horz" pos="2160">
+          <p15:clr>
+            <a:srgbClr val="A4A3A4"/>
+          </p15:clr>
+        </p15:guide>
+        <p15:guide id="2" pos="2880">
+          <p15:clr>
+            <a:srgbClr val="A4A3A4"/>
+          </p15:clr>
+        </p15:guide>
+      </p15:sldGuideLst>
+    </p:ext>
+  </p:extLst>
 </p:presentation>
 </file>
 
@@ -158,10 +174,9 @@
           <a:lstStyle/>
           <a:p>
             <a:r>
-              <a:rPr lang="en-US" smtClean="0"/>
+              <a:rPr lang="en-US"/>
               <a:t>Click to edit Master title style</a:t>
             </a:r>
-            <a:endParaRPr lang="en-US"/>
           </a:p>
         </p:txBody>
       </p:sp>
@@ -277,10 +292,9 @@
           </a:lstStyle>
           <a:p>
             <a:r>
-              <a:rPr lang="en-US" smtClean="0"/>
+              <a:rPr lang="en-US"/>
               <a:t>Click to edit Master subtitle style</a:t>
             </a:r>
-            <a:endParaRPr lang="en-US"/>
           </a:p>
         </p:txBody>
       </p:sp>
@@ -301,7 +315,7 @@
           <a:p>
             <a:fld id="{5BCAD085-E8A6-8845-BD4E-CB4CCA059FC4}" type="datetimeFigureOut">
               <a:rPr lang="en-US" smtClean="0"/>
-              <a:t>1/27/13</a:t>
+              <a:t>6/21/26</a:t>
             </a:fld>
             <a:endParaRPr lang="en-US"/>
           </a:p>
@@ -395,10 +409,9 @@
           <a:lstStyle/>
           <a:p>
             <a:r>
-              <a:rPr lang="en-US" smtClean="0"/>
+              <a:rPr lang="en-US"/>
               <a:t>Click to edit Master title style</a:t>
             </a:r>
-            <a:endParaRPr lang="en-US"/>
           </a:p>
         </p:txBody>
       </p:sp>
@@ -419,38 +432,37 @@
           <a:p>
             <a:pPr lvl="0"/>
             <a:r>
-              <a:rPr lang="en-US" smtClean="0"/>
+              <a:rPr lang="en-US"/>
               <a:t>Click to edit Master text styles</a:t>
             </a:r>
           </a:p>
           <a:p>
             <a:pPr lvl="1"/>
             <a:r>
-              <a:rPr lang="en-US" smtClean="0"/>
+              <a:rPr lang="en-US"/>
               <a:t>Second level</a:t>
             </a:r>
           </a:p>
           <a:p>
             <a:pPr lvl="2"/>
             <a:r>
-              <a:rPr lang="en-US" smtClean="0"/>
+              <a:rPr lang="en-US"/>
               <a:t>Third level</a:t>
             </a:r>
           </a:p>
           <a:p>
             <a:pPr lvl="3"/>
             <a:r>
-              <a:rPr lang="en-US" smtClean="0"/>
+              <a:rPr lang="en-US"/>
               <a:t>Fourth level</a:t>
             </a:r>
           </a:p>
           <a:p>
             <a:pPr lvl="4"/>
             <a:r>
-              <a:rPr lang="en-US" smtClean="0"/>
+              <a:rPr lang="en-US"/>
               <a:t>Fifth level</a:t>
             </a:r>
-            <a:endParaRPr lang="en-US"/>
           </a:p>
         </p:txBody>
       </p:sp>
@@ -471,7 +483,7 @@
           <a:p>
             <a:fld id="{5BCAD085-E8A6-8845-BD4E-CB4CCA059FC4}" type="datetimeFigureOut">
               <a:rPr lang="en-US" smtClean="0"/>
-              <a:t>1/27/13</a:t>
+              <a:t>6/21/26</a:t>
             </a:fld>
             <a:endParaRPr lang="en-US"/>
           </a:p>
@@ -570,10 +582,9 @@
           <a:lstStyle/>
           <a:p>
             <a:r>
-              <a:rPr lang="en-US" smtClean="0"/>
+              <a:rPr lang="en-US"/>
               <a:t>Click to edit Master title style</a:t>
             </a:r>
-            <a:endParaRPr lang="en-US"/>
           </a:p>
         </p:txBody>
       </p:sp>
@@ -599,38 +610,37 @@
           <a:p>
             <a:pPr lvl="0"/>
             <a:r>
-              <a:rPr lang="en-US" smtClean="0"/>
+              <a:rPr lang="en-US"/>
               <a:t>Click to edit Master text styles</a:t>
             </a:r>
           </a:p>
           <a:p>
             <a:pPr lvl="1"/>
             <a:r>
-              <a:rPr lang="en-US" smtClean="0"/>
+              <a:rPr lang="en-US"/>
               <a:t>Second level</a:t>
             </a:r>
           </a:p>
           <a:p>
             <a:pPr lvl="2"/>
             <a:r>
-              <a:rPr lang="en-US" smtClean="0"/>
+              <a:rPr lang="en-US"/>
               <a:t>Third level</a:t>
             </a:r>
           </a:p>
           <a:p>
             <a:pPr lvl="3"/>
             <a:r>
-              <a:rPr lang="en-US" smtClean="0"/>
+              <a:rPr lang="en-US"/>
               <a:t>Fourth level</a:t>
             </a:r>
           </a:p>
           <a:p>
             <a:pPr lvl="4"/>
             <a:r>
-              <a:rPr lang="en-US" smtClean="0"/>
+              <a:rPr lang="en-US"/>
               <a:t>Fifth level</a:t>
             </a:r>
-            <a:endParaRPr lang="en-US"/>
           </a:p>
         </p:txBody>
       </p:sp>
@@ -651,7 +661,7 @@
           <a:p>
             <a:fld id="{5BCAD085-E8A6-8845-BD4E-CB4CCA059FC4}" type="datetimeFigureOut">
               <a:rPr lang="en-US" smtClean="0"/>
-              <a:t>1/27/13</a:t>
+              <a:t>6/21/26</a:t>
             </a:fld>
             <a:endParaRPr lang="en-US"/>
           </a:p>
@@ -745,10 +755,9 @@
           <a:lstStyle/>
           <a:p>
             <a:r>
-              <a:rPr lang="en-US" smtClean="0"/>
+              <a:rPr lang="en-US"/>
               <a:t>Click to edit Master title style</a:t>
             </a:r>
-            <a:endParaRPr lang="en-US"/>
           </a:p>
         </p:txBody>
       </p:sp>
@@ -769,38 +778,37 @@
           <a:p>
             <a:pPr lvl="0"/>
             <a:r>
-              <a:rPr lang="en-US" smtClean="0"/>
+              <a:rPr lang="en-US"/>
               <a:t>Click to edit Master text styles</a:t>
             </a:r>
           </a:p>
           <a:p>
             <a:pPr lvl="1"/>
             <a:r>
-              <a:rPr lang="en-US" smtClean="0"/>
+              <a:rPr lang="en-US"/>
               <a:t>Second level</a:t>
             </a:r>
           </a:p>
           <a:p>
             <a:pPr lvl="2"/>
             <a:r>
-              <a:rPr lang="en-US" smtClean="0"/>
+              <a:rPr lang="en-US"/>
               <a:t>Third level</a:t>
             </a:r>
           </a:p>
           <a:p>
             <a:pPr lvl="3"/>
             <a:r>
-              <a:rPr lang="en-US" smtClean="0"/>
+              <a:rPr lang="en-US"/>
               <a:t>Fourth level</a:t>
             </a:r>
           </a:p>
           <a:p>
             <a:pPr lvl="4"/>
             <a:r>
-              <a:rPr lang="en-US" smtClean="0"/>
+              <a:rPr lang="en-US"/>
               <a:t>Fifth level</a:t>
             </a:r>
-            <a:endParaRPr lang="en-US"/>
           </a:p>
         </p:txBody>
       </p:sp>
@@ -821,7 +829,7 @@
           <a:p>
             <a:fld id="{5BCAD085-E8A6-8845-BD4E-CB4CCA059FC4}" type="datetimeFigureOut">
               <a:rPr lang="en-US" smtClean="0"/>
-              <a:t>1/27/13</a:t>
+              <a:t>6/21/26</a:t>
             </a:fld>
             <a:endParaRPr lang="en-US"/>
           </a:p>
@@ -924,10 +932,9 @@
           </a:lstStyle>
           <a:p>
             <a:r>
-              <a:rPr lang="en-US" smtClean="0"/>
+              <a:rPr lang="en-US"/>
               <a:t>Click to edit Master title style</a:t>
             </a:r>
-            <a:endParaRPr lang="en-US"/>
           </a:p>
         </p:txBody>
       </p:sp>
@@ -1044,7 +1051,7 @@
           <a:p>
             <a:pPr lvl="0"/>
             <a:r>
-              <a:rPr lang="en-US" smtClean="0"/>
+              <a:rPr lang="en-US"/>
               <a:t>Click to edit Master text styles</a:t>
             </a:r>
           </a:p>
@@ -1067,7 +1074,7 @@
           <a:p>
             <a:fld id="{5BCAD085-E8A6-8845-BD4E-CB4CCA059FC4}" type="datetimeFigureOut">
               <a:rPr lang="en-US" smtClean="0"/>
-              <a:t>1/27/13</a:t>
+              <a:t>6/21/26</a:t>
             </a:fld>
             <a:endParaRPr lang="en-US"/>
           </a:p>
@@ -1161,10 +1168,9 @@
           <a:lstStyle/>
           <a:p>
             <a:r>
-              <a:rPr lang="en-US" smtClean="0"/>
+              <a:rPr lang="en-US"/>
               <a:t>Click to edit Master title style</a:t>
             </a:r>
-            <a:endParaRPr lang="en-US"/>
           </a:p>
         </p:txBody>
       </p:sp>
@@ -1218,38 +1224,37 @@
           <a:p>
             <a:pPr lvl="0"/>
             <a:r>
-              <a:rPr lang="en-US" smtClean="0"/>
+              <a:rPr lang="en-US"/>
               <a:t>Click to edit Master text styles</a:t>
             </a:r>
           </a:p>
           <a:p>
             <a:pPr lvl="1"/>
             <a:r>
-              <a:rPr lang="en-US" smtClean="0"/>
+              <a:rPr lang="en-US"/>
               <a:t>Second level</a:t>
             </a:r>
           </a:p>
           <a:p>
             <a:pPr lvl="2"/>
             <a:r>
-              <a:rPr lang="en-US" smtClean="0"/>
+              <a:rPr lang="en-US"/>
               <a:t>Third level</a:t>
             </a:r>
           </a:p>
           <a:p>
             <a:pPr lvl="3"/>
             <a:r>
-              <a:rPr lang="en-US" smtClean="0"/>
+              <a:rPr lang="en-US"/>
               <a:t>Fourth level</a:t>
             </a:r>
           </a:p>
           <a:p>
             <a:pPr lvl="4"/>
             <a:r>
-              <a:rPr lang="en-US" smtClean="0"/>
+              <a:rPr lang="en-US"/>
               <a:t>Fifth level</a:t>
             </a:r>
-            <a:endParaRPr lang="en-US"/>
           </a:p>
         </p:txBody>
       </p:sp>
@@ -1303,38 +1308,37 @@
           <a:p>
             <a:pPr lvl="0"/>
             <a:r>
-              <a:rPr lang="en-US" smtClean="0"/>
+              <a:rPr lang="en-US"/>
               <a:t>Click to edit Master text styles</a:t>
             </a:r>
           </a:p>
           <a:p>
             <a:pPr lvl="1"/>
             <a:r>
-              <a:rPr lang="en-US" smtClean="0"/>
+              <a:rPr lang="en-US"/>
               <a:t>Second level</a:t>
             </a:r>
           </a:p>
           <a:p>
             <a:pPr lvl="2"/>
             <a:r>
-              <a:rPr lang="en-US" smtClean="0"/>
+              <a:rPr lang="en-US"/>
               <a:t>Third level</a:t>
             </a:r>
           </a:p>
           <a:p>
             <a:pPr lvl="3"/>
             <a:r>
-              <a:rPr lang="en-US" smtClean="0"/>
+              <a:rPr lang="en-US"/>
               <a:t>Fourth level</a:t>
             </a:r>
           </a:p>
           <a:p>
             <a:pPr lvl="4"/>
             <a:r>
-              <a:rPr lang="en-US" smtClean="0"/>
+              <a:rPr lang="en-US"/>
               <a:t>Fifth level</a:t>
             </a:r>
-            <a:endParaRPr lang="en-US"/>
           </a:p>
         </p:txBody>
       </p:sp>
@@ -1355,7 +1359,7 @@
           <a:p>
             <a:fld id="{5BCAD085-E8A6-8845-BD4E-CB4CCA059FC4}" type="datetimeFigureOut">
               <a:rPr lang="en-US" smtClean="0"/>
-              <a:t>1/27/13</a:t>
+              <a:t>6/21/26</a:t>
             </a:fld>
             <a:endParaRPr lang="en-US"/>
           </a:p>
@@ -1453,10 +1457,9 @@
           </a:lstStyle>
           <a:p>
             <a:r>
-              <a:rPr lang="en-US" smtClean="0"/>
+              <a:rPr lang="en-US"/>
               <a:t>Click to edit Master title style</a:t>
             </a:r>
-            <a:endParaRPr lang="en-US"/>
           </a:p>
         </p:txBody>
       </p:sp>
@@ -1519,7 +1522,7 @@
           <a:p>
             <a:pPr lvl="0"/>
             <a:r>
-              <a:rPr lang="en-US" smtClean="0"/>
+              <a:rPr lang="en-US"/>
               <a:t>Click to edit Master text styles</a:t>
             </a:r>
           </a:p>
@@ -1575,38 +1578,37 @@
           <a:p>
             <a:pPr lvl="0"/>
             <a:r>
-              <a:rPr lang="en-US" smtClean="0"/>
+              <a:rPr lang="en-US"/>
               <a:t>Click to edit Master text styles</a:t>
             </a:r>
           </a:p>
           <a:p>
             <a:pPr lvl="1"/>
             <a:r>
-              <a:rPr lang="en-US" smtClean="0"/>
+              <a:rPr lang="en-US"/>
               <a:t>Second level</a:t>
             </a:r>
           </a:p>
           <a:p>
             <a:pPr lvl="2"/>
             <a:r>
-              <a:rPr lang="en-US" smtClean="0"/>
+              <a:rPr lang="en-US"/>
               <a:t>Third level</a:t>
             </a:r>
           </a:p>
           <a:p>
             <a:pPr lvl="3"/>
             <a:r>
-              <a:rPr lang="en-US" smtClean="0"/>
+              <a:rPr lang="en-US"/>
               <a:t>Fourth level</a:t>
             </a:r>
           </a:p>
           <a:p>
             <a:pPr lvl="4"/>
             <a:r>
-              <a:rPr lang="en-US" smtClean="0"/>
+              <a:rPr lang="en-US"/>
               <a:t>Fifth level</a:t>
             </a:r>
-            <a:endParaRPr lang="en-US"/>
           </a:p>
         </p:txBody>
       </p:sp>
@@ -1669,7 +1671,7 @@
           <a:p>
             <a:pPr lvl="0"/>
             <a:r>
-              <a:rPr lang="en-US" smtClean="0"/>
+              <a:rPr lang="en-US"/>
               <a:t>Click to edit Master text styles</a:t>
             </a:r>
           </a:p>
@@ -1725,38 +1727,37 @@
           <a:p>
             <a:pPr lvl="0"/>
             <a:r>
-              <a:rPr lang="en-US" smtClean="0"/>
+              <a:rPr lang="en-US"/>
               <a:t>Click to edit Master text styles</a:t>
             </a:r>
           </a:p>
           <a:p>
             <a:pPr lvl="1"/>
             <a:r>
-              <a:rPr lang="en-US" smtClean="0"/>
+              <a:rPr lang="en-US"/>
               <a:t>Second level</a:t>
             </a:r>
           </a:p>
           <a:p>
             <a:pPr lvl="2"/>
             <a:r>
-              <a:rPr lang="en-US" smtClean="0"/>
+              <a:rPr lang="en-US"/>
               <a:t>Third level</a:t>
             </a:r>
           </a:p>
           <a:p>
             <a:pPr lvl="3"/>
             <a:r>
-              <a:rPr lang="en-US" smtClean="0"/>
+              <a:rPr lang="en-US"/>
               <a:t>Fourth level</a:t>
             </a:r>
           </a:p>
           <a:p>
             <a:pPr lvl="4"/>
             <a:r>
-              <a:rPr lang="en-US" smtClean="0"/>
+              <a:rPr lang="en-US"/>
               <a:t>Fifth level</a:t>
             </a:r>
-            <a:endParaRPr lang="en-US"/>
           </a:p>
         </p:txBody>
       </p:sp>
@@ -1777,7 +1778,7 @@
           <a:p>
             <a:fld id="{5BCAD085-E8A6-8845-BD4E-CB4CCA059FC4}" type="datetimeFigureOut">
               <a:rPr lang="en-US" smtClean="0"/>
-              <a:t>1/27/13</a:t>
+              <a:t>6/21/26</a:t>
             </a:fld>
             <a:endParaRPr lang="en-US"/>
           </a:p>
@@ -1871,10 +1872,9 @@
           <a:lstStyle/>
           <a:p>
             <a:r>
-              <a:rPr lang="en-US" smtClean="0"/>
+              <a:rPr lang="en-US"/>
               <a:t>Click to edit Master title style</a:t>
             </a:r>
-            <a:endParaRPr lang="en-US"/>
           </a:p>
         </p:txBody>
       </p:sp>
@@ -1895,7 +1895,7 @@
           <a:p>
             <a:fld id="{5BCAD085-E8A6-8845-BD4E-CB4CCA059FC4}" type="datetimeFigureOut">
               <a:rPr lang="en-US" smtClean="0"/>
-              <a:t>1/27/13</a:t>
+              <a:t>6/21/26</a:t>
             </a:fld>
             <a:endParaRPr lang="en-US"/>
           </a:p>
@@ -1990,7 +1990,7 @@
           <a:p>
             <a:fld id="{5BCAD085-E8A6-8845-BD4E-CB4CCA059FC4}" type="datetimeFigureOut">
               <a:rPr lang="en-US" smtClean="0"/>
-              <a:t>1/27/13</a:t>
+              <a:t>6/21/26</a:t>
             </a:fld>
             <a:endParaRPr lang="en-US"/>
           </a:p>
@@ -2093,10 +2093,9 @@
           </a:lstStyle>
           <a:p>
             <a:r>
-              <a:rPr lang="en-US" smtClean="0"/>
+              <a:rPr lang="en-US"/>
               <a:t>Click to edit Master title style</a:t>
             </a:r>
-            <a:endParaRPr lang="en-US"/>
           </a:p>
         </p:txBody>
       </p:sp>
@@ -2150,38 +2149,37 @@
           <a:p>
             <a:pPr lvl="0"/>
             <a:r>
-              <a:rPr lang="en-US" smtClean="0"/>
+              <a:rPr lang="en-US"/>
               <a:t>Click to edit Master text styles</a:t>
             </a:r>
           </a:p>
           <a:p>
             <a:pPr lvl="1"/>
             <a:r>
-              <a:rPr lang="en-US" smtClean="0"/>
+              <a:rPr lang="en-US"/>
               <a:t>Second level</a:t>
             </a:r>
           </a:p>
           <a:p>
             <a:pPr lvl="2"/>
             <a:r>
-              <a:rPr lang="en-US" smtClean="0"/>
+              <a:rPr lang="en-US"/>
               <a:t>Third level</a:t>
             </a:r>
           </a:p>
           <a:p>
             <a:pPr lvl="3"/>
             <a:r>
-              <a:rPr lang="en-US" smtClean="0"/>
+              <a:rPr lang="en-US"/>
               <a:t>Fourth level</a:t>
             </a:r>
           </a:p>
           <a:p>
             <a:pPr lvl="4"/>
             <a:r>
-              <a:rPr lang="en-US" smtClean="0"/>
+              <a:rPr lang="en-US"/>
               <a:t>Fifth level</a:t>
             </a:r>
-            <a:endParaRPr lang="en-US"/>
           </a:p>
         </p:txBody>
       </p:sp>
@@ -2244,7 +2242,7 @@
           <a:p>
             <a:pPr lvl="0"/>
             <a:r>
-              <a:rPr lang="en-US" smtClean="0"/>
+              <a:rPr lang="en-US"/>
               <a:t>Click to edit Master text styles</a:t>
             </a:r>
           </a:p>
@@ -2267,7 +2265,7 @@
           <a:p>
             <a:fld id="{5BCAD085-E8A6-8845-BD4E-CB4CCA059FC4}" type="datetimeFigureOut">
               <a:rPr lang="en-US" smtClean="0"/>
-              <a:t>1/27/13</a:t>
+              <a:t>6/21/26</a:t>
             </a:fld>
             <a:endParaRPr lang="en-US"/>
           </a:p>
@@ -2370,10 +2368,9 @@
           </a:lstStyle>
           <a:p>
             <a:r>
-              <a:rPr lang="en-US" smtClean="0"/>
+              <a:rPr lang="en-US"/>
               <a:t>Click to edit Master title style</a:t>
             </a:r>
-            <a:endParaRPr lang="en-US"/>
           </a:p>
         </p:txBody>
       </p:sp>
@@ -2497,7 +2494,7 @@
           <a:p>
             <a:pPr lvl="0"/>
             <a:r>
-              <a:rPr lang="en-US" smtClean="0"/>
+              <a:rPr lang="en-US"/>
               <a:t>Click to edit Master text styles</a:t>
             </a:r>
           </a:p>
@@ -2520,7 +2517,7 @@
           <a:p>
             <a:fld id="{5BCAD085-E8A6-8845-BD4E-CB4CCA059FC4}" type="datetimeFigureOut">
               <a:rPr lang="en-US" smtClean="0"/>
-              <a:t>1/27/13</a:t>
+              <a:t>6/21/26</a:t>
             </a:fld>
             <a:endParaRPr lang="en-US"/>
           </a:p>
@@ -2629,10 +2626,9 @@
           <a:lstStyle/>
           <a:p>
             <a:r>
-              <a:rPr lang="en-US" smtClean="0"/>
+              <a:rPr lang="en-US"/>
               <a:t>Click to edit Master title style</a:t>
             </a:r>
-            <a:endParaRPr lang="en-US"/>
           </a:p>
         </p:txBody>
       </p:sp>
@@ -2663,38 +2659,37 @@
           <a:p>
             <a:pPr lvl="0"/>
             <a:r>
-              <a:rPr lang="en-US" smtClean="0"/>
+              <a:rPr lang="en-US"/>
               <a:t>Click to edit Master text styles</a:t>
             </a:r>
           </a:p>
           <a:p>
             <a:pPr lvl="1"/>
             <a:r>
-              <a:rPr lang="en-US" smtClean="0"/>
+              <a:rPr lang="en-US"/>
               <a:t>Second level</a:t>
             </a:r>
           </a:p>
           <a:p>
             <a:pPr lvl="2"/>
             <a:r>
-              <a:rPr lang="en-US" smtClean="0"/>
+              <a:rPr lang="en-US"/>
               <a:t>Third level</a:t>
             </a:r>
           </a:p>
           <a:p>
             <a:pPr lvl="3"/>
             <a:r>
-              <a:rPr lang="en-US" smtClean="0"/>
+              <a:rPr lang="en-US"/>
               <a:t>Fourth level</a:t>
             </a:r>
           </a:p>
           <a:p>
             <a:pPr lvl="4"/>
             <a:r>
-              <a:rPr lang="en-US" smtClean="0"/>
+              <a:rPr lang="en-US"/>
               <a:t>Fifth level</a:t>
             </a:r>
-            <a:endParaRPr lang="en-US"/>
           </a:p>
         </p:txBody>
       </p:sp>
@@ -2733,7 +2728,7 @@
           <a:p>
             <a:fld id="{5BCAD085-E8A6-8845-BD4E-CB4CCA059FC4}" type="datetimeFigureOut">
               <a:rPr lang="en-US" smtClean="0"/>
-              <a:t>1/27/13</a:t>
+              <a:t>6/21/26</a:t>
             </a:fld>
             <a:endParaRPr lang="en-US"/>
           </a:p>
@@ -3092,7 +3087,7 @@
 </file>
 
 <file path=ppt/slides/slide1.xml><?xml version="1.0" encoding="utf-8"?>
-<p:sld xmlns:a="http://schemas.openxmlformats.org/drawingml/2006/main" xmlns:p="http://schemas.openxmlformats.org/presentationml/2006/main" xmlns:r="http://schemas.openxmlformats.org/officeDocument/2006/relationships">
+<p:sld xmlns:a="http://schemas.openxmlformats.org/drawingml/2006/main" xmlns:r="http://schemas.openxmlformats.org/officeDocument/2006/relationships" xmlns:p="http://schemas.openxmlformats.org/presentationml/2006/main">
   <p:cSld>
     <p:spTree>
       <p:nvGrpSpPr>
@@ -3100,7 +3095,14 @@
         <p:cNvGrpSpPr/>
         <p:nvPr/>
       </p:nvGrpSpPr>
-      <p:grpSpPr/>
+      <p:grpSpPr>
+        <a:xfrm>
+          <a:off x="0" y="0"/>
+          <a:ext cx="0" cy="0"/>
+          <a:chOff x="0" y="0"/>
+          <a:chExt cx="0" cy="0"/>
+        </a:xfrm>
+      </p:grpSpPr>
       <p:sp>
         <p:nvSpPr>
           <p:cNvPr id="2" name="Rectangle 1"/>
@@ -3142,6 +3144,7 @@
           <a:lstStyle/>
           <a:p>
             <a:pPr algn="ctr"/>
+            <a:endParaRPr/>
           </a:p>
         </p:txBody>
       </p:sp>
@@ -3186,6 +3189,7 @@
           <a:lstStyle/>
           <a:p>
             <a:pPr algn="ctr"/>
+            <a:endParaRPr/>
           </a:p>
         </p:txBody>
       </p:sp>
@@ -3206,7 +3210,7 @@
           <a:noFill/>
         </p:spPr>
         <p:txBody>
-          <a:bodyPr wrap="square" lIns="45720" rIns="45720" tIns="18288" bIns="18288">
+          <a:bodyPr wrap="square" lIns="45720" tIns="18288" rIns="45720" bIns="18288">
             <a:spAutoFit/>
           </a:bodyPr>
           <a:lstStyle/>
@@ -3241,7 +3245,7 @@
           <a:noFill/>
         </p:spPr>
         <p:txBody>
-          <a:bodyPr wrap="square" lIns="45720" rIns="45720" tIns="18288" bIns="18288">
+          <a:bodyPr wrap="square" lIns="45720" tIns="18288" rIns="45720" bIns="18288">
             <a:spAutoFit/>
           </a:bodyPr>
           <a:lstStyle/>
@@ -3276,7 +3280,7 @@
           <a:noFill/>
         </p:spPr>
         <p:txBody>
-          <a:bodyPr wrap="square" lIns="45720" rIns="45720" tIns="18288" bIns="18288">
+          <a:bodyPr wrap="square" lIns="45720" tIns="18288" rIns="45720" bIns="18288">
             <a:spAutoFit/>
           </a:bodyPr>
           <a:lstStyle/>
@@ -3311,7 +3315,7 @@
           <a:noFill/>
         </p:spPr>
         <p:txBody>
-          <a:bodyPr wrap="square" lIns="45720" rIns="45720" tIns="18288" bIns="18288">
+          <a:bodyPr wrap="square" lIns="45720" tIns="18288" rIns="45720" bIns="18288">
             <a:spAutoFit/>
           </a:bodyPr>
           <a:lstStyle/>
@@ -3346,21 +3350,99 @@
           <a:noFill/>
         </p:spPr>
         <p:txBody>
-          <a:bodyPr wrap="square" lIns="45720" rIns="45720" tIns="18288" bIns="18288">
-            <a:spAutoFit/>
-          </a:bodyPr>
-          <a:lstStyle/>
-          <a:p>
-            <a:pPr algn="l"/>
-            <a:r>
-              <a:rPr sz="1200" b="0">
+          <a:bodyPr wrap="square" lIns="45720" tIns="18288" rIns="45720" bIns="18288">
+            <a:spAutoFit/>
+          </a:bodyPr>
+          <a:lstStyle/>
+          <a:p>
+            <a:pPr algn="l"/>
+            <a:r>
+              <a:rPr sz="1200" b="0" dirty="0" err="1">
                 <a:solidFill>
                   <a:srgbClr val="CFD8E3"/>
                 </a:solidFill>
                 <a:latin typeface="Calibri"/>
               </a:rPr>
-              <a:t>github.com/drchangliu/MicroRTS  ·  drchangliu.github.io/MicroRTS</a:t>
-            </a:r>
+              <a:t>github.com</a:t>
+            </a:r>
+            <a:r>
+              <a:rPr sz="1200" b="0" dirty="0">
+                <a:solidFill>
+                  <a:srgbClr val="CFD8E3"/>
+                </a:solidFill>
+                <a:latin typeface="Calibri"/>
+              </a:rPr>
+              <a:t>/</a:t>
+            </a:r>
+            <a:r>
+              <a:rPr sz="1200" b="0" dirty="0" err="1">
+                <a:solidFill>
+                  <a:srgbClr val="CFD8E3"/>
+                </a:solidFill>
+                <a:latin typeface="Calibri"/>
+              </a:rPr>
+              <a:t>drchangliu</a:t>
+            </a:r>
+            <a:r>
+              <a:rPr sz="1200" b="0" dirty="0">
+                <a:solidFill>
+                  <a:srgbClr val="CFD8E3"/>
+                </a:solidFill>
+                <a:latin typeface="Calibri"/>
+              </a:rPr>
+              <a:t>/</a:t>
+            </a:r>
+            <a:r>
+              <a:rPr sz="1200" b="0" dirty="0" err="1">
+                <a:solidFill>
+                  <a:srgbClr val="CFD8E3"/>
+                </a:solidFill>
+                <a:latin typeface="Calibri"/>
+              </a:rPr>
+              <a:t>MicroRTS</a:t>
+            </a:r>
+            <a:r>
+              <a:rPr sz="1200" b="0" dirty="0">
+                <a:solidFill>
+                  <a:srgbClr val="CFD8E3"/>
+                </a:solidFill>
+                <a:latin typeface="Calibri"/>
+              </a:rPr>
+              <a:t>  ·  </a:t>
+            </a:r>
+            <a:r>
+              <a:rPr sz="1200" b="0" dirty="0" err="1">
+                <a:solidFill>
+                  <a:srgbClr val="CFD8E3"/>
+                </a:solidFill>
+                <a:latin typeface="Calibri"/>
+              </a:rPr>
+              <a:t>drchangliu.github.io</a:t>
+            </a:r>
+            <a:r>
+              <a:rPr sz="1200" b="0" dirty="0">
+                <a:solidFill>
+                  <a:srgbClr val="CFD8E3"/>
+                </a:solidFill>
+                <a:latin typeface="Calibri"/>
+              </a:rPr>
+              <a:t>/</a:t>
+            </a:r>
+            <a:r>
+              <a:rPr sz="1200" b="0" dirty="0" err="1">
+                <a:solidFill>
+                  <a:srgbClr val="CFD8E3"/>
+                </a:solidFill>
+                <a:latin typeface="Calibri"/>
+              </a:rPr>
+              <a:t>MicroRTS</a:t>
+            </a:r>
+            <a:endParaRPr sz="1200" b="0" dirty="0">
+              <a:solidFill>
+                <a:srgbClr val="CFD8E3"/>
+              </a:solidFill>
+              <a:latin typeface="Calibri"/>
+            </a:endParaRPr>
           </a:p>
         </p:txBody>
       </p:sp>
@@ -3373,7 +3455,7 @@
 </file>
 
 <file path=ppt/slides/slide10.xml><?xml version="1.0" encoding="utf-8"?>
-<p:sld xmlns:a="http://schemas.openxmlformats.org/drawingml/2006/main" xmlns:p="http://schemas.openxmlformats.org/presentationml/2006/main" xmlns:r="http://schemas.openxmlformats.org/officeDocument/2006/relationships">
+<p:sld xmlns:a="http://schemas.openxmlformats.org/drawingml/2006/main" xmlns:r="http://schemas.openxmlformats.org/officeDocument/2006/relationships" xmlns:p="http://schemas.openxmlformats.org/presentationml/2006/main">
   <p:cSld>
     <p:spTree>
       <p:nvGrpSpPr>
@@ -3381,7 +3463,14 @@
         <p:cNvGrpSpPr/>
         <p:nvPr/>
       </p:nvGrpSpPr>
-      <p:grpSpPr/>
+      <p:grpSpPr>
+        <a:xfrm>
+          <a:off x="0" y="0"/>
+          <a:ext cx="0" cy="0"/>
+          <a:chOff x="0" y="0"/>
+          <a:chExt cx="0" cy="0"/>
+        </a:xfrm>
+      </p:grpSpPr>
       <p:sp>
         <p:nvSpPr>
           <p:cNvPr id="2" name="Rectangle 1"/>
@@ -3423,6 +3512,7 @@
           <a:lstStyle/>
           <a:p>
             <a:pPr algn="ctr"/>
+            <a:endParaRPr/>
           </a:p>
         </p:txBody>
       </p:sp>
@@ -3467,6 +3557,7 @@
           <a:lstStyle/>
           <a:p>
             <a:pPr algn="ctr"/>
+            <a:endParaRPr/>
           </a:p>
         </p:txBody>
       </p:sp>
@@ -3487,7 +3578,7 @@
           <a:noFill/>
         </p:spPr>
         <p:txBody>
-          <a:bodyPr wrap="square" lIns="45720" rIns="45720" tIns="18288" bIns="18288">
+          <a:bodyPr wrap="square" lIns="45720" tIns="18288" rIns="45720" bIns="18288">
             <a:spAutoFit/>
           </a:bodyPr>
           <a:lstStyle/>
@@ -3522,7 +3613,7 @@
           <a:noFill/>
         </p:spPr>
         <p:txBody>
-          <a:bodyPr wrap="square" lIns="45720" rIns="45720" tIns="18288" bIns="18288">
+          <a:bodyPr wrap="square" lIns="45720" tIns="18288" rIns="45720" bIns="18288">
             <a:spAutoFit/>
           </a:bodyPr>
           <a:lstStyle/>
@@ -3581,6 +3672,7 @@
           <a:lstStyle/>
           <a:p>
             <a:pPr algn="ctr"/>
+            <a:endParaRPr/>
           </a:p>
         </p:txBody>
       </p:sp>
@@ -3625,6 +3717,7 @@
           <a:lstStyle/>
           <a:p>
             <a:pPr algn="ctr"/>
+            <a:endParaRPr/>
           </a:p>
         </p:txBody>
       </p:sp>
@@ -3645,7 +3738,7 @@
           <a:noFill/>
         </p:spPr>
         <p:txBody>
-          <a:bodyPr wrap="square" lIns="45720" rIns="45720" tIns="18288" bIns="18288">
+          <a:bodyPr wrap="square" lIns="45720" tIns="18288" rIns="45720" bIns="18288">
             <a:spAutoFit/>
           </a:bodyPr>
           <a:lstStyle/>
@@ -3680,7 +3773,7 @@
           <a:noFill/>
         </p:spPr>
         <p:txBody>
-          <a:bodyPr wrap="square" lIns="45720" rIns="45720" tIns="18288" bIns="18288">
+          <a:bodyPr wrap="square" lIns="45720" tIns="18288" rIns="45720" bIns="18288">
             <a:spAutoFit/>
           </a:bodyPr>
           <a:lstStyle/>
@@ -3715,7 +3808,7 @@
           <a:noFill/>
         </p:spPr>
         <p:txBody>
-          <a:bodyPr wrap="square" lIns="45720" rIns="45720" tIns="18288" bIns="18288">
+          <a:bodyPr wrap="square" lIns="45720" tIns="18288" rIns="45720" bIns="18288">
             <a:spAutoFit/>
           </a:bodyPr>
           <a:lstStyle/>
@@ -3750,7 +3843,7 @@
           <a:noFill/>
         </p:spPr>
         <p:txBody>
-          <a:bodyPr wrap="square" lIns="45720" rIns="45720" tIns="18288" bIns="18288">
+          <a:bodyPr wrap="square" lIns="45720" tIns="18288" rIns="45720" bIns="18288">
             <a:spAutoFit/>
           </a:bodyPr>
           <a:lstStyle/>
@@ -3785,7 +3878,7 @@
           <a:noFill/>
         </p:spPr>
         <p:txBody>
-          <a:bodyPr wrap="square" lIns="45720" rIns="45720" tIns="18288" bIns="18288">
+          <a:bodyPr wrap="square" lIns="45720" tIns="18288" rIns="45720" bIns="18288">
             <a:spAutoFit/>
           </a:bodyPr>
           <a:lstStyle/>
@@ -3820,7 +3913,7 @@
           <a:noFill/>
         </p:spPr>
         <p:txBody>
-          <a:bodyPr wrap="square" lIns="45720" rIns="45720" tIns="18288" bIns="18288">
+          <a:bodyPr wrap="square" lIns="45720" tIns="18288" rIns="45720" bIns="18288">
             <a:spAutoFit/>
           </a:bodyPr>
           <a:lstStyle/>
@@ -3855,7 +3948,7 @@
           <a:noFill/>
         </p:spPr>
         <p:txBody>
-          <a:bodyPr wrap="square" lIns="45720" rIns="45720" tIns="18288" bIns="18288">
+          <a:bodyPr wrap="square" lIns="45720" tIns="18288" rIns="45720" bIns="18288">
             <a:spAutoFit/>
           </a:bodyPr>
           <a:lstStyle/>
@@ -3890,7 +3983,7 @@
           <a:noFill/>
         </p:spPr>
         <p:txBody>
-          <a:bodyPr wrap="square" lIns="45720" rIns="45720" tIns="18288" bIns="18288">
+          <a:bodyPr wrap="square" lIns="45720" tIns="18288" rIns="45720" bIns="18288">
             <a:spAutoFit/>
           </a:bodyPr>
           <a:lstStyle/>
@@ -3925,7 +4018,7 @@
           <a:noFill/>
         </p:spPr>
         <p:txBody>
-          <a:bodyPr wrap="square" lIns="45720" rIns="45720" tIns="18288" bIns="18288">
+          <a:bodyPr wrap="square" lIns="45720" tIns="18288" rIns="45720" bIns="18288">
             <a:spAutoFit/>
           </a:bodyPr>
           <a:lstStyle/>
@@ -3984,6 +4077,7 @@
           <a:lstStyle/>
           <a:p>
             <a:pPr algn="ctr"/>
+            <a:endParaRPr/>
           </a:p>
         </p:txBody>
       </p:sp>
@@ -4028,6 +4122,7 @@
           <a:lstStyle/>
           <a:p>
             <a:pPr algn="ctr"/>
+            <a:endParaRPr/>
           </a:p>
         </p:txBody>
       </p:sp>
@@ -4048,7 +4143,7 @@
           <a:noFill/>
         </p:spPr>
         <p:txBody>
-          <a:bodyPr wrap="square" lIns="45720" rIns="45720" tIns="18288" bIns="18288">
+          <a:bodyPr wrap="square" lIns="45720" tIns="18288" rIns="45720" bIns="18288">
             <a:spAutoFit/>
           </a:bodyPr>
           <a:lstStyle/>
@@ -4083,7 +4178,7 @@
           <a:noFill/>
         </p:spPr>
         <p:txBody>
-          <a:bodyPr wrap="square" lIns="45720" rIns="45720" tIns="18288" bIns="18288">
+          <a:bodyPr wrap="square" lIns="45720" tIns="18288" rIns="45720" bIns="18288">
             <a:spAutoFit/>
           </a:bodyPr>
           <a:lstStyle/>
@@ -4118,7 +4213,7 @@
           <a:noFill/>
         </p:spPr>
         <p:txBody>
-          <a:bodyPr wrap="square" lIns="45720" rIns="45720" tIns="18288" bIns="18288">
+          <a:bodyPr wrap="square" lIns="45720" tIns="18288" rIns="45720" bIns="18288">
             <a:spAutoFit/>
           </a:bodyPr>
           <a:lstStyle/>
@@ -4153,7 +4248,7 @@
           <a:noFill/>
         </p:spPr>
         <p:txBody>
-          <a:bodyPr wrap="square" lIns="45720" rIns="45720" tIns="18288" bIns="18288">
+          <a:bodyPr wrap="square" lIns="45720" tIns="18288" rIns="45720" bIns="18288">
             <a:spAutoFit/>
           </a:bodyPr>
           <a:lstStyle/>
@@ -4188,7 +4283,7 @@
           <a:noFill/>
         </p:spPr>
         <p:txBody>
-          <a:bodyPr wrap="square" lIns="45720" rIns="45720" tIns="18288" bIns="18288">
+          <a:bodyPr wrap="square" lIns="45720" tIns="18288" rIns="45720" bIns="18288">
             <a:spAutoFit/>
           </a:bodyPr>
           <a:lstStyle/>
@@ -4223,7 +4318,7 @@
           <a:noFill/>
         </p:spPr>
         <p:txBody>
-          <a:bodyPr wrap="square" lIns="45720" rIns="45720" tIns="18288" bIns="18288">
+          <a:bodyPr wrap="square" lIns="45720" tIns="18288" rIns="45720" bIns="18288">
             <a:spAutoFit/>
           </a:bodyPr>
           <a:lstStyle/>
@@ -4258,7 +4353,7 @@
           <a:noFill/>
         </p:spPr>
         <p:txBody>
-          <a:bodyPr wrap="square" lIns="45720" rIns="45720" tIns="18288" bIns="18288">
+          <a:bodyPr wrap="square" lIns="45720" tIns="18288" rIns="45720" bIns="18288">
             <a:spAutoFit/>
           </a:bodyPr>
           <a:lstStyle/>
@@ -4293,7 +4388,7 @@
           <a:noFill/>
         </p:spPr>
         <p:txBody>
-          <a:bodyPr wrap="square" lIns="45720" rIns="45720" tIns="18288" bIns="18288">
+          <a:bodyPr wrap="square" lIns="45720" tIns="18288" rIns="45720" bIns="18288">
             <a:spAutoFit/>
           </a:bodyPr>
           <a:lstStyle/>
@@ -4328,7 +4423,7 @@
           <a:noFill/>
         </p:spPr>
         <p:txBody>
-          <a:bodyPr wrap="square" lIns="45720" rIns="45720" tIns="18288" bIns="18288">
+          <a:bodyPr wrap="square" lIns="45720" tIns="18288" rIns="45720" bIns="18288">
             <a:spAutoFit/>
           </a:bodyPr>
           <a:lstStyle/>
@@ -4363,7 +4458,7 @@
           <a:noFill/>
         </p:spPr>
         <p:txBody>
-          <a:bodyPr wrap="square" lIns="45720" rIns="45720" tIns="18288" bIns="18288">
+          <a:bodyPr wrap="square" lIns="45720" tIns="18288" rIns="45720" bIns="18288">
             <a:spAutoFit/>
           </a:bodyPr>
           <a:lstStyle/>
@@ -4398,7 +4493,7 @@
           <a:noFill/>
         </p:spPr>
         <p:txBody>
-          <a:bodyPr wrap="square" lIns="45720" rIns="45720" tIns="18288" bIns="18288">
+          <a:bodyPr wrap="square" lIns="45720" tIns="18288" rIns="45720" bIns="18288">
             <a:spAutoFit/>
           </a:bodyPr>
           <a:lstStyle/>
@@ -4425,7 +4520,7 @@
 </file>
 
 <file path=ppt/slides/slide11.xml><?xml version="1.0" encoding="utf-8"?>
-<p:sld xmlns:a="http://schemas.openxmlformats.org/drawingml/2006/main" xmlns:p="http://schemas.openxmlformats.org/presentationml/2006/main" xmlns:r="http://schemas.openxmlformats.org/officeDocument/2006/relationships">
+<p:sld xmlns:a="http://schemas.openxmlformats.org/drawingml/2006/main" xmlns:r="http://schemas.openxmlformats.org/officeDocument/2006/relationships" xmlns:p="http://schemas.openxmlformats.org/presentationml/2006/main">
   <p:cSld>
     <p:spTree>
       <p:nvGrpSpPr>
@@ -4433,7 +4528,14 @@
         <p:cNvGrpSpPr/>
         <p:nvPr/>
       </p:nvGrpSpPr>
-      <p:grpSpPr/>
+      <p:grpSpPr>
+        <a:xfrm>
+          <a:off x="0" y="0"/>
+          <a:ext cx="0" cy="0"/>
+          <a:chOff x="0" y="0"/>
+          <a:chExt cx="0" cy="0"/>
+        </a:xfrm>
+      </p:grpSpPr>
       <p:sp>
         <p:nvSpPr>
           <p:cNvPr id="2" name="Rectangle 1"/>
@@ -4475,6 +4577,7 @@
           <a:lstStyle/>
           <a:p>
             <a:pPr algn="ctr"/>
+            <a:endParaRPr/>
           </a:p>
         </p:txBody>
       </p:sp>
@@ -4519,6 +4622,7 @@
           <a:lstStyle/>
           <a:p>
             <a:pPr algn="ctr"/>
+            <a:endParaRPr/>
           </a:p>
         </p:txBody>
       </p:sp>
@@ -4539,7 +4643,7 @@
           <a:noFill/>
         </p:spPr>
         <p:txBody>
-          <a:bodyPr wrap="square" lIns="45720" rIns="45720" tIns="18288" bIns="18288">
+          <a:bodyPr wrap="square" lIns="45720" tIns="18288" rIns="45720" bIns="18288">
             <a:spAutoFit/>
           </a:bodyPr>
           <a:lstStyle/>
@@ -4574,7 +4678,7 @@
           <a:noFill/>
         </p:spPr>
         <p:txBody>
-          <a:bodyPr wrap="square" lIns="45720" rIns="45720" tIns="18288" bIns="18288">
+          <a:bodyPr wrap="square" lIns="45720" tIns="18288" rIns="45720" bIns="18288">
             <a:spAutoFit/>
           </a:bodyPr>
           <a:lstStyle/>
@@ -4635,6 +4739,7 @@
           <a:lstStyle/>
           <a:p>
             <a:pPr algn="ctr"/>
+            <a:endParaRPr/>
           </a:p>
         </p:txBody>
       </p:sp>
@@ -4655,7 +4760,7 @@
           <a:noFill/>
         </p:spPr>
         <p:txBody>
-          <a:bodyPr wrap="square" lIns="45720" rIns="45720" tIns="18288" bIns="18288">
+          <a:bodyPr wrap="square" lIns="45720" tIns="18288" rIns="45720" bIns="18288">
             <a:spAutoFit/>
           </a:bodyPr>
           <a:lstStyle/>
@@ -4716,6 +4821,7 @@
           <a:lstStyle/>
           <a:p>
             <a:pPr algn="ctr"/>
+            <a:endParaRPr/>
           </a:p>
         </p:txBody>
       </p:sp>
@@ -4736,7 +4842,7 @@
           <a:noFill/>
         </p:spPr>
         <p:txBody>
-          <a:bodyPr wrap="square" lIns="45720" rIns="45720" tIns="18288" bIns="18288">
+          <a:bodyPr wrap="square" lIns="45720" tIns="18288" rIns="45720" bIns="18288">
             <a:spAutoFit/>
           </a:bodyPr>
           <a:lstStyle/>
@@ -4797,6 +4903,7 @@
           <a:lstStyle/>
           <a:p>
             <a:pPr algn="ctr"/>
+            <a:endParaRPr/>
           </a:p>
         </p:txBody>
       </p:sp>
@@ -4817,7 +4924,7 @@
           <a:noFill/>
         </p:spPr>
         <p:txBody>
-          <a:bodyPr wrap="square" lIns="45720" rIns="45720" tIns="18288" bIns="18288">
+          <a:bodyPr wrap="square" lIns="45720" tIns="18288" rIns="45720" bIns="18288">
             <a:spAutoFit/>
           </a:bodyPr>
           <a:lstStyle/>
@@ -4878,6 +4985,7 @@
           <a:lstStyle/>
           <a:p>
             <a:pPr algn="ctr"/>
+            <a:endParaRPr/>
           </a:p>
         </p:txBody>
       </p:sp>
@@ -4898,7 +5006,7 @@
           <a:noFill/>
         </p:spPr>
         <p:txBody>
-          <a:bodyPr wrap="square" lIns="45720" rIns="45720" tIns="18288" bIns="18288">
+          <a:bodyPr wrap="square" lIns="45720" tIns="18288" rIns="45720" bIns="18288">
             <a:spAutoFit/>
           </a:bodyPr>
           <a:lstStyle/>
@@ -4959,6 +5067,7 @@
           <a:lstStyle/>
           <a:p>
             <a:pPr algn="ctr"/>
+            <a:endParaRPr/>
           </a:p>
         </p:txBody>
       </p:sp>
@@ -4979,7 +5088,7 @@
           <a:noFill/>
         </p:spPr>
         <p:txBody>
-          <a:bodyPr wrap="square" lIns="45720" rIns="45720" tIns="18288" bIns="18288">
+          <a:bodyPr wrap="square" lIns="45720" tIns="18288" rIns="45720" bIns="18288">
             <a:spAutoFit/>
           </a:bodyPr>
           <a:lstStyle/>
@@ -5040,6 +5149,7 @@
           <a:lstStyle/>
           <a:p>
             <a:pPr algn="ctr"/>
+            <a:endParaRPr/>
           </a:p>
         </p:txBody>
       </p:sp>
@@ -5060,7 +5170,7 @@
           <a:noFill/>
         </p:spPr>
         <p:txBody>
-          <a:bodyPr wrap="square" lIns="45720" rIns="45720" tIns="18288" bIns="18288">
+          <a:bodyPr wrap="square" lIns="45720" tIns="18288" rIns="45720" bIns="18288">
             <a:spAutoFit/>
           </a:bodyPr>
           <a:lstStyle/>
@@ -5121,6 +5231,7 @@
           <a:lstStyle/>
           <a:p>
             <a:pPr algn="ctr"/>
+            <a:endParaRPr/>
           </a:p>
         </p:txBody>
       </p:sp>
@@ -5141,7 +5252,7 @@
           <a:noFill/>
         </p:spPr>
         <p:txBody>
-          <a:bodyPr wrap="square" lIns="45720" rIns="45720" tIns="18288" bIns="18288">
+          <a:bodyPr wrap="square" lIns="45720" tIns="18288" rIns="45720" bIns="18288">
             <a:spAutoFit/>
           </a:bodyPr>
           <a:lstStyle/>
@@ -5214,6 +5325,7 @@
           <a:lstStyle/>
           <a:p>
             <a:pPr algn="ctr"/>
+            <a:endParaRPr/>
           </a:p>
         </p:txBody>
       </p:sp>
@@ -5234,7 +5346,7 @@
           <a:noFill/>
         </p:spPr>
         <p:txBody>
-          <a:bodyPr wrap="square" lIns="45720" rIns="45720" tIns="18288" bIns="18288">
+          <a:bodyPr wrap="square" lIns="45720" tIns="18288" rIns="45720" bIns="18288">
             <a:spAutoFit/>
           </a:bodyPr>
           <a:lstStyle/>
@@ -5307,6 +5419,7 @@
           <a:lstStyle/>
           <a:p>
             <a:pPr algn="ctr"/>
+            <a:endParaRPr/>
           </a:p>
         </p:txBody>
       </p:sp>
@@ -5327,7 +5440,7 @@
           <a:noFill/>
         </p:spPr>
         <p:txBody>
-          <a:bodyPr wrap="square" lIns="45720" rIns="45720" tIns="18288" bIns="18288">
+          <a:bodyPr wrap="square" lIns="45720" tIns="18288" rIns="45720" bIns="18288">
             <a:spAutoFit/>
           </a:bodyPr>
           <a:lstStyle/>
@@ -5400,6 +5513,7 @@
           <a:lstStyle/>
           <a:p>
             <a:pPr algn="ctr"/>
+            <a:endParaRPr/>
           </a:p>
         </p:txBody>
       </p:sp>
@@ -5420,7 +5534,7 @@
           <a:noFill/>
         </p:spPr>
         <p:txBody>
-          <a:bodyPr wrap="square" lIns="45720" rIns="45720" tIns="18288" bIns="18288">
+          <a:bodyPr wrap="square" lIns="45720" tIns="18288" rIns="45720" bIns="18288">
             <a:spAutoFit/>
           </a:bodyPr>
           <a:lstStyle/>
@@ -5493,6 +5607,7 @@
           <a:lstStyle/>
           <a:p>
             <a:pPr algn="ctr"/>
+            <a:endParaRPr/>
           </a:p>
         </p:txBody>
       </p:sp>
@@ -5513,7 +5628,7 @@
           <a:noFill/>
         </p:spPr>
         <p:txBody>
-          <a:bodyPr wrap="square" lIns="45720" rIns="45720" tIns="18288" bIns="18288">
+          <a:bodyPr wrap="square" lIns="45720" tIns="18288" rIns="45720" bIns="18288">
             <a:spAutoFit/>
           </a:bodyPr>
           <a:lstStyle/>
@@ -5574,6 +5689,7 @@
           <a:lstStyle/>
           <a:p>
             <a:pPr algn="ctr"/>
+            <a:endParaRPr/>
           </a:p>
         </p:txBody>
       </p:sp>
@@ -5594,7 +5710,7 @@
           <a:noFill/>
         </p:spPr>
         <p:txBody>
-          <a:bodyPr wrap="square" lIns="45720" rIns="45720" tIns="18288" bIns="18288">
+          <a:bodyPr wrap="square" lIns="45720" tIns="18288" rIns="45720" bIns="18288">
             <a:spAutoFit/>
           </a:bodyPr>
           <a:lstStyle/>
@@ -5667,6 +5783,7 @@
           <a:lstStyle/>
           <a:p>
             <a:pPr algn="ctr"/>
+            <a:endParaRPr/>
           </a:p>
         </p:txBody>
       </p:sp>
@@ -5687,7 +5804,7 @@
           <a:noFill/>
         </p:spPr>
         <p:txBody>
-          <a:bodyPr wrap="square" lIns="45720" rIns="45720" tIns="18288" bIns="18288">
+          <a:bodyPr wrap="square" lIns="45720" tIns="18288" rIns="45720" bIns="18288">
             <a:spAutoFit/>
           </a:bodyPr>
           <a:lstStyle/>
@@ -5760,6 +5877,7 @@
           <a:lstStyle/>
           <a:p>
             <a:pPr algn="ctr"/>
+            <a:endParaRPr/>
           </a:p>
         </p:txBody>
       </p:sp>
@@ -5780,7 +5898,7 @@
           <a:noFill/>
         </p:spPr>
         <p:txBody>
-          <a:bodyPr wrap="square" lIns="45720" rIns="45720" tIns="18288" bIns="18288">
+          <a:bodyPr wrap="square" lIns="45720" tIns="18288" rIns="45720" bIns="18288">
             <a:spAutoFit/>
           </a:bodyPr>
           <a:lstStyle/>
@@ -5841,6 +5959,7 @@
           <a:lstStyle/>
           <a:p>
             <a:pPr algn="ctr"/>
+            <a:endParaRPr/>
           </a:p>
         </p:txBody>
       </p:sp>
@@ -5861,7 +5980,7 @@
           <a:noFill/>
         </p:spPr>
         <p:txBody>
-          <a:bodyPr wrap="square" lIns="45720" rIns="45720" tIns="18288" bIns="18288">
+          <a:bodyPr wrap="square" lIns="45720" tIns="18288" rIns="45720" bIns="18288">
             <a:spAutoFit/>
           </a:bodyPr>
           <a:lstStyle/>
@@ -5922,6 +6041,7 @@
           <a:lstStyle/>
           <a:p>
             <a:pPr algn="ctr"/>
+            <a:endParaRPr/>
           </a:p>
         </p:txBody>
       </p:sp>
@@ -5942,7 +6062,7 @@
           <a:noFill/>
         </p:spPr>
         <p:txBody>
-          <a:bodyPr wrap="square" lIns="45720" rIns="45720" tIns="18288" bIns="18288">
+          <a:bodyPr wrap="square" lIns="45720" tIns="18288" rIns="45720" bIns="18288">
             <a:spAutoFit/>
           </a:bodyPr>
           <a:lstStyle/>
@@ -6003,6 +6123,7 @@
           <a:lstStyle/>
           <a:p>
             <a:pPr algn="ctr"/>
+            <a:endParaRPr/>
           </a:p>
         </p:txBody>
       </p:sp>
@@ -6023,7 +6144,7 @@
           <a:noFill/>
         </p:spPr>
         <p:txBody>
-          <a:bodyPr wrap="square" lIns="45720" rIns="45720" tIns="18288" bIns="18288">
+          <a:bodyPr wrap="square" lIns="45720" tIns="18288" rIns="45720" bIns="18288">
             <a:spAutoFit/>
           </a:bodyPr>
           <a:lstStyle/>
@@ -6096,6 +6217,7 @@
           <a:lstStyle/>
           <a:p>
             <a:pPr algn="ctr"/>
+            <a:endParaRPr/>
           </a:p>
         </p:txBody>
       </p:sp>
@@ -6116,7 +6238,7 @@
           <a:noFill/>
         </p:spPr>
         <p:txBody>
-          <a:bodyPr wrap="square" lIns="45720" rIns="45720" tIns="18288" bIns="18288">
+          <a:bodyPr wrap="square" lIns="45720" tIns="18288" rIns="45720" bIns="18288">
             <a:spAutoFit/>
           </a:bodyPr>
           <a:lstStyle/>
@@ -6177,6 +6299,7 @@
           <a:lstStyle/>
           <a:p>
             <a:pPr algn="ctr"/>
+            <a:endParaRPr/>
           </a:p>
         </p:txBody>
       </p:sp>
@@ -6197,7 +6320,7 @@
           <a:noFill/>
         </p:spPr>
         <p:txBody>
-          <a:bodyPr wrap="square" lIns="45720" rIns="45720" tIns="18288" bIns="18288">
+          <a:bodyPr wrap="square" lIns="45720" tIns="18288" rIns="45720" bIns="18288">
             <a:spAutoFit/>
           </a:bodyPr>
           <a:lstStyle/>
@@ -6258,6 +6381,7 @@
           <a:lstStyle/>
           <a:p>
             <a:pPr algn="ctr"/>
+            <a:endParaRPr/>
           </a:p>
         </p:txBody>
       </p:sp>
@@ -6278,7 +6402,7 @@
           <a:noFill/>
         </p:spPr>
         <p:txBody>
-          <a:bodyPr wrap="square" lIns="45720" rIns="45720" tIns="18288" bIns="18288">
+          <a:bodyPr wrap="square" lIns="45720" tIns="18288" rIns="45720" bIns="18288">
             <a:spAutoFit/>
           </a:bodyPr>
           <a:lstStyle/>
@@ -6339,6 +6463,7 @@
           <a:lstStyle/>
           <a:p>
             <a:pPr algn="ctr"/>
+            <a:endParaRPr/>
           </a:p>
         </p:txBody>
       </p:sp>
@@ -6359,7 +6484,7 @@
           <a:noFill/>
         </p:spPr>
         <p:txBody>
-          <a:bodyPr wrap="square" lIns="45720" rIns="45720" tIns="18288" bIns="18288">
+          <a:bodyPr wrap="square" lIns="45720" tIns="18288" rIns="45720" bIns="18288">
             <a:spAutoFit/>
           </a:bodyPr>
           <a:lstStyle/>
@@ -6420,6 +6545,7 @@
           <a:lstStyle/>
           <a:p>
             <a:pPr algn="ctr"/>
+            <a:endParaRPr/>
           </a:p>
         </p:txBody>
       </p:sp>
@@ -6440,7 +6566,7 @@
           <a:noFill/>
         </p:spPr>
         <p:txBody>
-          <a:bodyPr wrap="square" lIns="45720" rIns="45720" tIns="18288" bIns="18288">
+          <a:bodyPr wrap="square" lIns="45720" tIns="18288" rIns="45720" bIns="18288">
             <a:spAutoFit/>
           </a:bodyPr>
           <a:lstStyle/>
@@ -6513,6 +6639,7 @@
           <a:lstStyle/>
           <a:p>
             <a:pPr algn="ctr"/>
+            <a:endParaRPr/>
           </a:p>
         </p:txBody>
       </p:sp>
@@ -6533,7 +6660,7 @@
           <a:noFill/>
         </p:spPr>
         <p:txBody>
-          <a:bodyPr wrap="square" lIns="45720" rIns="45720" tIns="18288" bIns="18288">
+          <a:bodyPr wrap="square" lIns="45720" tIns="18288" rIns="45720" bIns="18288">
             <a:spAutoFit/>
           </a:bodyPr>
           <a:lstStyle/>
@@ -6594,6 +6721,7 @@
           <a:lstStyle/>
           <a:p>
             <a:pPr algn="ctr"/>
+            <a:endParaRPr/>
           </a:p>
         </p:txBody>
       </p:sp>
@@ -6614,7 +6742,7 @@
           <a:noFill/>
         </p:spPr>
         <p:txBody>
-          <a:bodyPr wrap="square" lIns="45720" rIns="45720" tIns="18288" bIns="18288">
+          <a:bodyPr wrap="square" lIns="45720" tIns="18288" rIns="45720" bIns="18288">
             <a:spAutoFit/>
           </a:bodyPr>
           <a:lstStyle/>
@@ -6675,6 +6803,7 @@
           <a:lstStyle/>
           <a:p>
             <a:pPr algn="ctr"/>
+            <a:endParaRPr/>
           </a:p>
         </p:txBody>
       </p:sp>
@@ -6695,7 +6824,7 @@
           <a:noFill/>
         </p:spPr>
         <p:txBody>
-          <a:bodyPr wrap="square" lIns="45720" rIns="45720" tIns="18288" bIns="18288">
+          <a:bodyPr wrap="square" lIns="45720" tIns="18288" rIns="45720" bIns="18288">
             <a:spAutoFit/>
           </a:bodyPr>
           <a:lstStyle/>
@@ -6756,6 +6885,7 @@
           <a:lstStyle/>
           <a:p>
             <a:pPr algn="ctr"/>
+            <a:endParaRPr/>
           </a:p>
         </p:txBody>
       </p:sp>
@@ -6776,7 +6906,7 @@
           <a:noFill/>
         </p:spPr>
         <p:txBody>
-          <a:bodyPr wrap="square" lIns="45720" rIns="45720" tIns="18288" bIns="18288">
+          <a:bodyPr wrap="square" lIns="45720" tIns="18288" rIns="45720" bIns="18288">
             <a:spAutoFit/>
           </a:bodyPr>
           <a:lstStyle/>
@@ -6837,6 +6967,7 @@
           <a:lstStyle/>
           <a:p>
             <a:pPr algn="ctr"/>
+            <a:endParaRPr/>
           </a:p>
         </p:txBody>
       </p:sp>
@@ -6857,7 +6988,7 @@
           <a:noFill/>
         </p:spPr>
         <p:txBody>
-          <a:bodyPr wrap="square" lIns="45720" rIns="45720" tIns="18288" bIns="18288">
+          <a:bodyPr wrap="square" lIns="45720" tIns="18288" rIns="45720" bIns="18288">
             <a:spAutoFit/>
           </a:bodyPr>
           <a:lstStyle/>
@@ -6930,6 +7061,7 @@
           <a:lstStyle/>
           <a:p>
             <a:pPr algn="ctr"/>
+            <a:endParaRPr/>
           </a:p>
         </p:txBody>
       </p:sp>
@@ -6950,7 +7082,7 @@
           <a:noFill/>
         </p:spPr>
         <p:txBody>
-          <a:bodyPr wrap="square" lIns="45720" rIns="45720" tIns="18288" bIns="18288">
+          <a:bodyPr wrap="square" lIns="45720" tIns="18288" rIns="45720" bIns="18288">
             <a:spAutoFit/>
           </a:bodyPr>
           <a:lstStyle/>
@@ -7011,6 +7143,7 @@
           <a:lstStyle/>
           <a:p>
             <a:pPr algn="ctr"/>
+            <a:endParaRPr/>
           </a:p>
         </p:txBody>
       </p:sp>
@@ -7031,7 +7164,7 @@
           <a:noFill/>
         </p:spPr>
         <p:txBody>
-          <a:bodyPr wrap="square" lIns="45720" rIns="45720" tIns="18288" bIns="18288">
+          <a:bodyPr wrap="square" lIns="45720" tIns="18288" rIns="45720" bIns="18288">
             <a:spAutoFit/>
           </a:bodyPr>
           <a:lstStyle/>
@@ -7092,6 +7225,7 @@
           <a:lstStyle/>
           <a:p>
             <a:pPr algn="ctr"/>
+            <a:endParaRPr/>
           </a:p>
         </p:txBody>
       </p:sp>
@@ -7112,7 +7246,7 @@
           <a:noFill/>
         </p:spPr>
         <p:txBody>
-          <a:bodyPr wrap="square" lIns="45720" rIns="45720" tIns="18288" bIns="18288">
+          <a:bodyPr wrap="square" lIns="45720" tIns="18288" rIns="45720" bIns="18288">
             <a:spAutoFit/>
           </a:bodyPr>
           <a:lstStyle/>
@@ -7173,6 +7307,7 @@
           <a:lstStyle/>
           <a:p>
             <a:pPr algn="ctr"/>
+            <a:endParaRPr/>
           </a:p>
         </p:txBody>
       </p:sp>
@@ -7193,7 +7328,7 @@
           <a:noFill/>
         </p:spPr>
         <p:txBody>
-          <a:bodyPr wrap="square" lIns="45720" rIns="45720" tIns="18288" bIns="18288">
+          <a:bodyPr wrap="square" lIns="45720" tIns="18288" rIns="45720" bIns="18288">
             <a:spAutoFit/>
           </a:bodyPr>
           <a:lstStyle/>
@@ -7254,6 +7389,7 @@
           <a:lstStyle/>
           <a:p>
             <a:pPr algn="ctr"/>
+            <a:endParaRPr/>
           </a:p>
         </p:txBody>
       </p:sp>
@@ -7274,7 +7410,7 @@
           <a:noFill/>
         </p:spPr>
         <p:txBody>
-          <a:bodyPr wrap="square" lIns="45720" rIns="45720" tIns="18288" bIns="18288">
+          <a:bodyPr wrap="square" lIns="45720" tIns="18288" rIns="45720" bIns="18288">
             <a:spAutoFit/>
           </a:bodyPr>
           <a:lstStyle/>
@@ -7347,6 +7483,7 @@
           <a:lstStyle/>
           <a:p>
             <a:pPr algn="ctr"/>
+            <a:endParaRPr/>
           </a:p>
         </p:txBody>
       </p:sp>
@@ -7367,7 +7504,7 @@
           <a:noFill/>
         </p:spPr>
         <p:txBody>
-          <a:bodyPr wrap="square" lIns="45720" rIns="45720" tIns="18288" bIns="18288">
+          <a:bodyPr wrap="square" lIns="45720" tIns="18288" rIns="45720" bIns="18288">
             <a:spAutoFit/>
           </a:bodyPr>
           <a:lstStyle/>
@@ -7440,6 +7577,7 @@
           <a:lstStyle/>
           <a:p>
             <a:pPr algn="ctr"/>
+            <a:endParaRPr/>
           </a:p>
         </p:txBody>
       </p:sp>
@@ -7460,7 +7598,7 @@
           <a:noFill/>
         </p:spPr>
         <p:txBody>
-          <a:bodyPr wrap="square" lIns="45720" rIns="45720" tIns="18288" bIns="18288">
+          <a:bodyPr wrap="square" lIns="45720" tIns="18288" rIns="45720" bIns="18288">
             <a:spAutoFit/>
           </a:bodyPr>
           <a:lstStyle/>
@@ -7521,6 +7659,7 @@
           <a:lstStyle/>
           <a:p>
             <a:pPr algn="ctr"/>
+            <a:endParaRPr/>
           </a:p>
         </p:txBody>
       </p:sp>
@@ -7541,7 +7680,7 @@
           <a:noFill/>
         </p:spPr>
         <p:txBody>
-          <a:bodyPr wrap="square" lIns="45720" rIns="45720" tIns="18288" bIns="18288">
+          <a:bodyPr wrap="square" lIns="45720" tIns="18288" rIns="45720" bIns="18288">
             <a:spAutoFit/>
           </a:bodyPr>
           <a:lstStyle/>
@@ -7602,6 +7741,7 @@
           <a:lstStyle/>
           <a:p>
             <a:pPr algn="ctr"/>
+            <a:endParaRPr/>
           </a:p>
         </p:txBody>
       </p:sp>
@@ -7622,7 +7762,7 @@
           <a:noFill/>
         </p:spPr>
         <p:txBody>
-          <a:bodyPr wrap="square" lIns="45720" rIns="45720" tIns="18288" bIns="18288">
+          <a:bodyPr wrap="square" lIns="45720" tIns="18288" rIns="45720" bIns="18288">
             <a:spAutoFit/>
           </a:bodyPr>
           <a:lstStyle/>
@@ -7683,6 +7823,7 @@
           <a:lstStyle/>
           <a:p>
             <a:pPr algn="ctr"/>
+            <a:endParaRPr/>
           </a:p>
         </p:txBody>
       </p:sp>
@@ -7703,7 +7844,7 @@
           <a:noFill/>
         </p:spPr>
         <p:txBody>
-          <a:bodyPr wrap="square" lIns="45720" rIns="45720" tIns="18288" bIns="18288">
+          <a:bodyPr wrap="square" lIns="45720" tIns="18288" rIns="45720" bIns="18288">
             <a:spAutoFit/>
           </a:bodyPr>
           <a:lstStyle/>
@@ -7776,6 +7917,7 @@
           <a:lstStyle/>
           <a:p>
             <a:pPr algn="ctr"/>
+            <a:endParaRPr/>
           </a:p>
         </p:txBody>
       </p:sp>
@@ -7796,7 +7938,7 @@
           <a:noFill/>
         </p:spPr>
         <p:txBody>
-          <a:bodyPr wrap="square" lIns="45720" rIns="45720" tIns="18288" bIns="18288">
+          <a:bodyPr wrap="square" lIns="45720" tIns="18288" rIns="45720" bIns="18288">
             <a:spAutoFit/>
           </a:bodyPr>
           <a:lstStyle/>
@@ -7869,6 +8011,7 @@
           <a:lstStyle/>
           <a:p>
             <a:pPr algn="ctr"/>
+            <a:endParaRPr/>
           </a:p>
         </p:txBody>
       </p:sp>
@@ -7889,7 +8032,7 @@
           <a:noFill/>
         </p:spPr>
         <p:txBody>
-          <a:bodyPr wrap="square" lIns="45720" rIns="45720" tIns="18288" bIns="18288">
+          <a:bodyPr wrap="square" lIns="45720" tIns="18288" rIns="45720" bIns="18288">
             <a:spAutoFit/>
           </a:bodyPr>
           <a:lstStyle/>
@@ -7962,6 +8105,7 @@
           <a:lstStyle/>
           <a:p>
             <a:pPr algn="ctr"/>
+            <a:endParaRPr/>
           </a:p>
         </p:txBody>
       </p:sp>
@@ -7982,7 +8126,7 @@
           <a:noFill/>
         </p:spPr>
         <p:txBody>
-          <a:bodyPr wrap="square" lIns="45720" rIns="45720" tIns="18288" bIns="18288">
+          <a:bodyPr wrap="square" lIns="45720" tIns="18288" rIns="45720" bIns="18288">
             <a:spAutoFit/>
           </a:bodyPr>
           <a:lstStyle/>
@@ -8029,7 +8173,7 @@
           <a:noFill/>
         </p:spPr>
         <p:txBody>
-          <a:bodyPr wrap="square" lIns="45720" rIns="45720" tIns="18288" bIns="18288">
+          <a:bodyPr wrap="square" lIns="45720" tIns="18288" rIns="45720" bIns="18288">
             <a:spAutoFit/>
           </a:bodyPr>
           <a:lstStyle/>
@@ -8064,7 +8208,7 @@
           <a:noFill/>
         </p:spPr>
         <p:txBody>
-          <a:bodyPr wrap="square" lIns="45720" rIns="45720" tIns="18288" bIns="18288">
+          <a:bodyPr wrap="square" lIns="45720" tIns="18288" rIns="45720" bIns="18288">
             <a:spAutoFit/>
           </a:bodyPr>
           <a:lstStyle/>
@@ -8099,7 +8243,7 @@
           <a:noFill/>
         </p:spPr>
         <p:txBody>
-          <a:bodyPr wrap="square" lIns="45720" rIns="45720" tIns="18288" bIns="18288">
+          <a:bodyPr wrap="square" lIns="45720" tIns="18288" rIns="45720" bIns="18288">
             <a:spAutoFit/>
           </a:bodyPr>
           <a:lstStyle/>
@@ -8126,7 +8270,7 @@
 </file>
 
 <file path=ppt/slides/slide12.xml><?xml version="1.0" encoding="utf-8"?>
-<p:sld xmlns:a="http://schemas.openxmlformats.org/drawingml/2006/main" xmlns:p="http://schemas.openxmlformats.org/presentationml/2006/main" xmlns:r="http://schemas.openxmlformats.org/officeDocument/2006/relationships">
+<p:sld xmlns:a="http://schemas.openxmlformats.org/drawingml/2006/main" xmlns:r="http://schemas.openxmlformats.org/officeDocument/2006/relationships" xmlns:p="http://schemas.openxmlformats.org/presentationml/2006/main">
   <p:cSld>
     <p:spTree>
       <p:nvGrpSpPr>
@@ -8134,7 +8278,14 @@
         <p:cNvGrpSpPr/>
         <p:nvPr/>
       </p:nvGrpSpPr>
-      <p:grpSpPr/>
+      <p:grpSpPr>
+        <a:xfrm>
+          <a:off x="0" y="0"/>
+          <a:ext cx="0" cy="0"/>
+          <a:chOff x="0" y="0"/>
+          <a:chExt cx="0" cy="0"/>
+        </a:xfrm>
+      </p:grpSpPr>
       <p:sp>
         <p:nvSpPr>
           <p:cNvPr id="2" name="Rectangle 1"/>
@@ -8176,6 +8327,7 @@
           <a:lstStyle/>
           <a:p>
             <a:pPr algn="ctr"/>
+            <a:endParaRPr/>
           </a:p>
         </p:txBody>
       </p:sp>
@@ -8220,6 +8372,7 @@
           <a:lstStyle/>
           <a:p>
             <a:pPr algn="ctr"/>
+            <a:endParaRPr/>
           </a:p>
         </p:txBody>
       </p:sp>
@@ -8240,7 +8393,7 @@
           <a:noFill/>
         </p:spPr>
         <p:txBody>
-          <a:bodyPr wrap="square" lIns="45720" rIns="45720" tIns="18288" bIns="18288">
+          <a:bodyPr wrap="square" lIns="45720" tIns="18288" rIns="45720" bIns="18288">
             <a:spAutoFit/>
           </a:bodyPr>
           <a:lstStyle/>
@@ -8301,6 +8454,7 @@
           <a:lstStyle/>
           <a:p>
             <a:pPr algn="ctr"/>
+            <a:endParaRPr/>
           </a:p>
         </p:txBody>
       </p:sp>
@@ -8345,6 +8499,7 @@
           <a:lstStyle/>
           <a:p>
             <a:pPr algn="ctr"/>
+            <a:endParaRPr/>
           </a:p>
         </p:txBody>
       </p:sp>
@@ -8365,7 +8520,7 @@
           <a:noFill/>
         </p:spPr>
         <p:txBody>
-          <a:bodyPr wrap="square" lIns="45720" rIns="45720" tIns="18288" bIns="18288">
+          <a:bodyPr wrap="square" lIns="45720" tIns="18288" rIns="45720" bIns="18288">
             <a:spAutoFit/>
           </a:bodyPr>
           <a:lstStyle/>
@@ -8400,7 +8555,7 @@
           <a:noFill/>
         </p:spPr>
         <p:txBody>
-          <a:bodyPr wrap="square" lIns="45720" rIns="45720" tIns="18288" bIns="18288">
+          <a:bodyPr wrap="square" lIns="45720" tIns="18288" rIns="45720" bIns="18288">
             <a:spAutoFit/>
           </a:bodyPr>
           <a:lstStyle/>
@@ -8461,6 +8616,7 @@
           <a:lstStyle/>
           <a:p>
             <a:pPr algn="ctr"/>
+            <a:endParaRPr/>
           </a:p>
         </p:txBody>
       </p:sp>
@@ -8505,6 +8661,7 @@
           <a:lstStyle/>
           <a:p>
             <a:pPr algn="ctr"/>
+            <a:endParaRPr/>
           </a:p>
         </p:txBody>
       </p:sp>
@@ -8525,7 +8682,7 @@
           <a:noFill/>
         </p:spPr>
         <p:txBody>
-          <a:bodyPr wrap="square" lIns="45720" rIns="45720" tIns="18288" bIns="18288">
+          <a:bodyPr wrap="square" lIns="45720" tIns="18288" rIns="45720" bIns="18288">
             <a:spAutoFit/>
           </a:bodyPr>
           <a:lstStyle/>
@@ -8560,7 +8717,7 @@
           <a:noFill/>
         </p:spPr>
         <p:txBody>
-          <a:bodyPr wrap="square" lIns="45720" rIns="45720" tIns="18288" bIns="18288">
+          <a:bodyPr wrap="square" lIns="45720" tIns="18288" rIns="45720" bIns="18288">
             <a:spAutoFit/>
           </a:bodyPr>
           <a:lstStyle/>
@@ -8621,6 +8778,7 @@
           <a:lstStyle/>
           <a:p>
             <a:pPr algn="ctr"/>
+            <a:endParaRPr/>
           </a:p>
         </p:txBody>
       </p:sp>
@@ -8665,6 +8823,7 @@
           <a:lstStyle/>
           <a:p>
             <a:pPr algn="ctr"/>
+            <a:endParaRPr/>
           </a:p>
         </p:txBody>
       </p:sp>
@@ -8685,7 +8844,7 @@
           <a:noFill/>
         </p:spPr>
         <p:txBody>
-          <a:bodyPr wrap="square" lIns="45720" rIns="45720" tIns="18288" bIns="18288">
+          <a:bodyPr wrap="square" lIns="45720" tIns="18288" rIns="45720" bIns="18288">
             <a:spAutoFit/>
           </a:bodyPr>
           <a:lstStyle/>
@@ -8720,7 +8879,7 @@
           <a:noFill/>
         </p:spPr>
         <p:txBody>
-          <a:bodyPr wrap="square" lIns="45720" rIns="45720" tIns="18288" bIns="18288">
+          <a:bodyPr wrap="square" lIns="45720" tIns="18288" rIns="45720" bIns="18288">
             <a:spAutoFit/>
           </a:bodyPr>
           <a:lstStyle/>
@@ -8781,6 +8940,7 @@
           <a:lstStyle/>
           <a:p>
             <a:pPr algn="ctr"/>
+            <a:endParaRPr/>
           </a:p>
         </p:txBody>
       </p:sp>
@@ -8825,6 +8985,7 @@
           <a:lstStyle/>
           <a:p>
             <a:pPr algn="ctr"/>
+            <a:endParaRPr/>
           </a:p>
         </p:txBody>
       </p:sp>
@@ -8845,7 +9006,7 @@
           <a:noFill/>
         </p:spPr>
         <p:txBody>
-          <a:bodyPr wrap="square" lIns="45720" rIns="45720" tIns="18288" bIns="18288">
+          <a:bodyPr wrap="square" lIns="45720" tIns="18288" rIns="45720" bIns="18288">
             <a:spAutoFit/>
           </a:bodyPr>
           <a:lstStyle/>
@@ -8880,7 +9041,7 @@
           <a:noFill/>
         </p:spPr>
         <p:txBody>
-          <a:bodyPr wrap="square" lIns="45720" rIns="45720" tIns="18288" bIns="18288">
+          <a:bodyPr wrap="square" lIns="45720" tIns="18288" rIns="45720" bIns="18288">
             <a:spAutoFit/>
           </a:bodyPr>
           <a:lstStyle/>
@@ -8941,6 +9102,7 @@
           <a:lstStyle/>
           <a:p>
             <a:pPr algn="ctr"/>
+            <a:endParaRPr/>
           </a:p>
         </p:txBody>
       </p:sp>
@@ -8985,6 +9147,7 @@
           <a:lstStyle/>
           <a:p>
             <a:pPr algn="ctr"/>
+            <a:endParaRPr/>
           </a:p>
         </p:txBody>
       </p:sp>
@@ -9005,7 +9168,7 @@
           <a:noFill/>
         </p:spPr>
         <p:txBody>
-          <a:bodyPr wrap="square" lIns="45720" rIns="45720" tIns="18288" bIns="18288">
+          <a:bodyPr wrap="square" lIns="45720" tIns="18288" rIns="45720" bIns="18288">
             <a:spAutoFit/>
           </a:bodyPr>
           <a:lstStyle/>
@@ -9040,7 +9203,7 @@
           <a:noFill/>
         </p:spPr>
         <p:txBody>
-          <a:bodyPr wrap="square" lIns="45720" rIns="45720" tIns="18288" bIns="18288">
+          <a:bodyPr wrap="square" lIns="45720" tIns="18288" rIns="45720" bIns="18288">
             <a:spAutoFit/>
           </a:bodyPr>
           <a:lstStyle/>
@@ -9101,6 +9264,7 @@
           <a:lstStyle/>
           <a:p>
             <a:pPr algn="ctr"/>
+            <a:endParaRPr/>
           </a:p>
         </p:txBody>
       </p:sp>
@@ -9145,6 +9309,7 @@
           <a:lstStyle/>
           <a:p>
             <a:pPr algn="ctr"/>
+            <a:endParaRPr/>
           </a:p>
         </p:txBody>
       </p:sp>
@@ -9165,7 +9330,7 @@
           <a:noFill/>
         </p:spPr>
         <p:txBody>
-          <a:bodyPr wrap="square" lIns="45720" rIns="45720" tIns="18288" bIns="18288">
+          <a:bodyPr wrap="square" lIns="45720" tIns="18288" rIns="45720" bIns="18288">
             <a:spAutoFit/>
           </a:bodyPr>
           <a:lstStyle/>
@@ -9200,7 +9365,7 @@
           <a:noFill/>
         </p:spPr>
         <p:txBody>
-          <a:bodyPr wrap="square" lIns="45720" rIns="45720" tIns="18288" bIns="18288">
+          <a:bodyPr wrap="square" lIns="45720" tIns="18288" rIns="45720" bIns="18288">
             <a:spAutoFit/>
           </a:bodyPr>
           <a:lstStyle/>
@@ -9261,6 +9426,7 @@
           <a:lstStyle/>
           <a:p>
             <a:pPr algn="ctr"/>
+            <a:endParaRPr/>
           </a:p>
         </p:txBody>
       </p:sp>
@@ -9305,6 +9471,7 @@
           <a:lstStyle/>
           <a:p>
             <a:pPr algn="ctr"/>
+            <a:endParaRPr/>
           </a:p>
         </p:txBody>
       </p:sp>
@@ -9325,7 +9492,7 @@
           <a:noFill/>
         </p:spPr>
         <p:txBody>
-          <a:bodyPr wrap="square" lIns="45720" rIns="45720" tIns="18288" bIns="18288">
+          <a:bodyPr wrap="square" lIns="45720" tIns="18288" rIns="45720" bIns="18288">
             <a:spAutoFit/>
           </a:bodyPr>
           <a:lstStyle/>
@@ -9360,7 +9527,7 @@
           <a:noFill/>
         </p:spPr>
         <p:txBody>
-          <a:bodyPr wrap="square" lIns="45720" rIns="45720" tIns="18288" bIns="18288">
+          <a:bodyPr wrap="square" lIns="45720" tIns="18288" rIns="45720" bIns="18288">
             <a:spAutoFit/>
           </a:bodyPr>
           <a:lstStyle/>
@@ -9395,7 +9562,7 @@
           <a:noFill/>
         </p:spPr>
         <p:txBody>
-          <a:bodyPr wrap="square" lIns="45720" rIns="45720" tIns="18288" bIns="18288">
+          <a:bodyPr wrap="square" lIns="45720" tIns="18288" rIns="45720" bIns="18288">
             <a:spAutoFit/>
           </a:bodyPr>
           <a:lstStyle/>
@@ -9430,7 +9597,7 @@
           <a:noFill/>
         </p:spPr>
         <p:txBody>
-          <a:bodyPr wrap="square" lIns="45720" rIns="45720" tIns="18288" bIns="18288">
+          <a:bodyPr wrap="square" lIns="45720" tIns="18288" rIns="45720" bIns="18288">
             <a:spAutoFit/>
           </a:bodyPr>
           <a:lstStyle/>
@@ -9457,7 +9624,7 @@
 </file>
 
 <file path=ppt/slides/slide13.xml><?xml version="1.0" encoding="utf-8"?>
-<p:sld xmlns:a="http://schemas.openxmlformats.org/drawingml/2006/main" xmlns:p="http://schemas.openxmlformats.org/presentationml/2006/main" xmlns:r="http://schemas.openxmlformats.org/officeDocument/2006/relationships">
+<p:sld xmlns:a="http://schemas.openxmlformats.org/drawingml/2006/main" xmlns:r="http://schemas.openxmlformats.org/officeDocument/2006/relationships" xmlns:p="http://schemas.openxmlformats.org/presentationml/2006/main">
   <p:cSld>
     <p:spTree>
       <p:nvGrpSpPr>
@@ -9465,7 +9632,14 @@
         <p:cNvGrpSpPr/>
         <p:nvPr/>
       </p:nvGrpSpPr>
-      <p:grpSpPr/>
+      <p:grpSpPr>
+        <a:xfrm>
+          <a:off x="0" y="0"/>
+          <a:ext cx="0" cy="0"/>
+          <a:chOff x="0" y="0"/>
+          <a:chExt cx="0" cy="0"/>
+        </a:xfrm>
+      </p:grpSpPr>
       <p:sp>
         <p:nvSpPr>
           <p:cNvPr id="2" name="Rectangle 1"/>
@@ -9507,6 +9681,7 @@
           <a:lstStyle/>
           <a:p>
             <a:pPr algn="ctr"/>
+            <a:endParaRPr/>
           </a:p>
         </p:txBody>
       </p:sp>
@@ -9551,6 +9726,7 @@
           <a:lstStyle/>
           <a:p>
             <a:pPr algn="ctr"/>
+            <a:endParaRPr/>
           </a:p>
         </p:txBody>
       </p:sp>
@@ -9571,7 +9747,7 @@
           <a:noFill/>
         </p:spPr>
         <p:txBody>
-          <a:bodyPr wrap="square" lIns="45720" rIns="45720" tIns="18288" bIns="18288">
+          <a:bodyPr wrap="square" lIns="45720" tIns="18288" rIns="45720" bIns="18288">
             <a:spAutoFit/>
           </a:bodyPr>
           <a:lstStyle/>
@@ -9606,7 +9782,7 @@
           <a:noFill/>
         </p:spPr>
         <p:txBody>
-          <a:bodyPr wrap="square" lIns="45720" rIns="45720" tIns="18288" bIns="18288">
+          <a:bodyPr wrap="square" lIns="45720" tIns="18288" rIns="45720" bIns="18288">
             <a:spAutoFit/>
           </a:bodyPr>
           <a:lstStyle/>
@@ -9633,7 +9809,7 @@
         <p:spPr>
           <a:xfrm>
             <a:off x="640080" y="1463040"/>
-            <a:ext cx="10972800" cy="2377440"/>
+            <a:ext cx="10972800" cy="1656864"/>
           </a:xfrm>
           <a:prstGeom prst="rect">
             <a:avLst/>
@@ -9652,7 +9828,7 @@
               </a:spcAft>
             </a:pPr>
             <a:r>
-              <a:rPr sz="1500">
+              <a:rPr sz="1500" dirty="0">
                 <a:solidFill>
                   <a:srgbClr val="1F293A"/>
                 </a:solidFill>
@@ -9667,7 +9843,7 @@
               </a:spcAft>
             </a:pPr>
             <a:r>
-              <a:rPr sz="1500">
+              <a:rPr sz="1500" dirty="0">
                 <a:solidFill>
                   <a:srgbClr val="1F293A"/>
                 </a:solidFill>
@@ -9682,7 +9858,7 @@
               </a:spcAft>
             </a:pPr>
             <a:r>
-              <a:rPr sz="1500">
+              <a:rPr sz="1500" dirty="0">
                 <a:solidFill>
                   <a:srgbClr val="1F293A"/>
                 </a:solidFill>
@@ -9697,12 +9873,84 @@
               </a:spcAft>
             </a:pPr>
             <a:r>
-              <a:rPr sz="1500">
+              <a:rPr sz="1500" dirty="0">
                 <a:solidFill>
                   <a:srgbClr val="1F293A"/>
                 </a:solidFill>
               </a:rPr>
-              <a:t>•  Add stronger anchors (POLightRush, NaiveMCTS+) to better separate A+/A entries.</a:t>
+              <a:t>•  Add </a:t>
+            </a:r>
+            <a:r>
+              <a:rPr lang="en-US" sz="1500" dirty="0">
+                <a:solidFill>
+                  <a:srgbClr val="1F293A"/>
+                </a:solidFill>
+              </a:rPr>
+              <a:t>additional</a:t>
+            </a:r>
+            <a:r>
+              <a:rPr sz="1500" dirty="0">
+                <a:solidFill>
+                  <a:srgbClr val="1F293A"/>
+                </a:solidFill>
+              </a:rPr>
+              <a:t> anchors (</a:t>
+            </a:r>
+            <a:r>
+              <a:rPr lang="en-US" sz="1500" dirty="0">
+                <a:solidFill>
+                  <a:srgbClr val="1F293A"/>
+                </a:solidFill>
+              </a:rPr>
+              <a:t>e.g. </a:t>
+            </a:r>
+            <a:r>
+              <a:rPr sz="1500" dirty="0" err="1">
+                <a:solidFill>
+                  <a:srgbClr val="1F293A"/>
+                </a:solidFill>
+              </a:rPr>
+              <a:t>POLightRush</a:t>
+            </a:r>
+            <a:r>
+              <a:rPr sz="1500" dirty="0">
+                <a:solidFill>
+                  <a:srgbClr val="1F293A"/>
+                </a:solidFill>
+              </a:rPr>
+              <a:t>, </a:t>
+            </a:r>
+            <a:r>
+              <a:rPr sz="1500" dirty="0" err="1">
+                <a:solidFill>
+                  <a:srgbClr val="1F293A"/>
+                </a:solidFill>
+              </a:rPr>
+              <a:t>NaiveMCTS</a:t>
+            </a:r>
+            <a:r>
+              <a:rPr sz="1500" dirty="0">
+                <a:solidFill>
+                  <a:srgbClr val="1F293A"/>
+                </a:solidFill>
+              </a:rPr>
+              <a:t>+) to </a:t>
+            </a:r>
+            <a:r>
+              <a:rPr lang="en-US" sz="1500" dirty="0">
+                <a:solidFill>
+                  <a:srgbClr val="1F293A"/>
+                </a:solidFill>
+              </a:rPr>
+              <a:t>further</a:t>
+            </a:r>
+            <a:r>
+              <a:rPr sz="1500" dirty="0">
+                <a:solidFill>
+                  <a:srgbClr val="1F293A"/>
+                </a:solidFill>
+              </a:rPr>
+              <a:t> separate entries.</a:t>
             </a:r>
           </a:p>
           <a:p>
@@ -9712,7 +9960,7 @@
               </a:spcAft>
             </a:pPr>
             <a:r>
-              <a:rPr sz="1500">
+              <a:rPr sz="1500" dirty="0">
                 <a:solidFill>
                   <a:srgbClr val="1F293A"/>
                 </a:solidFill>
@@ -9763,6 +10011,7 @@
           <a:lstStyle/>
           <a:p>
             <a:pPr algn="ctr"/>
+            <a:endParaRPr/>
           </a:p>
         </p:txBody>
       </p:sp>
@@ -9783,7 +10032,7 @@
           <a:noFill/>
         </p:spPr>
         <p:txBody>
-          <a:bodyPr wrap="square" lIns="45720" rIns="45720" tIns="18288" bIns="18288">
+          <a:bodyPr wrap="square" lIns="45720" tIns="18288" rIns="45720" bIns="18288">
             <a:spAutoFit/>
           </a:bodyPr>
           <a:lstStyle/>
@@ -9818,7 +10067,7 @@
           <a:noFill/>
         </p:spPr>
         <p:txBody>
-          <a:bodyPr wrap="square" lIns="45720" rIns="45720" tIns="18288" bIns="18288">
+          <a:bodyPr wrap="square" lIns="45720" tIns="18288" rIns="45720" bIns="18288">
             <a:spAutoFit/>
           </a:bodyPr>
           <a:lstStyle/>
@@ -9889,7 +10138,7 @@
           <a:noFill/>
         </p:spPr>
         <p:txBody>
-          <a:bodyPr wrap="square" lIns="45720" rIns="45720" tIns="18288" bIns="18288">
+          <a:bodyPr wrap="square" lIns="45720" tIns="18288" rIns="45720" bIns="18288">
             <a:spAutoFit/>
           </a:bodyPr>
           <a:lstStyle/>
@@ -9924,7 +10173,7 @@
           <a:noFill/>
         </p:spPr>
         <p:txBody>
-          <a:bodyPr wrap="square" lIns="45720" rIns="45720" tIns="18288" bIns="18288">
+          <a:bodyPr wrap="square" lIns="45720" tIns="18288" rIns="45720" bIns="18288">
             <a:spAutoFit/>
           </a:bodyPr>
           <a:lstStyle/>
@@ -9951,7 +10200,7 @@
 </file>
 
 <file path=ppt/slides/slide14.xml><?xml version="1.0" encoding="utf-8"?>
-<p:sld xmlns:a="http://schemas.openxmlformats.org/drawingml/2006/main" xmlns:p="http://schemas.openxmlformats.org/presentationml/2006/main" xmlns:r="http://schemas.openxmlformats.org/officeDocument/2006/relationships">
+<p:sld xmlns:a="http://schemas.openxmlformats.org/drawingml/2006/main" xmlns:r="http://schemas.openxmlformats.org/officeDocument/2006/relationships" xmlns:p="http://schemas.openxmlformats.org/presentationml/2006/main">
   <p:cSld>
     <p:spTree>
       <p:nvGrpSpPr>
@@ -9959,7 +10208,14 @@
         <p:cNvGrpSpPr/>
         <p:nvPr/>
       </p:nvGrpSpPr>
-      <p:grpSpPr/>
+      <p:grpSpPr>
+        <a:xfrm>
+          <a:off x="0" y="0"/>
+          <a:ext cx="0" cy="0"/>
+          <a:chOff x="0" y="0"/>
+          <a:chExt cx="0" cy="0"/>
+        </a:xfrm>
+      </p:grpSpPr>
       <p:sp>
         <p:nvSpPr>
           <p:cNvPr id="2" name="Rectangle 1"/>
@@ -10001,6 +10257,7 @@
           <a:lstStyle/>
           <a:p>
             <a:pPr algn="ctr"/>
+            <a:endParaRPr/>
           </a:p>
         </p:txBody>
       </p:sp>
@@ -10045,6 +10302,7 @@
           <a:lstStyle/>
           <a:p>
             <a:pPr algn="ctr"/>
+            <a:endParaRPr/>
           </a:p>
         </p:txBody>
       </p:sp>
@@ -10065,7 +10323,7 @@
           <a:noFill/>
         </p:spPr>
         <p:txBody>
-          <a:bodyPr wrap="square" lIns="45720" rIns="45720" tIns="18288" bIns="18288">
+          <a:bodyPr wrap="square" lIns="45720" tIns="18288" rIns="45720" bIns="18288">
             <a:spAutoFit/>
           </a:bodyPr>
           <a:lstStyle/>
@@ -10100,7 +10358,7 @@
           <a:noFill/>
         </p:spPr>
         <p:txBody>
-          <a:bodyPr wrap="square" lIns="45720" rIns="45720" tIns="18288" bIns="18288">
+          <a:bodyPr wrap="square" lIns="45720" tIns="18288" rIns="45720" bIns="18288">
             <a:spAutoFit/>
           </a:bodyPr>
           <a:lstStyle/>
@@ -10135,7 +10393,7 @@
           <a:noFill/>
         </p:spPr>
         <p:txBody>
-          <a:bodyPr wrap="square" lIns="45720" rIns="45720" tIns="18288" bIns="18288">
+          <a:bodyPr wrap="square" lIns="45720" tIns="18288" rIns="45720" bIns="18288">
             <a:spAutoFit/>
           </a:bodyPr>
           <a:lstStyle/>
@@ -10162,28 +10420,73 @@
         <p:spPr>
           <a:xfrm>
             <a:off x="457200" y="5577840"/>
-            <a:ext cx="10972800" cy="365760"/>
-          </a:xfrm>
-          <a:prstGeom prst="rect">
-            <a:avLst/>
-          </a:prstGeom>
-          <a:noFill/>
-        </p:spPr>
-        <p:txBody>
-          <a:bodyPr wrap="square" lIns="45720" rIns="45720" tIns="18288" bIns="18288">
+            <a:ext cx="10972800" cy="252377"/>
+          </a:xfrm>
+          <a:prstGeom prst="rect">
+            <a:avLst/>
+          </a:prstGeom>
+          <a:noFill/>
+        </p:spPr>
+        <p:txBody>
+          <a:bodyPr wrap="square" lIns="45720" tIns="18288" rIns="45720" bIns="18288">
             <a:spAutoFit/>
           </a:bodyPr>
           <a:lstStyle/>
           <a:p>
             <a:pPr algn="ctr"/>
             <a:r>
-              <a:rPr sz="1400" b="0">
+              <a:rPr lang="en-US" sz="1400" dirty="0">
                 <a:solidFill>
                   <a:srgbClr val="FFFFFF"/>
                 </a:solidFill>
                 <a:latin typeface="Calibri"/>
               </a:rPr>
-              <a:t>Submissions remain open — try the 2027 leaderboard at the same address.</a:t>
+              <a:t>The s</a:t>
+            </a:r>
+            <a:r>
+              <a:rPr sz="1400" b="0" dirty="0">
+                <a:solidFill>
+                  <a:srgbClr val="FFFFFF"/>
+                </a:solidFill>
+                <a:latin typeface="Calibri"/>
+              </a:rPr>
+              <a:t>ubmission</a:t>
+            </a:r>
+            <a:r>
+              <a:rPr lang="en-US" sz="1400" b="0" dirty="0">
+                <a:solidFill>
+                  <a:srgbClr val="FFFFFF"/>
+                </a:solidFill>
+                <a:latin typeface="Calibri"/>
+              </a:rPr>
+              <a:t> site</a:t>
+            </a:r>
+            <a:r>
+              <a:rPr sz="1400" b="0" dirty="0">
+                <a:solidFill>
+                  <a:srgbClr val="FFFFFF"/>
+                </a:solidFill>
+                <a:latin typeface="Calibri"/>
+              </a:rPr>
+              <a:t> remain</a:t>
+            </a:r>
+            <a:r>
+              <a:rPr lang="en-US" sz="1400" b="0" dirty="0">
+                <a:solidFill>
+                  <a:srgbClr val="FFFFFF"/>
+                </a:solidFill>
+                <a:latin typeface="Calibri"/>
+              </a:rPr>
+              <a:t>s</a:t>
+            </a:r>
+            <a:r>
+              <a:rPr sz="1400" b="0" dirty="0">
+                <a:solidFill>
+                  <a:srgbClr val="FFFFFF"/>
+                </a:solidFill>
+                <a:latin typeface="Calibri"/>
+              </a:rPr>
+              <a:t> open — try the 2027 leaderboard at the same address.</a:t>
             </a:r>
           </a:p>
         </p:txBody>
@@ -10197,7 +10500,7 @@
 </file>
 
 <file path=ppt/slides/slide2.xml><?xml version="1.0" encoding="utf-8"?>
-<p:sld xmlns:a="http://schemas.openxmlformats.org/drawingml/2006/main" xmlns:p="http://schemas.openxmlformats.org/presentationml/2006/main" xmlns:r="http://schemas.openxmlformats.org/officeDocument/2006/relationships">
+<p:sld xmlns:a="http://schemas.openxmlformats.org/drawingml/2006/main" xmlns:r="http://schemas.openxmlformats.org/officeDocument/2006/relationships" xmlns:p="http://schemas.openxmlformats.org/presentationml/2006/main">
   <p:cSld>
     <p:spTree>
       <p:nvGrpSpPr>
@@ -10205,7 +10508,14 @@
         <p:cNvGrpSpPr/>
         <p:nvPr/>
       </p:nvGrpSpPr>
-      <p:grpSpPr/>
+      <p:grpSpPr>
+        <a:xfrm>
+          <a:off x="0" y="0"/>
+          <a:ext cx="0" cy="0"/>
+          <a:chOff x="0" y="0"/>
+          <a:chExt cx="0" cy="0"/>
+        </a:xfrm>
+      </p:grpSpPr>
       <p:sp>
         <p:nvSpPr>
           <p:cNvPr id="2" name="Rectangle 1"/>
@@ -10247,6 +10557,7 @@
           <a:lstStyle/>
           <a:p>
             <a:pPr algn="ctr"/>
+            <a:endParaRPr/>
           </a:p>
         </p:txBody>
       </p:sp>
@@ -10291,6 +10602,7 @@
           <a:lstStyle/>
           <a:p>
             <a:pPr algn="ctr"/>
+            <a:endParaRPr/>
           </a:p>
         </p:txBody>
       </p:sp>
@@ -10311,7 +10623,7 @@
           <a:noFill/>
         </p:spPr>
         <p:txBody>
-          <a:bodyPr wrap="square" lIns="45720" rIns="45720" tIns="18288" bIns="18288">
+          <a:bodyPr wrap="square" lIns="45720" tIns="18288" rIns="45720" bIns="18288">
             <a:spAutoFit/>
           </a:bodyPr>
           <a:lstStyle/>
@@ -10346,7 +10658,7 @@
           <a:noFill/>
         </p:spPr>
         <p:txBody>
-          <a:bodyPr wrap="square" lIns="45720" rIns="45720" tIns="18288" bIns="18288">
+          <a:bodyPr wrap="square" lIns="45720" tIns="18288" rIns="45720" bIns="18288">
             <a:spAutoFit/>
           </a:bodyPr>
           <a:lstStyle/>
@@ -10381,7 +10693,7 @@
           <a:noFill/>
         </p:spPr>
         <p:txBody>
-          <a:bodyPr wrap="square" lIns="45720" rIns="45720" tIns="18288" bIns="18288">
+          <a:bodyPr wrap="square" lIns="45720" tIns="18288" rIns="45720" bIns="18288">
             <a:spAutoFit/>
           </a:bodyPr>
           <a:lstStyle/>
@@ -10514,7 +10826,7 @@
           <a:noFill/>
         </p:spPr>
         <p:txBody>
-          <a:bodyPr wrap="square" lIns="45720" rIns="45720" tIns="18288" bIns="18288">
+          <a:bodyPr wrap="square" lIns="45720" tIns="18288" rIns="45720" bIns="18288">
             <a:spAutoFit/>
           </a:bodyPr>
           <a:lstStyle/>
@@ -10573,7 +10885,7 @@
           <a:noFill/>
         </p:spPr>
         <p:txBody>
-          <a:bodyPr wrap="square" lIns="45720" rIns="45720" tIns="18288" bIns="18288">
+          <a:bodyPr wrap="square" lIns="45720" tIns="18288" rIns="45720" bIns="18288">
             <a:spAutoFit/>
           </a:bodyPr>
           <a:lstStyle/>
@@ -10608,7 +10920,7 @@
           <a:noFill/>
         </p:spPr>
         <p:txBody>
-          <a:bodyPr wrap="square" lIns="45720" rIns="45720" tIns="18288" bIns="18288">
+          <a:bodyPr wrap="square" lIns="45720" tIns="18288" rIns="45720" bIns="18288">
             <a:spAutoFit/>
           </a:bodyPr>
           <a:lstStyle/>
@@ -10667,6 +10979,7 @@
           <a:lstStyle/>
           <a:p>
             <a:pPr algn="ctr"/>
+            <a:endParaRPr/>
           </a:p>
         </p:txBody>
       </p:sp>
@@ -10687,7 +11000,7 @@
           <a:noFill/>
         </p:spPr>
         <p:txBody>
-          <a:bodyPr wrap="square" lIns="45720" rIns="45720" tIns="18288" bIns="18288">
+          <a:bodyPr wrap="square" lIns="45720" tIns="18288" rIns="45720" bIns="18288">
             <a:spAutoFit/>
           </a:bodyPr>
           <a:lstStyle/>
@@ -10722,7 +11035,7 @@
           <a:noFill/>
         </p:spPr>
         <p:txBody>
-          <a:bodyPr wrap="square" lIns="45720" rIns="45720" tIns="18288" bIns="18288">
+          <a:bodyPr wrap="square" lIns="45720" tIns="18288" rIns="45720" bIns="18288">
             <a:spAutoFit/>
           </a:bodyPr>
           <a:lstStyle/>
@@ -10757,7 +11070,7 @@
           <a:noFill/>
         </p:spPr>
         <p:txBody>
-          <a:bodyPr wrap="square" lIns="45720" rIns="45720" tIns="18288" bIns="18288">
+          <a:bodyPr wrap="square" lIns="45720" tIns="18288" rIns="45720" bIns="18288">
             <a:spAutoFit/>
           </a:bodyPr>
           <a:lstStyle/>
@@ -10816,6 +11129,7 @@
           <a:lstStyle/>
           <a:p>
             <a:pPr algn="ctr"/>
+            <a:endParaRPr/>
           </a:p>
         </p:txBody>
       </p:sp>
@@ -10836,7 +11150,7 @@
           <a:noFill/>
         </p:spPr>
         <p:txBody>
-          <a:bodyPr wrap="square" lIns="45720" rIns="45720" tIns="18288" bIns="18288">
+          <a:bodyPr wrap="square" lIns="45720" tIns="18288" rIns="45720" bIns="18288">
             <a:spAutoFit/>
           </a:bodyPr>
           <a:lstStyle/>
@@ -10871,7 +11185,7 @@
           <a:noFill/>
         </p:spPr>
         <p:txBody>
-          <a:bodyPr wrap="square" lIns="45720" rIns="45720" tIns="18288" bIns="18288">
+          <a:bodyPr wrap="square" lIns="45720" tIns="18288" rIns="45720" bIns="18288">
             <a:spAutoFit/>
           </a:bodyPr>
           <a:lstStyle/>
@@ -10906,7 +11220,7 @@
           <a:noFill/>
         </p:spPr>
         <p:txBody>
-          <a:bodyPr wrap="square" lIns="45720" rIns="45720" tIns="18288" bIns="18288">
+          <a:bodyPr wrap="square" lIns="45720" tIns="18288" rIns="45720" bIns="18288">
             <a:spAutoFit/>
           </a:bodyPr>
           <a:lstStyle/>
@@ -10965,6 +11279,7 @@
           <a:lstStyle/>
           <a:p>
             <a:pPr algn="ctr"/>
+            <a:endParaRPr/>
           </a:p>
         </p:txBody>
       </p:sp>
@@ -10985,7 +11300,7 @@
           <a:noFill/>
         </p:spPr>
         <p:txBody>
-          <a:bodyPr wrap="square" lIns="45720" rIns="45720" tIns="18288" bIns="18288">
+          <a:bodyPr wrap="square" lIns="45720" tIns="18288" rIns="45720" bIns="18288">
             <a:spAutoFit/>
           </a:bodyPr>
           <a:lstStyle/>
@@ -11020,7 +11335,7 @@
           <a:noFill/>
         </p:spPr>
         <p:txBody>
-          <a:bodyPr wrap="square" lIns="45720" rIns="45720" tIns="18288" bIns="18288">
+          <a:bodyPr wrap="square" lIns="45720" tIns="18288" rIns="45720" bIns="18288">
             <a:spAutoFit/>
           </a:bodyPr>
           <a:lstStyle/>
@@ -11055,7 +11370,7 @@
           <a:noFill/>
         </p:spPr>
         <p:txBody>
-          <a:bodyPr wrap="square" lIns="45720" rIns="45720" tIns="18288" bIns="18288">
+          <a:bodyPr wrap="square" lIns="45720" tIns="18288" rIns="45720" bIns="18288">
             <a:spAutoFit/>
           </a:bodyPr>
           <a:lstStyle/>
@@ -11114,6 +11429,7 @@
           <a:lstStyle/>
           <a:p>
             <a:pPr algn="ctr"/>
+            <a:endParaRPr/>
           </a:p>
         </p:txBody>
       </p:sp>
@@ -11134,7 +11450,7 @@
           <a:noFill/>
         </p:spPr>
         <p:txBody>
-          <a:bodyPr wrap="square" lIns="45720" rIns="45720" tIns="18288" bIns="18288">
+          <a:bodyPr wrap="square" lIns="45720" tIns="18288" rIns="45720" bIns="18288">
             <a:spAutoFit/>
           </a:bodyPr>
           <a:lstStyle/>
@@ -11169,7 +11485,7 @@
           <a:noFill/>
         </p:spPr>
         <p:txBody>
-          <a:bodyPr wrap="square" lIns="45720" rIns="45720" tIns="18288" bIns="18288">
+          <a:bodyPr wrap="square" lIns="45720" tIns="18288" rIns="45720" bIns="18288">
             <a:spAutoFit/>
           </a:bodyPr>
           <a:lstStyle/>
@@ -11204,7 +11520,7 @@
           <a:noFill/>
         </p:spPr>
         <p:txBody>
-          <a:bodyPr wrap="square" lIns="45720" rIns="45720" tIns="18288" bIns="18288">
+          <a:bodyPr wrap="square" lIns="45720" tIns="18288" rIns="45720" bIns="18288">
             <a:spAutoFit/>
           </a:bodyPr>
           <a:lstStyle/>
@@ -11263,6 +11579,7 @@
           <a:lstStyle/>
           <a:p>
             <a:pPr algn="ctr"/>
+            <a:endParaRPr/>
           </a:p>
         </p:txBody>
       </p:sp>
@@ -11275,29 +11592,44 @@
         <p:spPr>
           <a:xfrm>
             <a:off x="502920" y="5751576"/>
-            <a:ext cx="777240" cy="201168"/>
-          </a:xfrm>
-          <a:prstGeom prst="rect">
-            <a:avLst/>
-          </a:prstGeom>
-          <a:noFill/>
-        </p:spPr>
-        <p:txBody>
-          <a:bodyPr wrap="square" lIns="45720" rIns="45720" tIns="18288" bIns="18288">
+            <a:ext cx="777240" cy="190821"/>
+          </a:xfrm>
+          <a:prstGeom prst="rect">
+            <a:avLst/>
+          </a:prstGeom>
+          <a:noFill/>
+        </p:spPr>
+        <p:txBody>
+          <a:bodyPr wrap="square" lIns="45720" tIns="18288" rIns="45720" bIns="18288">
             <a:spAutoFit/>
           </a:bodyPr>
           <a:lstStyle/>
           <a:p>
             <a:pPr algn="ctr"/>
             <a:r>
-              <a:rPr sz="1000" b="1">
+              <a:rPr sz="1000" b="1" dirty="0">
                 <a:solidFill>
                   <a:srgbClr val="FFFFFF"/>
                 </a:solidFill>
                 <a:latin typeface="Calibri"/>
               </a:rPr>
-              <a:t>2022-23</a:t>
-            </a:r>
+              <a:t>2022-2</a:t>
+            </a:r>
+            <a:r>
+              <a:rPr lang="en-US" sz="1000" b="1" dirty="0">
+                <a:solidFill>
+                  <a:srgbClr val="FFFFFF"/>
+                </a:solidFill>
+                <a:latin typeface="Calibri"/>
+              </a:rPr>
+              <a:t>5</a:t>
+            </a:r>
+            <a:endParaRPr sz="1000" b="1" dirty="0">
+              <a:solidFill>
+                <a:srgbClr val="FFFFFF"/>
+              </a:solidFill>
+              <a:latin typeface="Calibri"/>
+            </a:endParaRPr>
           </a:p>
         </p:txBody>
       </p:sp>
@@ -11318,7 +11650,7 @@
           <a:noFill/>
         </p:spPr>
         <p:txBody>
-          <a:bodyPr wrap="square" lIns="45720" rIns="45720" tIns="18288" bIns="18288">
+          <a:bodyPr wrap="square" lIns="45720" tIns="18288" rIns="45720" bIns="18288">
             <a:spAutoFit/>
           </a:bodyPr>
           <a:lstStyle/>
@@ -11353,7 +11685,7 @@
           <a:noFill/>
         </p:spPr>
         <p:txBody>
-          <a:bodyPr wrap="square" lIns="45720" rIns="45720" tIns="18288" bIns="18288">
+          <a:bodyPr wrap="square" lIns="45720" tIns="18288" rIns="45720" bIns="18288">
             <a:spAutoFit/>
           </a:bodyPr>
           <a:lstStyle/>
@@ -11412,6 +11744,7 @@
           <a:lstStyle/>
           <a:p>
             <a:pPr algn="ctr"/>
+            <a:endParaRPr/>
           </a:p>
         </p:txBody>
       </p:sp>
@@ -11432,7 +11765,7 @@
           <a:noFill/>
         </p:spPr>
         <p:txBody>
-          <a:bodyPr wrap="square" lIns="45720" rIns="45720" tIns="18288" bIns="18288">
+          <a:bodyPr wrap="square" lIns="45720" tIns="18288" rIns="45720" bIns="18288">
             <a:spAutoFit/>
           </a:bodyPr>
           <a:lstStyle/>
@@ -11467,7 +11800,7 @@
           <a:noFill/>
         </p:spPr>
         <p:txBody>
-          <a:bodyPr wrap="square" lIns="45720" rIns="45720" tIns="18288" bIns="18288">
+          <a:bodyPr wrap="square" lIns="45720" tIns="18288" rIns="45720" bIns="18288">
             <a:spAutoFit/>
           </a:bodyPr>
           <a:lstStyle/>
@@ -11502,7 +11835,7 @@
           <a:noFill/>
         </p:spPr>
         <p:txBody>
-          <a:bodyPr wrap="square" lIns="45720" rIns="45720" tIns="18288" bIns="18288">
+          <a:bodyPr wrap="square" lIns="45720" tIns="18288" rIns="45720" bIns="18288">
             <a:spAutoFit/>
           </a:bodyPr>
           <a:lstStyle/>
@@ -11537,7 +11870,7 @@
           <a:noFill/>
         </p:spPr>
         <p:txBody>
-          <a:bodyPr wrap="square" lIns="45720" rIns="45720" tIns="18288" bIns="18288">
+          <a:bodyPr wrap="square" lIns="45720" tIns="18288" rIns="45720" bIns="18288">
             <a:spAutoFit/>
           </a:bodyPr>
           <a:lstStyle/>
@@ -11572,7 +11905,7 @@
           <a:noFill/>
         </p:spPr>
         <p:txBody>
-          <a:bodyPr wrap="square" lIns="45720" rIns="45720" tIns="18288" bIns="18288">
+          <a:bodyPr wrap="square" lIns="45720" tIns="18288" rIns="45720" bIns="18288">
             <a:spAutoFit/>
           </a:bodyPr>
           <a:lstStyle/>
@@ -11599,7 +11932,7 @@
 </file>
 
 <file path=ppt/slides/slide3.xml><?xml version="1.0" encoding="utf-8"?>
-<p:sld xmlns:a="http://schemas.openxmlformats.org/drawingml/2006/main" xmlns:p="http://schemas.openxmlformats.org/presentationml/2006/main" xmlns:r="http://schemas.openxmlformats.org/officeDocument/2006/relationships">
+<p:sld xmlns:a="http://schemas.openxmlformats.org/drawingml/2006/main" xmlns:r="http://schemas.openxmlformats.org/officeDocument/2006/relationships" xmlns:p="http://schemas.openxmlformats.org/presentationml/2006/main">
   <p:cSld>
     <p:spTree>
       <p:nvGrpSpPr>
@@ -11607,7 +11940,14 @@
         <p:cNvGrpSpPr/>
         <p:nvPr/>
       </p:nvGrpSpPr>
-      <p:grpSpPr/>
+      <p:grpSpPr>
+        <a:xfrm>
+          <a:off x="0" y="0"/>
+          <a:ext cx="0" cy="0"/>
+          <a:chOff x="0" y="0"/>
+          <a:chExt cx="0" cy="0"/>
+        </a:xfrm>
+      </p:grpSpPr>
       <p:sp>
         <p:nvSpPr>
           <p:cNvPr id="2" name="Rectangle 1"/>
@@ -11649,6 +11989,7 @@
           <a:lstStyle/>
           <a:p>
             <a:pPr algn="ctr"/>
+            <a:endParaRPr/>
           </a:p>
         </p:txBody>
       </p:sp>
@@ -11693,6 +12034,7 @@
           <a:lstStyle/>
           <a:p>
             <a:pPr algn="ctr"/>
+            <a:endParaRPr/>
           </a:p>
         </p:txBody>
       </p:sp>
@@ -11713,7 +12055,7 @@
           <a:noFill/>
         </p:spPr>
         <p:txBody>
-          <a:bodyPr wrap="square" lIns="45720" rIns="45720" tIns="18288" bIns="18288">
+          <a:bodyPr wrap="square" lIns="45720" tIns="18288" rIns="45720" bIns="18288">
             <a:spAutoFit/>
           </a:bodyPr>
           <a:lstStyle/>
@@ -11748,7 +12090,7 @@
           <a:noFill/>
         </p:spPr>
         <p:txBody>
-          <a:bodyPr wrap="square" lIns="45720" rIns="45720" tIns="18288" bIns="18288">
+          <a:bodyPr wrap="square" lIns="45720" tIns="18288" rIns="45720" bIns="18288">
             <a:spAutoFit/>
           </a:bodyPr>
           <a:lstStyle/>
@@ -11783,7 +12125,7 @@
           <a:noFill/>
         </p:spPr>
         <p:txBody>
-          <a:bodyPr wrap="square" lIns="45720" rIns="45720" tIns="18288" bIns="18288">
+          <a:bodyPr wrap="square" lIns="45720" tIns="18288" rIns="45720" bIns="18288">
             <a:spAutoFit/>
           </a:bodyPr>
           <a:lstStyle/>
@@ -11818,7 +12160,7 @@
           <a:noFill/>
         </p:spPr>
         <p:txBody>
-          <a:bodyPr wrap="square" lIns="45720" rIns="45720" tIns="18288" bIns="18288">
+          <a:bodyPr wrap="square" lIns="45720" tIns="18288" rIns="45720" bIns="18288">
             <a:spAutoFit/>
           </a:bodyPr>
           <a:lstStyle/>
@@ -11853,7 +12195,7 @@
           <a:noFill/>
         </p:spPr>
         <p:txBody>
-          <a:bodyPr wrap="square" lIns="45720" rIns="45720" tIns="18288" bIns="18288">
+          <a:bodyPr wrap="square" lIns="45720" tIns="18288" rIns="45720" bIns="18288">
             <a:spAutoFit/>
           </a:bodyPr>
           <a:lstStyle/>
@@ -11912,6 +12254,7 @@
           <a:lstStyle/>
           <a:p>
             <a:pPr algn="ctr"/>
+            <a:endParaRPr/>
           </a:p>
         </p:txBody>
       </p:sp>
@@ -11956,6 +12299,7 @@
           <a:lstStyle/>
           <a:p>
             <a:pPr algn="ctr"/>
+            <a:endParaRPr/>
           </a:p>
         </p:txBody>
       </p:sp>
@@ -11976,7 +12320,7 @@
           <a:noFill/>
         </p:spPr>
         <p:txBody>
-          <a:bodyPr wrap="square" lIns="45720" rIns="45720" tIns="18288" bIns="18288">
+          <a:bodyPr wrap="square" lIns="45720" tIns="18288" rIns="45720" bIns="18288">
             <a:spAutoFit/>
           </a:bodyPr>
           <a:lstStyle/>
@@ -12011,7 +12355,7 @@
           <a:noFill/>
         </p:spPr>
         <p:txBody>
-          <a:bodyPr wrap="square" lIns="45720" rIns="45720" tIns="18288" bIns="18288">
+          <a:bodyPr wrap="square" lIns="45720" tIns="18288" rIns="45720" bIns="18288">
             <a:spAutoFit/>
           </a:bodyPr>
           <a:lstStyle/>
@@ -12153,6 +12497,7 @@
           <a:lstStyle/>
           <a:p>
             <a:pPr algn="ctr"/>
+            <a:endParaRPr/>
           </a:p>
         </p:txBody>
       </p:sp>
@@ -12197,6 +12542,7 @@
           <a:lstStyle/>
           <a:p>
             <a:pPr algn="ctr"/>
+            <a:endParaRPr/>
           </a:p>
         </p:txBody>
       </p:sp>
@@ -12217,7 +12563,7 @@
           <a:noFill/>
         </p:spPr>
         <p:txBody>
-          <a:bodyPr wrap="square" lIns="45720" rIns="45720" tIns="18288" bIns="18288">
+          <a:bodyPr wrap="square" lIns="45720" tIns="18288" rIns="45720" bIns="18288">
             <a:spAutoFit/>
           </a:bodyPr>
           <a:lstStyle/>
@@ -12252,7 +12598,7 @@
           <a:noFill/>
         </p:spPr>
         <p:txBody>
-          <a:bodyPr wrap="square" lIns="45720" rIns="45720" tIns="18288" bIns="18288">
+          <a:bodyPr wrap="square" lIns="45720" tIns="18288" rIns="45720" bIns="18288">
             <a:spAutoFit/>
           </a:bodyPr>
           <a:lstStyle/>
@@ -12370,7 +12716,7 @@
           <a:noFill/>
         </p:spPr>
         <p:txBody>
-          <a:bodyPr wrap="square" lIns="45720" rIns="45720" tIns="18288" bIns="18288">
+          <a:bodyPr wrap="square" lIns="45720" tIns="18288" rIns="45720" bIns="18288">
             <a:spAutoFit/>
           </a:bodyPr>
           <a:lstStyle/>
@@ -12405,7 +12751,7 @@
           <a:noFill/>
         </p:spPr>
         <p:txBody>
-          <a:bodyPr wrap="square" lIns="45720" rIns="45720" tIns="18288" bIns="18288">
+          <a:bodyPr wrap="square" lIns="45720" tIns="18288" rIns="45720" bIns="18288">
             <a:spAutoFit/>
           </a:bodyPr>
           <a:lstStyle/>
@@ -12432,7 +12778,7 @@
 </file>
 
 <file path=ppt/slides/slide4.xml><?xml version="1.0" encoding="utf-8"?>
-<p:sld xmlns:a="http://schemas.openxmlformats.org/drawingml/2006/main" xmlns:p="http://schemas.openxmlformats.org/presentationml/2006/main" xmlns:r="http://schemas.openxmlformats.org/officeDocument/2006/relationships">
+<p:sld xmlns:a="http://schemas.openxmlformats.org/drawingml/2006/main" xmlns:r="http://schemas.openxmlformats.org/officeDocument/2006/relationships" xmlns:p="http://schemas.openxmlformats.org/presentationml/2006/main">
   <p:cSld>
     <p:spTree>
       <p:nvGrpSpPr>
@@ -12440,7 +12786,14 @@
         <p:cNvGrpSpPr/>
         <p:nvPr/>
       </p:nvGrpSpPr>
-      <p:grpSpPr/>
+      <p:grpSpPr>
+        <a:xfrm>
+          <a:off x="0" y="0"/>
+          <a:ext cx="0" cy="0"/>
+          <a:chOff x="0" y="0"/>
+          <a:chExt cx="0" cy="0"/>
+        </a:xfrm>
+      </p:grpSpPr>
       <p:sp>
         <p:nvSpPr>
           <p:cNvPr id="2" name="Rectangle 1"/>
@@ -12482,6 +12835,7 @@
           <a:lstStyle/>
           <a:p>
             <a:pPr algn="ctr"/>
+            <a:endParaRPr/>
           </a:p>
         </p:txBody>
       </p:sp>
@@ -12526,6 +12880,7 @@
           <a:lstStyle/>
           <a:p>
             <a:pPr algn="ctr"/>
+            <a:endParaRPr/>
           </a:p>
         </p:txBody>
       </p:sp>
@@ -12546,7 +12901,7 @@
           <a:noFill/>
         </p:spPr>
         <p:txBody>
-          <a:bodyPr wrap="square" lIns="45720" rIns="45720" tIns="18288" bIns="18288">
+          <a:bodyPr wrap="square" lIns="45720" tIns="18288" rIns="45720" bIns="18288">
             <a:spAutoFit/>
           </a:bodyPr>
           <a:lstStyle/>
@@ -12581,7 +12936,7 @@
           <a:noFill/>
         </p:spPr>
         <p:txBody>
-          <a:bodyPr wrap="square" lIns="45720" rIns="45720" tIns="18288" bIns="18288">
+          <a:bodyPr wrap="square" lIns="45720" tIns="18288" rIns="45720" bIns="18288">
             <a:spAutoFit/>
           </a:bodyPr>
           <a:lstStyle/>
@@ -12616,7 +12971,7 @@
           <a:noFill/>
         </p:spPr>
         <p:txBody>
-          <a:bodyPr wrap="square" lIns="45720" rIns="45720" tIns="18288" bIns="18288">
+          <a:bodyPr wrap="square" lIns="45720" tIns="18288" rIns="45720" bIns="18288">
             <a:spAutoFit/>
           </a:bodyPr>
           <a:lstStyle/>
@@ -12749,7 +13104,7 @@
           <a:noFill/>
         </p:spPr>
         <p:txBody>
-          <a:bodyPr wrap="square" lIns="45720" rIns="45720" tIns="18288" bIns="18288">
+          <a:bodyPr wrap="square" lIns="45720" tIns="18288" rIns="45720" bIns="18288">
             <a:spAutoFit/>
           </a:bodyPr>
           <a:lstStyle/>
@@ -12808,7 +13163,7 @@
           <a:noFill/>
         </p:spPr>
         <p:txBody>
-          <a:bodyPr wrap="square" lIns="45720" rIns="45720" tIns="18288" bIns="18288">
+          <a:bodyPr wrap="square" lIns="45720" tIns="18288" rIns="45720" bIns="18288">
             <a:spAutoFit/>
           </a:bodyPr>
           <a:lstStyle/>
@@ -12867,6 +13222,7 @@
           <a:lstStyle/>
           <a:p>
             <a:pPr algn="ctr"/>
+            <a:endParaRPr/>
           </a:p>
         </p:txBody>
       </p:sp>
@@ -12887,14 +13243,14 @@
           <a:noFill/>
         </p:spPr>
         <p:txBody>
-          <a:bodyPr wrap="square" lIns="45720" rIns="45720" tIns="18288" bIns="18288">
-            <a:spAutoFit/>
-          </a:bodyPr>
-          <a:lstStyle/>
-          <a:p>
-            <a:pPr algn="l"/>
-            <a:r>
-              <a:rPr sz="1300" b="1">
+          <a:bodyPr wrap="square" lIns="45720" tIns="18288" rIns="45720" bIns="18288">
+            <a:spAutoFit/>
+          </a:bodyPr>
+          <a:lstStyle/>
+          <a:p>
+            <a:pPr algn="l"/>
+            <a:r>
+              <a:rPr sz="1300" b="1" dirty="0">
                 <a:solidFill>
                   <a:srgbClr val="FFFFFF"/>
                 </a:solidFill>
@@ -12922,7 +13278,7 @@
           <a:noFill/>
         </p:spPr>
         <p:txBody>
-          <a:bodyPr wrap="square" lIns="45720" rIns="45720" tIns="18288" bIns="18288">
+          <a:bodyPr wrap="square" lIns="45720" tIns="18288" rIns="45720" bIns="18288">
             <a:spAutoFit/>
           </a:bodyPr>
           <a:lstStyle/>
@@ -12957,7 +13313,7 @@
           <a:noFill/>
         </p:spPr>
         <p:txBody>
-          <a:bodyPr wrap="square" lIns="45720" rIns="45720" tIns="18288" bIns="18288">
+          <a:bodyPr wrap="square" lIns="45720" tIns="18288" rIns="45720" bIns="18288">
             <a:spAutoFit/>
           </a:bodyPr>
           <a:lstStyle/>
@@ -12984,7 +13340,7 @@
 </file>
 
 <file path=ppt/slides/slide5.xml><?xml version="1.0" encoding="utf-8"?>
-<p:sld xmlns:a="http://schemas.openxmlformats.org/drawingml/2006/main" xmlns:p="http://schemas.openxmlformats.org/presentationml/2006/main" xmlns:r="http://schemas.openxmlformats.org/officeDocument/2006/relationships">
+<p:sld xmlns:a="http://schemas.openxmlformats.org/drawingml/2006/main" xmlns:r="http://schemas.openxmlformats.org/officeDocument/2006/relationships" xmlns:p="http://schemas.openxmlformats.org/presentationml/2006/main">
   <p:cSld>
     <p:spTree>
       <p:nvGrpSpPr>
@@ -12992,7 +13348,14 @@
         <p:cNvGrpSpPr/>
         <p:nvPr/>
       </p:nvGrpSpPr>
-      <p:grpSpPr/>
+      <p:grpSpPr>
+        <a:xfrm>
+          <a:off x="0" y="0"/>
+          <a:ext cx="0" cy="0"/>
+          <a:chOff x="0" y="0"/>
+          <a:chExt cx="0" cy="0"/>
+        </a:xfrm>
+      </p:grpSpPr>
       <p:sp>
         <p:nvSpPr>
           <p:cNvPr id="2" name="Rectangle 1"/>
@@ -13034,6 +13397,7 @@
           <a:lstStyle/>
           <a:p>
             <a:pPr algn="ctr"/>
+            <a:endParaRPr/>
           </a:p>
         </p:txBody>
       </p:sp>
@@ -13078,6 +13442,7 @@
           <a:lstStyle/>
           <a:p>
             <a:pPr algn="ctr"/>
+            <a:endParaRPr/>
           </a:p>
         </p:txBody>
       </p:sp>
@@ -13098,7 +13463,7 @@
           <a:noFill/>
         </p:spPr>
         <p:txBody>
-          <a:bodyPr wrap="square" lIns="45720" rIns="45720" tIns="18288" bIns="18288">
+          <a:bodyPr wrap="square" lIns="45720" tIns="18288" rIns="45720" bIns="18288">
             <a:spAutoFit/>
           </a:bodyPr>
           <a:lstStyle/>
@@ -13133,7 +13498,7 @@
           <a:noFill/>
         </p:spPr>
         <p:txBody>
-          <a:bodyPr wrap="square" lIns="45720" rIns="45720" tIns="18288" bIns="18288">
+          <a:bodyPr wrap="square" lIns="45720" tIns="18288" rIns="45720" bIns="18288">
             <a:spAutoFit/>
           </a:bodyPr>
           <a:lstStyle/>
@@ -13168,7 +13533,7 @@
           <a:noFill/>
         </p:spPr>
         <p:txBody>
-          <a:bodyPr wrap="square" lIns="45720" rIns="45720" tIns="18288" bIns="18288">
+          <a:bodyPr wrap="square" lIns="45720" tIns="18288" rIns="45720" bIns="18288">
             <a:spAutoFit/>
           </a:bodyPr>
           <a:lstStyle/>
@@ -13229,6 +13594,7 @@
           <a:lstStyle/>
           <a:p>
             <a:pPr algn="ctr"/>
+            <a:endParaRPr/>
           </a:p>
         </p:txBody>
       </p:sp>
@@ -13275,6 +13641,7 @@
           <a:lstStyle/>
           <a:p>
             <a:pPr algn="ctr"/>
+            <a:endParaRPr/>
           </a:p>
         </p:txBody>
       </p:sp>
@@ -13295,7 +13662,7 @@
           <a:noFill/>
         </p:spPr>
         <p:txBody>
-          <a:bodyPr wrap="square" lIns="45720" rIns="45720" tIns="18288" bIns="18288">
+          <a:bodyPr wrap="square" lIns="45720" tIns="18288" rIns="45720" bIns="18288">
             <a:spAutoFit/>
           </a:bodyPr>
           <a:lstStyle/>
@@ -13330,7 +13697,7 @@
           <a:noFill/>
         </p:spPr>
         <p:txBody>
-          <a:bodyPr wrap="square" lIns="45720" rIns="45720" tIns="18288" bIns="18288">
+          <a:bodyPr wrap="square" lIns="45720" tIns="18288" rIns="45720" bIns="18288">
             <a:spAutoFit/>
           </a:bodyPr>
           <a:lstStyle/>
@@ -13391,6 +13758,7 @@
           <a:lstStyle/>
           <a:p>
             <a:pPr algn="ctr"/>
+            <a:endParaRPr/>
           </a:p>
         </p:txBody>
       </p:sp>
@@ -13437,6 +13805,7 @@
           <a:lstStyle/>
           <a:p>
             <a:pPr algn="ctr"/>
+            <a:endParaRPr/>
           </a:p>
         </p:txBody>
       </p:sp>
@@ -13457,7 +13826,7 @@
           <a:noFill/>
         </p:spPr>
         <p:txBody>
-          <a:bodyPr wrap="square" lIns="45720" rIns="45720" tIns="18288" bIns="18288">
+          <a:bodyPr wrap="square" lIns="45720" tIns="18288" rIns="45720" bIns="18288">
             <a:spAutoFit/>
           </a:bodyPr>
           <a:lstStyle/>
@@ -13492,7 +13861,7 @@
           <a:noFill/>
         </p:spPr>
         <p:txBody>
-          <a:bodyPr wrap="square" lIns="45720" rIns="45720" tIns="18288" bIns="18288">
+          <a:bodyPr wrap="square" lIns="45720" tIns="18288" rIns="45720" bIns="18288">
             <a:spAutoFit/>
           </a:bodyPr>
           <a:lstStyle/>
@@ -13553,6 +13922,7 @@
           <a:lstStyle/>
           <a:p>
             <a:pPr algn="ctr"/>
+            <a:endParaRPr/>
           </a:p>
         </p:txBody>
       </p:sp>
@@ -13599,6 +13969,7 @@
           <a:lstStyle/>
           <a:p>
             <a:pPr algn="ctr"/>
+            <a:endParaRPr/>
           </a:p>
         </p:txBody>
       </p:sp>
@@ -13619,7 +13990,7 @@
           <a:noFill/>
         </p:spPr>
         <p:txBody>
-          <a:bodyPr wrap="square" lIns="45720" rIns="45720" tIns="18288" bIns="18288">
+          <a:bodyPr wrap="square" lIns="45720" tIns="18288" rIns="45720" bIns="18288">
             <a:spAutoFit/>
           </a:bodyPr>
           <a:lstStyle/>
@@ -13654,7 +14025,7 @@
           <a:noFill/>
         </p:spPr>
         <p:txBody>
-          <a:bodyPr wrap="square" lIns="45720" rIns="45720" tIns="18288" bIns="18288">
+          <a:bodyPr wrap="square" lIns="45720" tIns="18288" rIns="45720" bIns="18288">
             <a:spAutoFit/>
           </a:bodyPr>
           <a:lstStyle/>
@@ -13715,6 +14086,7 @@
           <a:lstStyle/>
           <a:p>
             <a:pPr algn="ctr"/>
+            <a:endParaRPr/>
           </a:p>
         </p:txBody>
       </p:sp>
@@ -13761,6 +14133,7 @@
           <a:lstStyle/>
           <a:p>
             <a:pPr algn="ctr"/>
+            <a:endParaRPr/>
           </a:p>
         </p:txBody>
       </p:sp>
@@ -13781,7 +14154,7 @@
           <a:noFill/>
         </p:spPr>
         <p:txBody>
-          <a:bodyPr wrap="square" lIns="45720" rIns="45720" tIns="18288" bIns="18288">
+          <a:bodyPr wrap="square" lIns="45720" tIns="18288" rIns="45720" bIns="18288">
             <a:spAutoFit/>
           </a:bodyPr>
           <a:lstStyle/>
@@ -13816,7 +14189,7 @@
           <a:noFill/>
         </p:spPr>
         <p:txBody>
-          <a:bodyPr wrap="square" lIns="45720" rIns="45720" tIns="18288" bIns="18288">
+          <a:bodyPr wrap="square" lIns="45720" tIns="18288" rIns="45720" bIns="18288">
             <a:spAutoFit/>
           </a:bodyPr>
           <a:lstStyle/>
@@ -13877,6 +14250,7 @@
           <a:lstStyle/>
           <a:p>
             <a:pPr algn="ctr"/>
+            <a:endParaRPr/>
           </a:p>
         </p:txBody>
       </p:sp>
@@ -13923,6 +14297,7 @@
           <a:lstStyle/>
           <a:p>
             <a:pPr algn="ctr"/>
+            <a:endParaRPr/>
           </a:p>
         </p:txBody>
       </p:sp>
@@ -13943,7 +14318,7 @@
           <a:noFill/>
         </p:spPr>
         <p:txBody>
-          <a:bodyPr wrap="square" lIns="45720" rIns="45720" tIns="18288" bIns="18288">
+          <a:bodyPr wrap="square" lIns="45720" tIns="18288" rIns="45720" bIns="18288">
             <a:spAutoFit/>
           </a:bodyPr>
           <a:lstStyle/>
@@ -13978,7 +14353,7 @@
           <a:noFill/>
         </p:spPr>
         <p:txBody>
-          <a:bodyPr wrap="square" lIns="45720" rIns="45720" tIns="18288" bIns="18288">
+          <a:bodyPr wrap="square" lIns="45720" tIns="18288" rIns="45720" bIns="18288">
             <a:spAutoFit/>
           </a:bodyPr>
           <a:lstStyle/>
@@ -14013,7 +14388,7 @@
           <a:noFill/>
         </p:spPr>
         <p:txBody>
-          <a:bodyPr wrap="square" lIns="45720" rIns="45720" tIns="18288" bIns="18288">
+          <a:bodyPr wrap="square" lIns="45720" tIns="18288" rIns="45720" bIns="18288">
             <a:spAutoFit/>
           </a:bodyPr>
           <a:lstStyle/>
@@ -14074,6 +14449,7 @@
           <a:lstStyle/>
           <a:p>
             <a:pPr algn="ctr"/>
+            <a:endParaRPr/>
           </a:p>
         </p:txBody>
       </p:sp>
@@ -14120,6 +14496,7 @@
           <a:lstStyle/>
           <a:p>
             <a:pPr algn="ctr"/>
+            <a:endParaRPr/>
           </a:p>
         </p:txBody>
       </p:sp>
@@ -14166,6 +14543,7 @@
           <a:lstStyle/>
           <a:p>
             <a:pPr algn="ctr"/>
+            <a:endParaRPr/>
           </a:p>
         </p:txBody>
       </p:sp>
@@ -14186,7 +14564,7 @@
           <a:noFill/>
         </p:spPr>
         <p:txBody>
-          <a:bodyPr wrap="square" lIns="45720" rIns="45720" tIns="18288" bIns="18288">
+          <a:bodyPr wrap="square" lIns="45720" tIns="18288" rIns="45720" bIns="18288">
             <a:spAutoFit/>
           </a:bodyPr>
           <a:lstStyle/>
@@ -14221,7 +14599,7 @@
           <a:noFill/>
         </p:spPr>
         <p:txBody>
-          <a:bodyPr wrap="square" lIns="45720" rIns="45720" tIns="18288" bIns="18288">
+          <a:bodyPr wrap="square" lIns="45720" tIns="18288" rIns="45720" bIns="18288">
             <a:spAutoFit/>
           </a:bodyPr>
           <a:lstStyle/>
@@ -14256,7 +14634,7 @@
           <a:noFill/>
         </p:spPr>
         <p:txBody>
-          <a:bodyPr wrap="square" lIns="45720" rIns="45720" tIns="18288" bIns="18288">
+          <a:bodyPr wrap="square" lIns="45720" tIns="18288" rIns="45720" bIns="18288">
             <a:spAutoFit/>
           </a:bodyPr>
           <a:lstStyle/>
@@ -14317,6 +14695,7 @@
           <a:lstStyle/>
           <a:p>
             <a:pPr algn="ctr"/>
+            <a:endParaRPr/>
           </a:p>
         </p:txBody>
       </p:sp>
@@ -14363,6 +14742,7 @@
           <a:lstStyle/>
           <a:p>
             <a:pPr algn="ctr"/>
+            <a:endParaRPr/>
           </a:p>
         </p:txBody>
       </p:sp>
@@ -14409,6 +14789,7 @@
           <a:lstStyle/>
           <a:p>
             <a:pPr algn="ctr"/>
+            <a:endParaRPr/>
           </a:p>
         </p:txBody>
       </p:sp>
@@ -14429,7 +14810,7 @@
           <a:noFill/>
         </p:spPr>
         <p:txBody>
-          <a:bodyPr wrap="square" lIns="45720" rIns="45720" tIns="18288" bIns="18288">
+          <a:bodyPr wrap="square" lIns="45720" tIns="18288" rIns="45720" bIns="18288">
             <a:spAutoFit/>
           </a:bodyPr>
           <a:lstStyle/>
@@ -14464,7 +14845,7 @@
           <a:noFill/>
         </p:spPr>
         <p:txBody>
-          <a:bodyPr wrap="square" lIns="45720" rIns="45720" tIns="18288" bIns="18288">
+          <a:bodyPr wrap="square" lIns="45720" tIns="18288" rIns="45720" bIns="18288">
             <a:spAutoFit/>
           </a:bodyPr>
           <a:lstStyle/>
@@ -14499,7 +14880,7 @@
           <a:noFill/>
         </p:spPr>
         <p:txBody>
-          <a:bodyPr wrap="square" lIns="45720" rIns="45720" tIns="18288" bIns="18288">
+          <a:bodyPr wrap="square" lIns="45720" tIns="18288" rIns="45720" bIns="18288">
             <a:spAutoFit/>
           </a:bodyPr>
           <a:lstStyle/>
@@ -14560,6 +14941,7 @@
           <a:lstStyle/>
           <a:p>
             <a:pPr algn="ctr"/>
+            <a:endParaRPr/>
           </a:p>
         </p:txBody>
       </p:sp>
@@ -14606,6 +14988,7 @@
           <a:lstStyle/>
           <a:p>
             <a:pPr algn="ctr"/>
+            <a:endParaRPr/>
           </a:p>
         </p:txBody>
       </p:sp>
@@ -14652,6 +15035,7 @@
           <a:lstStyle/>
           <a:p>
             <a:pPr algn="ctr"/>
+            <a:endParaRPr/>
           </a:p>
         </p:txBody>
       </p:sp>
@@ -14672,7 +15056,7 @@
           <a:noFill/>
         </p:spPr>
         <p:txBody>
-          <a:bodyPr wrap="square" lIns="45720" rIns="45720" tIns="18288" bIns="18288">
+          <a:bodyPr wrap="square" lIns="45720" tIns="18288" rIns="45720" bIns="18288">
             <a:spAutoFit/>
           </a:bodyPr>
           <a:lstStyle/>
@@ -14707,7 +15091,7 @@
           <a:noFill/>
         </p:spPr>
         <p:txBody>
-          <a:bodyPr wrap="square" lIns="45720" rIns="45720" tIns="18288" bIns="18288">
+          <a:bodyPr wrap="square" lIns="45720" tIns="18288" rIns="45720" bIns="18288">
             <a:spAutoFit/>
           </a:bodyPr>
           <a:lstStyle/>
@@ -14742,7 +15126,7 @@
           <a:noFill/>
         </p:spPr>
         <p:txBody>
-          <a:bodyPr wrap="square" lIns="45720" rIns="45720" tIns="18288" bIns="18288">
+          <a:bodyPr wrap="square" lIns="45720" tIns="18288" rIns="45720" bIns="18288">
             <a:spAutoFit/>
           </a:bodyPr>
           <a:lstStyle/>
@@ -14803,6 +15187,7 @@
           <a:lstStyle/>
           <a:p>
             <a:pPr algn="ctr"/>
+            <a:endParaRPr/>
           </a:p>
         </p:txBody>
       </p:sp>
@@ -14849,6 +15234,7 @@
           <a:lstStyle/>
           <a:p>
             <a:pPr algn="ctr"/>
+            <a:endParaRPr/>
           </a:p>
         </p:txBody>
       </p:sp>
@@ -14895,6 +15281,7 @@
           <a:lstStyle/>
           <a:p>
             <a:pPr algn="ctr"/>
+            <a:endParaRPr/>
           </a:p>
         </p:txBody>
       </p:sp>
@@ -14915,7 +15302,7 @@
           <a:noFill/>
         </p:spPr>
         <p:txBody>
-          <a:bodyPr wrap="square" lIns="45720" rIns="45720" tIns="18288" bIns="18288">
+          <a:bodyPr wrap="square" lIns="45720" tIns="18288" rIns="45720" bIns="18288">
             <a:spAutoFit/>
           </a:bodyPr>
           <a:lstStyle/>
@@ -14950,7 +15337,7 @@
           <a:noFill/>
         </p:spPr>
         <p:txBody>
-          <a:bodyPr wrap="square" lIns="45720" rIns="45720" tIns="18288" bIns="18288">
+          <a:bodyPr wrap="square" lIns="45720" tIns="18288" rIns="45720" bIns="18288">
             <a:spAutoFit/>
           </a:bodyPr>
           <a:lstStyle/>
@@ -14985,7 +15372,7 @@
           <a:noFill/>
         </p:spPr>
         <p:txBody>
-          <a:bodyPr wrap="square" lIns="45720" rIns="45720" tIns="18288" bIns="18288">
+          <a:bodyPr wrap="square" lIns="45720" tIns="18288" rIns="45720" bIns="18288">
             <a:spAutoFit/>
           </a:bodyPr>
           <a:lstStyle/>
@@ -15046,6 +15433,7 @@
           <a:lstStyle/>
           <a:p>
             <a:pPr algn="ctr"/>
+            <a:endParaRPr/>
           </a:p>
         </p:txBody>
       </p:sp>
@@ -15092,6 +15480,7 @@
           <a:lstStyle/>
           <a:p>
             <a:pPr algn="ctr"/>
+            <a:endParaRPr/>
           </a:p>
         </p:txBody>
       </p:sp>
@@ -15138,6 +15527,7 @@
           <a:lstStyle/>
           <a:p>
             <a:pPr algn="ctr"/>
+            <a:endParaRPr/>
           </a:p>
         </p:txBody>
       </p:sp>
@@ -15158,7 +15548,7 @@
           <a:noFill/>
         </p:spPr>
         <p:txBody>
-          <a:bodyPr wrap="square" lIns="45720" rIns="45720" tIns="18288" bIns="18288">
+          <a:bodyPr wrap="square" lIns="45720" tIns="18288" rIns="45720" bIns="18288">
             <a:spAutoFit/>
           </a:bodyPr>
           <a:lstStyle/>
@@ -15193,7 +15583,7 @@
           <a:noFill/>
         </p:spPr>
         <p:txBody>
-          <a:bodyPr wrap="square" lIns="45720" rIns="45720" tIns="18288" bIns="18288">
+          <a:bodyPr wrap="square" lIns="45720" tIns="18288" rIns="45720" bIns="18288">
             <a:spAutoFit/>
           </a:bodyPr>
           <a:lstStyle/>
@@ -15228,7 +15618,7 @@
           <a:noFill/>
         </p:spPr>
         <p:txBody>
-          <a:bodyPr wrap="square" lIns="45720" rIns="45720" tIns="18288" bIns="18288">
+          <a:bodyPr wrap="square" lIns="45720" tIns="18288" rIns="45720" bIns="18288">
             <a:spAutoFit/>
           </a:bodyPr>
           <a:lstStyle/>
@@ -15289,6 +15679,7 @@
           <a:lstStyle/>
           <a:p>
             <a:pPr algn="ctr"/>
+            <a:endParaRPr/>
           </a:p>
         </p:txBody>
       </p:sp>
@@ -15335,6 +15726,7 @@
           <a:lstStyle/>
           <a:p>
             <a:pPr algn="ctr"/>
+            <a:endParaRPr/>
           </a:p>
         </p:txBody>
       </p:sp>
@@ -15381,6 +15773,7 @@
           <a:lstStyle/>
           <a:p>
             <a:pPr algn="ctr"/>
+            <a:endParaRPr/>
           </a:p>
         </p:txBody>
       </p:sp>
@@ -15401,7 +15794,7 @@
           <a:noFill/>
         </p:spPr>
         <p:txBody>
-          <a:bodyPr wrap="square" lIns="45720" rIns="45720" tIns="18288" bIns="18288">
+          <a:bodyPr wrap="square" lIns="45720" tIns="18288" rIns="45720" bIns="18288">
             <a:spAutoFit/>
           </a:bodyPr>
           <a:lstStyle/>
@@ -15436,7 +15829,7 @@
           <a:noFill/>
         </p:spPr>
         <p:txBody>
-          <a:bodyPr wrap="square" lIns="45720" rIns="45720" tIns="18288" bIns="18288">
+          <a:bodyPr wrap="square" lIns="45720" tIns="18288" rIns="45720" bIns="18288">
             <a:spAutoFit/>
           </a:bodyPr>
           <a:lstStyle/>
@@ -15471,7 +15864,7 @@
           <a:noFill/>
         </p:spPr>
         <p:txBody>
-          <a:bodyPr wrap="square" lIns="45720" rIns="45720" tIns="18288" bIns="18288">
+          <a:bodyPr wrap="square" lIns="45720" tIns="18288" rIns="45720" bIns="18288">
             <a:spAutoFit/>
           </a:bodyPr>
           <a:lstStyle/>
@@ -15532,6 +15925,7 @@
           <a:lstStyle/>
           <a:p>
             <a:pPr algn="ctr"/>
+            <a:endParaRPr/>
           </a:p>
         </p:txBody>
       </p:sp>
@@ -15578,6 +15972,7 @@
           <a:lstStyle/>
           <a:p>
             <a:pPr algn="ctr"/>
+            <a:endParaRPr/>
           </a:p>
         </p:txBody>
       </p:sp>
@@ -15624,6 +16019,7 @@
           <a:lstStyle/>
           <a:p>
             <a:pPr algn="ctr"/>
+            <a:endParaRPr/>
           </a:p>
         </p:txBody>
       </p:sp>
@@ -15644,7 +16040,7 @@
           <a:noFill/>
         </p:spPr>
         <p:txBody>
-          <a:bodyPr wrap="square" lIns="45720" rIns="45720" tIns="18288" bIns="18288">
+          <a:bodyPr wrap="square" lIns="45720" tIns="18288" rIns="45720" bIns="18288">
             <a:spAutoFit/>
           </a:bodyPr>
           <a:lstStyle/>
@@ -15679,7 +16075,7 @@
           <a:noFill/>
         </p:spPr>
         <p:txBody>
-          <a:bodyPr wrap="square" lIns="45720" rIns="45720" tIns="18288" bIns="18288">
+          <a:bodyPr wrap="square" lIns="45720" tIns="18288" rIns="45720" bIns="18288">
             <a:spAutoFit/>
           </a:bodyPr>
           <a:lstStyle/>
@@ -15714,7 +16110,7 @@
           <a:noFill/>
         </p:spPr>
         <p:txBody>
-          <a:bodyPr wrap="square" lIns="45720" rIns="45720" tIns="18288" bIns="18288">
+          <a:bodyPr wrap="square" lIns="45720" tIns="18288" rIns="45720" bIns="18288">
             <a:spAutoFit/>
           </a:bodyPr>
           <a:lstStyle/>
@@ -15773,6 +16169,7 @@
           <a:lstStyle/>
           <a:p>
             <a:pPr algn="ctr"/>
+            <a:endParaRPr/>
           </a:p>
         </p:txBody>
       </p:sp>
@@ -15793,7 +16190,7 @@
           <a:noFill/>
         </p:spPr>
         <p:txBody>
-          <a:bodyPr wrap="square" lIns="45720" rIns="45720" tIns="18288" bIns="18288">
+          <a:bodyPr wrap="square" lIns="45720" tIns="18288" rIns="45720" bIns="18288">
             <a:spAutoFit/>
           </a:bodyPr>
           <a:lstStyle/>
@@ -15828,7 +16225,7 @@
           <a:noFill/>
         </p:spPr>
         <p:txBody>
-          <a:bodyPr wrap="square" lIns="45720" rIns="45720" tIns="18288" bIns="18288">
+          <a:bodyPr wrap="square" lIns="45720" tIns="18288" rIns="45720" bIns="18288">
             <a:spAutoFit/>
           </a:bodyPr>
           <a:lstStyle/>
@@ -15846,15 +16243,12 @@
           </a:p>
           <a:p>
             <a:pPr algn="l"/>
-            <a:r>
-              <a:rPr sz="1400" b="0">
-                <a:solidFill>
-                  <a:srgbClr val="1F293A"/>
-                </a:solidFill>
-                <a:latin typeface="Calibri"/>
-              </a:rPr>
-              <a:t/>
-            </a:r>
+            <a:endParaRPr sz="1400" b="0">
+              <a:solidFill>
+                <a:srgbClr val="1F293A"/>
+              </a:solidFill>
+              <a:latin typeface="Calibri"/>
+            </a:endParaRPr>
           </a:p>
           <a:p>
             <a:pPr algn="l"/>
@@ -15899,7 +16293,7 @@
           <a:noFill/>
         </p:spPr>
         <p:txBody>
-          <a:bodyPr wrap="square" lIns="45720" rIns="45720" tIns="18288" bIns="18288">
+          <a:bodyPr wrap="square" lIns="45720" tIns="18288" rIns="45720" bIns="18288">
             <a:spAutoFit/>
           </a:bodyPr>
           <a:lstStyle/>
@@ -15934,7 +16328,7 @@
           <a:noFill/>
         </p:spPr>
         <p:txBody>
-          <a:bodyPr wrap="square" lIns="45720" rIns="45720" tIns="18288" bIns="18288">
+          <a:bodyPr wrap="square" lIns="45720" tIns="18288" rIns="45720" bIns="18288">
             <a:spAutoFit/>
           </a:bodyPr>
           <a:lstStyle/>
@@ -15961,7 +16355,7 @@
 </file>
 
 <file path=ppt/slides/slide6.xml><?xml version="1.0" encoding="utf-8"?>
-<p:sld xmlns:a="http://schemas.openxmlformats.org/drawingml/2006/main" xmlns:p="http://schemas.openxmlformats.org/presentationml/2006/main" xmlns:r="http://schemas.openxmlformats.org/officeDocument/2006/relationships">
+<p:sld xmlns:a="http://schemas.openxmlformats.org/drawingml/2006/main" xmlns:r="http://schemas.openxmlformats.org/officeDocument/2006/relationships" xmlns:p="http://schemas.openxmlformats.org/presentationml/2006/main">
   <p:cSld>
     <p:spTree>
       <p:nvGrpSpPr>
@@ -15969,7 +16363,14 @@
         <p:cNvGrpSpPr/>
         <p:nvPr/>
       </p:nvGrpSpPr>
-      <p:grpSpPr/>
+      <p:grpSpPr>
+        <a:xfrm>
+          <a:off x="0" y="0"/>
+          <a:ext cx="0" cy="0"/>
+          <a:chOff x="0" y="0"/>
+          <a:chExt cx="0" cy="0"/>
+        </a:xfrm>
+      </p:grpSpPr>
       <p:sp>
         <p:nvSpPr>
           <p:cNvPr id="2" name="Rectangle 1"/>
@@ -16011,6 +16412,7 @@
           <a:lstStyle/>
           <a:p>
             <a:pPr algn="ctr"/>
+            <a:endParaRPr/>
           </a:p>
         </p:txBody>
       </p:sp>
@@ -16055,6 +16457,7 @@
           <a:lstStyle/>
           <a:p>
             <a:pPr algn="ctr"/>
+            <a:endParaRPr/>
           </a:p>
         </p:txBody>
       </p:sp>
@@ -16075,7 +16478,7 @@
           <a:noFill/>
         </p:spPr>
         <p:txBody>
-          <a:bodyPr wrap="square" lIns="45720" rIns="45720" tIns="18288" bIns="18288">
+          <a:bodyPr wrap="square" lIns="45720" tIns="18288" rIns="45720" bIns="18288">
             <a:spAutoFit/>
           </a:bodyPr>
           <a:lstStyle/>
@@ -16110,7 +16513,7 @@
           <a:noFill/>
         </p:spPr>
         <p:txBody>
-          <a:bodyPr wrap="square" lIns="45720" rIns="45720" tIns="18288" bIns="18288">
+          <a:bodyPr wrap="square" lIns="45720" tIns="18288" rIns="45720" bIns="18288">
             <a:spAutoFit/>
           </a:bodyPr>
           <a:lstStyle/>
@@ -16171,6 +16574,7 @@
           <a:lstStyle/>
           <a:p>
             <a:pPr algn="ctr"/>
+            <a:endParaRPr/>
           </a:p>
         </p:txBody>
       </p:sp>
@@ -16215,7 +16619,7 @@
           <a:noFill/>
         </p:spPr>
         <p:txBody>
-          <a:bodyPr wrap="square" lIns="45720" rIns="45720" tIns="18288" bIns="18288">
+          <a:bodyPr wrap="square" lIns="45720" tIns="18288" rIns="45720" bIns="18288">
             <a:spAutoFit/>
           </a:bodyPr>
           <a:lstStyle/>
@@ -16250,7 +16654,7 @@
           <a:noFill/>
         </p:spPr>
         <p:txBody>
-          <a:bodyPr wrap="square" lIns="45720" rIns="45720" tIns="18288" bIns="18288">
+          <a:bodyPr wrap="square" lIns="45720" tIns="18288" rIns="45720" bIns="18288">
             <a:spAutoFit/>
           </a:bodyPr>
           <a:lstStyle/>
@@ -16311,6 +16715,7 @@
           <a:lstStyle/>
           <a:p>
             <a:pPr algn="ctr"/>
+            <a:endParaRPr/>
           </a:p>
         </p:txBody>
       </p:sp>
@@ -16355,7 +16760,7 @@
           <a:noFill/>
         </p:spPr>
         <p:txBody>
-          <a:bodyPr wrap="square" lIns="45720" rIns="45720" tIns="18288" bIns="18288">
+          <a:bodyPr wrap="square" lIns="45720" tIns="18288" rIns="45720" bIns="18288">
             <a:spAutoFit/>
           </a:bodyPr>
           <a:lstStyle/>
@@ -16390,7 +16795,7 @@
           <a:noFill/>
         </p:spPr>
         <p:txBody>
-          <a:bodyPr wrap="square" lIns="45720" rIns="45720" tIns="18288" bIns="18288">
+          <a:bodyPr wrap="square" lIns="45720" tIns="18288" rIns="45720" bIns="18288">
             <a:spAutoFit/>
           </a:bodyPr>
           <a:lstStyle/>
@@ -16451,6 +16856,7 @@
           <a:lstStyle/>
           <a:p>
             <a:pPr algn="ctr"/>
+            <a:endParaRPr/>
           </a:p>
         </p:txBody>
       </p:sp>
@@ -16495,7 +16901,7 @@
           <a:noFill/>
         </p:spPr>
         <p:txBody>
-          <a:bodyPr wrap="square" lIns="45720" rIns="45720" tIns="18288" bIns="18288">
+          <a:bodyPr wrap="square" lIns="45720" tIns="18288" rIns="45720" bIns="18288">
             <a:spAutoFit/>
           </a:bodyPr>
           <a:lstStyle/>
@@ -16530,7 +16936,7 @@
           <a:noFill/>
         </p:spPr>
         <p:txBody>
-          <a:bodyPr wrap="square" lIns="45720" rIns="45720" tIns="18288" bIns="18288">
+          <a:bodyPr wrap="square" lIns="45720" tIns="18288" rIns="45720" bIns="18288">
             <a:spAutoFit/>
           </a:bodyPr>
           <a:lstStyle/>
@@ -16591,6 +16997,7 @@
           <a:lstStyle/>
           <a:p>
             <a:pPr algn="ctr"/>
+            <a:endParaRPr/>
           </a:p>
         </p:txBody>
       </p:sp>
@@ -16635,7 +17042,7 @@
           <a:noFill/>
         </p:spPr>
         <p:txBody>
-          <a:bodyPr wrap="square" lIns="45720" rIns="45720" tIns="18288" bIns="18288">
+          <a:bodyPr wrap="square" lIns="45720" tIns="18288" rIns="45720" bIns="18288">
             <a:spAutoFit/>
           </a:bodyPr>
           <a:lstStyle/>
@@ -16670,7 +17077,7 @@
           <a:noFill/>
         </p:spPr>
         <p:txBody>
-          <a:bodyPr wrap="square" lIns="45720" rIns="45720" tIns="18288" bIns="18288">
+          <a:bodyPr wrap="square" lIns="45720" tIns="18288" rIns="45720" bIns="18288">
             <a:spAutoFit/>
           </a:bodyPr>
           <a:lstStyle/>
@@ -16705,7 +17112,7 @@
           <a:noFill/>
         </p:spPr>
         <p:txBody>
-          <a:bodyPr wrap="square" lIns="45720" rIns="45720" tIns="18288" bIns="18288">
+          <a:bodyPr wrap="square" lIns="45720" tIns="18288" rIns="45720" bIns="18288">
             <a:spAutoFit/>
           </a:bodyPr>
           <a:lstStyle/>
@@ -16740,7 +17147,7 @@
           <a:noFill/>
         </p:spPr>
         <p:txBody>
-          <a:bodyPr wrap="square" lIns="45720" rIns="45720" tIns="18288" bIns="18288">
+          <a:bodyPr wrap="square" lIns="45720" tIns="18288" rIns="45720" bIns="18288">
             <a:spAutoFit/>
           </a:bodyPr>
           <a:lstStyle/>
@@ -16775,7 +17182,7 @@
           <a:noFill/>
         </p:spPr>
         <p:txBody>
-          <a:bodyPr wrap="square" lIns="45720" rIns="45720" tIns="18288" bIns="18288">
+          <a:bodyPr wrap="square" lIns="45720" tIns="18288" rIns="45720" bIns="18288">
             <a:spAutoFit/>
           </a:bodyPr>
           <a:lstStyle/>
@@ -16802,7 +17209,7 @@
 </file>
 
 <file path=ppt/slides/slide7.xml><?xml version="1.0" encoding="utf-8"?>
-<p:sld xmlns:a="http://schemas.openxmlformats.org/drawingml/2006/main" xmlns:p="http://schemas.openxmlformats.org/presentationml/2006/main" xmlns:r="http://schemas.openxmlformats.org/officeDocument/2006/relationships">
+<p:sld xmlns:a="http://schemas.openxmlformats.org/drawingml/2006/main" xmlns:r="http://schemas.openxmlformats.org/officeDocument/2006/relationships" xmlns:p="http://schemas.openxmlformats.org/presentationml/2006/main">
   <p:cSld>
     <p:spTree>
       <p:nvGrpSpPr>
@@ -16810,7 +17217,14 @@
         <p:cNvGrpSpPr/>
         <p:nvPr/>
       </p:nvGrpSpPr>
-      <p:grpSpPr/>
+      <p:grpSpPr>
+        <a:xfrm>
+          <a:off x="0" y="0"/>
+          <a:ext cx="0" cy="0"/>
+          <a:chOff x="0" y="0"/>
+          <a:chExt cx="0" cy="0"/>
+        </a:xfrm>
+      </p:grpSpPr>
       <p:sp>
         <p:nvSpPr>
           <p:cNvPr id="2" name="Rectangle 1"/>
@@ -16852,6 +17266,7 @@
           <a:lstStyle/>
           <a:p>
             <a:pPr algn="ctr"/>
+            <a:endParaRPr/>
           </a:p>
         </p:txBody>
       </p:sp>
@@ -16896,6 +17311,7 @@
           <a:lstStyle/>
           <a:p>
             <a:pPr algn="ctr"/>
+            <a:endParaRPr/>
           </a:p>
         </p:txBody>
       </p:sp>
@@ -16916,7 +17332,7 @@
           <a:noFill/>
         </p:spPr>
         <p:txBody>
-          <a:bodyPr wrap="square" lIns="45720" rIns="45720" tIns="18288" bIns="18288">
+          <a:bodyPr wrap="square" lIns="45720" tIns="18288" rIns="45720" bIns="18288">
             <a:spAutoFit/>
           </a:bodyPr>
           <a:lstStyle/>
@@ -16951,7 +17367,7 @@
           <a:noFill/>
         </p:spPr>
         <p:txBody>
-          <a:bodyPr wrap="square" lIns="45720" rIns="45720" tIns="18288" bIns="18288">
+          <a:bodyPr wrap="square" lIns="45720" tIns="18288" rIns="45720" bIns="18288">
             <a:spAutoFit/>
           </a:bodyPr>
           <a:lstStyle/>
@@ -17010,6 +17426,7 @@
           <a:lstStyle/>
           <a:p>
             <a:pPr algn="ctr"/>
+            <a:endParaRPr/>
           </a:p>
         </p:txBody>
       </p:sp>
@@ -17030,7 +17447,7 @@
           <a:noFill/>
         </p:spPr>
         <p:txBody>
-          <a:bodyPr wrap="square" lIns="45720" rIns="45720" tIns="18288" bIns="18288">
+          <a:bodyPr wrap="square" lIns="45720" tIns="18288" rIns="45720" bIns="18288">
             <a:spAutoFit/>
           </a:bodyPr>
           <a:lstStyle/>
@@ -17089,6 +17506,7 @@
           <a:lstStyle/>
           <a:p>
             <a:pPr algn="ctr"/>
+            <a:endParaRPr/>
           </a:p>
         </p:txBody>
       </p:sp>
@@ -17109,7 +17527,7 @@
           <a:noFill/>
         </p:spPr>
         <p:txBody>
-          <a:bodyPr wrap="square" lIns="45720" rIns="45720" tIns="18288" bIns="18288">
+          <a:bodyPr wrap="square" lIns="45720" tIns="18288" rIns="45720" bIns="18288">
             <a:spAutoFit/>
           </a:bodyPr>
           <a:lstStyle/>
@@ -17168,6 +17586,7 @@
           <a:lstStyle/>
           <a:p>
             <a:pPr algn="ctr"/>
+            <a:endParaRPr/>
           </a:p>
         </p:txBody>
       </p:sp>
@@ -17188,7 +17607,7 @@
           <a:noFill/>
         </p:spPr>
         <p:txBody>
-          <a:bodyPr wrap="square" lIns="45720" rIns="45720" tIns="18288" bIns="18288">
+          <a:bodyPr wrap="square" lIns="45720" tIns="18288" rIns="45720" bIns="18288">
             <a:spAutoFit/>
           </a:bodyPr>
           <a:lstStyle/>
@@ -17247,6 +17666,7 @@
           <a:lstStyle/>
           <a:p>
             <a:pPr algn="ctr"/>
+            <a:endParaRPr/>
           </a:p>
         </p:txBody>
       </p:sp>
@@ -17267,7 +17687,7 @@
           <a:noFill/>
         </p:spPr>
         <p:txBody>
-          <a:bodyPr wrap="square" lIns="45720" rIns="45720" tIns="18288" bIns="18288">
+          <a:bodyPr wrap="square" lIns="45720" tIns="18288" rIns="45720" bIns="18288">
             <a:spAutoFit/>
           </a:bodyPr>
           <a:lstStyle/>
@@ -17326,6 +17746,7 @@
           <a:lstStyle/>
           <a:p>
             <a:pPr algn="ctr"/>
+            <a:endParaRPr/>
           </a:p>
         </p:txBody>
       </p:sp>
@@ -17346,7 +17767,7 @@
           <a:noFill/>
         </p:spPr>
         <p:txBody>
-          <a:bodyPr wrap="square" lIns="45720" rIns="45720" tIns="18288" bIns="18288">
+          <a:bodyPr wrap="square" lIns="45720" tIns="18288" rIns="45720" bIns="18288">
             <a:spAutoFit/>
           </a:bodyPr>
           <a:lstStyle/>
@@ -17405,6 +17826,7 @@
           <a:lstStyle/>
           <a:p>
             <a:pPr algn="ctr"/>
+            <a:endParaRPr/>
           </a:p>
         </p:txBody>
       </p:sp>
@@ -17425,7 +17847,7 @@
           <a:noFill/>
         </p:spPr>
         <p:txBody>
-          <a:bodyPr wrap="square" lIns="45720" rIns="45720" tIns="18288" bIns="18288">
+          <a:bodyPr wrap="square" lIns="45720" tIns="18288" rIns="45720" bIns="18288">
             <a:spAutoFit/>
           </a:bodyPr>
           <a:lstStyle/>
@@ -17486,6 +17908,7 @@
           <a:lstStyle/>
           <a:p>
             <a:pPr algn="ctr"/>
+            <a:endParaRPr/>
           </a:p>
         </p:txBody>
       </p:sp>
@@ -17532,6 +17955,7 @@
           <a:lstStyle/>
           <a:p>
             <a:pPr algn="ctr"/>
+            <a:endParaRPr/>
           </a:p>
         </p:txBody>
       </p:sp>
@@ -17578,6 +18002,7 @@
           <a:lstStyle/>
           <a:p>
             <a:pPr algn="ctr"/>
+            <a:endParaRPr/>
           </a:p>
         </p:txBody>
       </p:sp>
@@ -17624,6 +18049,7 @@
           <a:lstStyle/>
           <a:p>
             <a:pPr algn="ctr"/>
+            <a:endParaRPr/>
           </a:p>
         </p:txBody>
       </p:sp>
@@ -17670,6 +18096,7 @@
           <a:lstStyle/>
           <a:p>
             <a:pPr algn="ctr"/>
+            <a:endParaRPr/>
           </a:p>
         </p:txBody>
       </p:sp>
@@ -17716,6 +18143,7 @@
           <a:lstStyle/>
           <a:p>
             <a:pPr algn="ctr"/>
+            <a:endParaRPr/>
           </a:p>
         </p:txBody>
       </p:sp>
@@ -17736,7 +18164,7 @@
           <a:noFill/>
         </p:spPr>
         <p:txBody>
-          <a:bodyPr wrap="square" lIns="45720" rIns="45720" tIns="18288" bIns="18288">
+          <a:bodyPr wrap="square" lIns="45720" tIns="18288" rIns="45720" bIns="18288">
             <a:spAutoFit/>
           </a:bodyPr>
           <a:lstStyle/>
@@ -17771,7 +18199,7 @@
           <a:noFill/>
         </p:spPr>
         <p:txBody>
-          <a:bodyPr wrap="square" lIns="45720" rIns="45720" tIns="18288" bIns="18288">
+          <a:bodyPr wrap="square" lIns="45720" tIns="18288" rIns="45720" bIns="18288">
             <a:spAutoFit/>
           </a:bodyPr>
           <a:lstStyle/>
@@ -17806,7 +18234,7 @@
           <a:noFill/>
         </p:spPr>
         <p:txBody>
-          <a:bodyPr wrap="square" lIns="45720" rIns="45720" tIns="18288" bIns="18288">
+          <a:bodyPr wrap="square" lIns="45720" tIns="18288" rIns="45720" bIns="18288">
             <a:spAutoFit/>
           </a:bodyPr>
           <a:lstStyle/>
@@ -17841,7 +18269,7 @@
           <a:noFill/>
         </p:spPr>
         <p:txBody>
-          <a:bodyPr wrap="square" lIns="45720" rIns="45720" tIns="18288" bIns="18288">
+          <a:bodyPr wrap="square" lIns="45720" tIns="18288" rIns="45720" bIns="18288">
             <a:spAutoFit/>
           </a:bodyPr>
           <a:lstStyle/>
@@ -17876,7 +18304,7 @@
           <a:noFill/>
         </p:spPr>
         <p:txBody>
-          <a:bodyPr wrap="square" lIns="45720" rIns="45720" tIns="18288" bIns="18288">
+          <a:bodyPr wrap="square" lIns="45720" tIns="18288" rIns="45720" bIns="18288">
             <a:spAutoFit/>
           </a:bodyPr>
           <a:lstStyle/>
@@ -17911,7 +18339,7 @@
           <a:noFill/>
         </p:spPr>
         <p:txBody>
-          <a:bodyPr wrap="square" lIns="45720" rIns="45720" tIns="18288" bIns="18288">
+          <a:bodyPr wrap="square" lIns="45720" tIns="18288" rIns="45720" bIns="18288">
             <a:spAutoFit/>
           </a:bodyPr>
           <a:lstStyle/>
@@ -17972,6 +18400,7 @@
           <a:lstStyle/>
           <a:p>
             <a:pPr algn="ctr"/>
+            <a:endParaRPr/>
           </a:p>
         </p:txBody>
       </p:sp>
@@ -18018,6 +18447,7 @@
           <a:lstStyle/>
           <a:p>
             <a:pPr algn="ctr"/>
+            <a:endParaRPr/>
           </a:p>
         </p:txBody>
       </p:sp>
@@ -18064,6 +18494,7 @@
           <a:lstStyle/>
           <a:p>
             <a:pPr algn="ctr"/>
+            <a:endParaRPr/>
           </a:p>
         </p:txBody>
       </p:sp>
@@ -18110,6 +18541,7 @@
           <a:lstStyle/>
           <a:p>
             <a:pPr algn="ctr"/>
+            <a:endParaRPr/>
           </a:p>
         </p:txBody>
       </p:sp>
@@ -18156,6 +18588,7 @@
           <a:lstStyle/>
           <a:p>
             <a:pPr algn="ctr"/>
+            <a:endParaRPr/>
           </a:p>
         </p:txBody>
       </p:sp>
@@ -18202,6 +18635,7 @@
           <a:lstStyle/>
           <a:p>
             <a:pPr algn="ctr"/>
+            <a:endParaRPr/>
           </a:p>
         </p:txBody>
       </p:sp>
@@ -18222,7 +18656,7 @@
           <a:noFill/>
         </p:spPr>
         <p:txBody>
-          <a:bodyPr wrap="square" lIns="45720" rIns="45720" tIns="18288" bIns="18288">
+          <a:bodyPr wrap="square" lIns="45720" tIns="18288" rIns="45720" bIns="18288">
             <a:spAutoFit/>
           </a:bodyPr>
           <a:lstStyle/>
@@ -18257,7 +18691,7 @@
           <a:noFill/>
         </p:spPr>
         <p:txBody>
-          <a:bodyPr wrap="square" lIns="45720" rIns="45720" tIns="18288" bIns="18288">
+          <a:bodyPr wrap="square" lIns="45720" tIns="18288" rIns="45720" bIns="18288">
             <a:spAutoFit/>
           </a:bodyPr>
           <a:lstStyle/>
@@ -18292,7 +18726,7 @@
           <a:noFill/>
         </p:spPr>
         <p:txBody>
-          <a:bodyPr wrap="square" lIns="45720" rIns="45720" tIns="18288" bIns="18288">
+          <a:bodyPr wrap="square" lIns="45720" tIns="18288" rIns="45720" bIns="18288">
             <a:spAutoFit/>
           </a:bodyPr>
           <a:lstStyle/>
@@ -18327,7 +18761,7 @@
           <a:noFill/>
         </p:spPr>
         <p:txBody>
-          <a:bodyPr wrap="square" lIns="45720" rIns="45720" tIns="18288" bIns="18288">
+          <a:bodyPr wrap="square" lIns="45720" tIns="18288" rIns="45720" bIns="18288">
             <a:spAutoFit/>
           </a:bodyPr>
           <a:lstStyle/>
@@ -18362,7 +18796,7 @@
           <a:noFill/>
         </p:spPr>
         <p:txBody>
-          <a:bodyPr wrap="square" lIns="45720" rIns="45720" tIns="18288" bIns="18288">
+          <a:bodyPr wrap="square" lIns="45720" tIns="18288" rIns="45720" bIns="18288">
             <a:spAutoFit/>
           </a:bodyPr>
           <a:lstStyle/>
@@ -18397,7 +18831,7 @@
           <a:noFill/>
         </p:spPr>
         <p:txBody>
-          <a:bodyPr wrap="square" lIns="45720" rIns="45720" tIns="18288" bIns="18288">
+          <a:bodyPr wrap="square" lIns="45720" tIns="18288" rIns="45720" bIns="18288">
             <a:spAutoFit/>
           </a:bodyPr>
           <a:lstStyle/>
@@ -18458,6 +18892,7 @@
           <a:lstStyle/>
           <a:p>
             <a:pPr algn="ctr"/>
+            <a:endParaRPr/>
           </a:p>
         </p:txBody>
       </p:sp>
@@ -18504,6 +18939,7 @@
           <a:lstStyle/>
           <a:p>
             <a:pPr algn="ctr"/>
+            <a:endParaRPr/>
           </a:p>
         </p:txBody>
       </p:sp>
@@ -18550,6 +18986,7 @@
           <a:lstStyle/>
           <a:p>
             <a:pPr algn="ctr"/>
+            <a:endParaRPr/>
           </a:p>
         </p:txBody>
       </p:sp>
@@ -18596,6 +19033,7 @@
           <a:lstStyle/>
           <a:p>
             <a:pPr algn="ctr"/>
+            <a:endParaRPr/>
           </a:p>
         </p:txBody>
       </p:sp>
@@ -18642,6 +19080,7 @@
           <a:lstStyle/>
           <a:p>
             <a:pPr algn="ctr"/>
+            <a:endParaRPr/>
           </a:p>
         </p:txBody>
       </p:sp>
@@ -18688,6 +19127,7 @@
           <a:lstStyle/>
           <a:p>
             <a:pPr algn="ctr"/>
+            <a:endParaRPr/>
           </a:p>
         </p:txBody>
       </p:sp>
@@ -18708,7 +19148,7 @@
           <a:noFill/>
         </p:spPr>
         <p:txBody>
-          <a:bodyPr wrap="square" lIns="45720" rIns="45720" tIns="18288" bIns="18288">
+          <a:bodyPr wrap="square" lIns="45720" tIns="18288" rIns="45720" bIns="18288">
             <a:spAutoFit/>
           </a:bodyPr>
           <a:lstStyle/>
@@ -18743,7 +19183,7 @@
           <a:noFill/>
         </p:spPr>
         <p:txBody>
-          <a:bodyPr wrap="square" lIns="45720" rIns="45720" tIns="18288" bIns="18288">
+          <a:bodyPr wrap="square" lIns="45720" tIns="18288" rIns="45720" bIns="18288">
             <a:spAutoFit/>
           </a:bodyPr>
           <a:lstStyle/>
@@ -18778,7 +19218,7 @@
           <a:noFill/>
         </p:spPr>
         <p:txBody>
-          <a:bodyPr wrap="square" lIns="45720" rIns="45720" tIns="18288" bIns="18288">
+          <a:bodyPr wrap="square" lIns="45720" tIns="18288" rIns="45720" bIns="18288">
             <a:spAutoFit/>
           </a:bodyPr>
           <a:lstStyle/>
@@ -18813,7 +19253,7 @@
           <a:noFill/>
         </p:spPr>
         <p:txBody>
-          <a:bodyPr wrap="square" lIns="45720" rIns="45720" tIns="18288" bIns="18288">
+          <a:bodyPr wrap="square" lIns="45720" tIns="18288" rIns="45720" bIns="18288">
             <a:spAutoFit/>
           </a:bodyPr>
           <a:lstStyle/>
@@ -18848,7 +19288,7 @@
           <a:noFill/>
         </p:spPr>
         <p:txBody>
-          <a:bodyPr wrap="square" lIns="45720" rIns="45720" tIns="18288" bIns="18288">
+          <a:bodyPr wrap="square" lIns="45720" tIns="18288" rIns="45720" bIns="18288">
             <a:spAutoFit/>
           </a:bodyPr>
           <a:lstStyle/>
@@ -18883,7 +19323,7 @@
           <a:noFill/>
         </p:spPr>
         <p:txBody>
-          <a:bodyPr wrap="square" lIns="45720" rIns="45720" tIns="18288" bIns="18288">
+          <a:bodyPr wrap="square" lIns="45720" tIns="18288" rIns="45720" bIns="18288">
             <a:spAutoFit/>
           </a:bodyPr>
           <a:lstStyle/>
@@ -18944,6 +19384,7 @@
           <a:lstStyle/>
           <a:p>
             <a:pPr algn="ctr"/>
+            <a:endParaRPr/>
           </a:p>
         </p:txBody>
       </p:sp>
@@ -18990,6 +19431,7 @@
           <a:lstStyle/>
           <a:p>
             <a:pPr algn="ctr"/>
+            <a:endParaRPr/>
           </a:p>
         </p:txBody>
       </p:sp>
@@ -19036,6 +19478,7 @@
           <a:lstStyle/>
           <a:p>
             <a:pPr algn="ctr"/>
+            <a:endParaRPr/>
           </a:p>
         </p:txBody>
       </p:sp>
@@ -19082,6 +19525,7 @@
           <a:lstStyle/>
           <a:p>
             <a:pPr algn="ctr"/>
+            <a:endParaRPr/>
           </a:p>
         </p:txBody>
       </p:sp>
@@ -19128,6 +19572,7 @@
           <a:lstStyle/>
           <a:p>
             <a:pPr algn="ctr"/>
+            <a:endParaRPr/>
           </a:p>
         </p:txBody>
       </p:sp>
@@ -19174,6 +19619,7 @@
           <a:lstStyle/>
           <a:p>
             <a:pPr algn="ctr"/>
+            <a:endParaRPr/>
           </a:p>
         </p:txBody>
       </p:sp>
@@ -19194,7 +19640,7 @@
           <a:noFill/>
         </p:spPr>
         <p:txBody>
-          <a:bodyPr wrap="square" lIns="45720" rIns="45720" tIns="18288" bIns="18288">
+          <a:bodyPr wrap="square" lIns="45720" tIns="18288" rIns="45720" bIns="18288">
             <a:spAutoFit/>
           </a:bodyPr>
           <a:lstStyle/>
@@ -19229,7 +19675,7 @@
           <a:noFill/>
         </p:spPr>
         <p:txBody>
-          <a:bodyPr wrap="square" lIns="45720" rIns="45720" tIns="18288" bIns="18288">
+          <a:bodyPr wrap="square" lIns="45720" tIns="18288" rIns="45720" bIns="18288">
             <a:spAutoFit/>
           </a:bodyPr>
           <a:lstStyle/>
@@ -19264,7 +19710,7 @@
           <a:noFill/>
         </p:spPr>
         <p:txBody>
-          <a:bodyPr wrap="square" lIns="45720" rIns="45720" tIns="18288" bIns="18288">
+          <a:bodyPr wrap="square" lIns="45720" tIns="18288" rIns="45720" bIns="18288">
             <a:spAutoFit/>
           </a:bodyPr>
           <a:lstStyle/>
@@ -19299,7 +19745,7 @@
           <a:noFill/>
         </p:spPr>
         <p:txBody>
-          <a:bodyPr wrap="square" lIns="45720" rIns="45720" tIns="18288" bIns="18288">
+          <a:bodyPr wrap="square" lIns="45720" tIns="18288" rIns="45720" bIns="18288">
             <a:spAutoFit/>
           </a:bodyPr>
           <a:lstStyle/>
@@ -19334,7 +19780,7 @@
           <a:noFill/>
         </p:spPr>
         <p:txBody>
-          <a:bodyPr wrap="square" lIns="45720" rIns="45720" tIns="18288" bIns="18288">
+          <a:bodyPr wrap="square" lIns="45720" tIns="18288" rIns="45720" bIns="18288">
             <a:spAutoFit/>
           </a:bodyPr>
           <a:lstStyle/>
@@ -19369,7 +19815,7 @@
           <a:noFill/>
         </p:spPr>
         <p:txBody>
-          <a:bodyPr wrap="square" lIns="45720" rIns="45720" tIns="18288" bIns="18288">
+          <a:bodyPr wrap="square" lIns="45720" tIns="18288" rIns="45720" bIns="18288">
             <a:spAutoFit/>
           </a:bodyPr>
           <a:lstStyle/>
@@ -19430,6 +19876,7 @@
           <a:lstStyle/>
           <a:p>
             <a:pPr algn="ctr"/>
+            <a:endParaRPr/>
           </a:p>
         </p:txBody>
       </p:sp>
@@ -19476,6 +19923,7 @@
           <a:lstStyle/>
           <a:p>
             <a:pPr algn="ctr"/>
+            <a:endParaRPr/>
           </a:p>
         </p:txBody>
       </p:sp>
@@ -19522,6 +19970,7 @@
           <a:lstStyle/>
           <a:p>
             <a:pPr algn="ctr"/>
+            <a:endParaRPr/>
           </a:p>
         </p:txBody>
       </p:sp>
@@ -19568,6 +20017,7 @@
           <a:lstStyle/>
           <a:p>
             <a:pPr algn="ctr"/>
+            <a:endParaRPr/>
           </a:p>
         </p:txBody>
       </p:sp>
@@ -19614,6 +20064,7 @@
           <a:lstStyle/>
           <a:p>
             <a:pPr algn="ctr"/>
+            <a:endParaRPr/>
           </a:p>
         </p:txBody>
       </p:sp>
@@ -19660,6 +20111,7 @@
           <a:lstStyle/>
           <a:p>
             <a:pPr algn="ctr"/>
+            <a:endParaRPr/>
           </a:p>
         </p:txBody>
       </p:sp>
@@ -19680,7 +20132,7 @@
           <a:noFill/>
         </p:spPr>
         <p:txBody>
-          <a:bodyPr wrap="square" lIns="45720" rIns="45720" tIns="18288" bIns="18288">
+          <a:bodyPr wrap="square" lIns="45720" tIns="18288" rIns="45720" bIns="18288">
             <a:spAutoFit/>
           </a:bodyPr>
           <a:lstStyle/>
@@ -19715,7 +20167,7 @@
           <a:noFill/>
         </p:spPr>
         <p:txBody>
-          <a:bodyPr wrap="square" lIns="45720" rIns="45720" tIns="18288" bIns="18288">
+          <a:bodyPr wrap="square" lIns="45720" tIns="18288" rIns="45720" bIns="18288">
             <a:spAutoFit/>
           </a:bodyPr>
           <a:lstStyle/>
@@ -19750,7 +20202,7 @@
           <a:noFill/>
         </p:spPr>
         <p:txBody>
-          <a:bodyPr wrap="square" lIns="45720" rIns="45720" tIns="18288" bIns="18288">
+          <a:bodyPr wrap="square" lIns="45720" tIns="18288" rIns="45720" bIns="18288">
             <a:spAutoFit/>
           </a:bodyPr>
           <a:lstStyle/>
@@ -19785,7 +20237,7 @@
           <a:noFill/>
         </p:spPr>
         <p:txBody>
-          <a:bodyPr wrap="square" lIns="45720" rIns="45720" tIns="18288" bIns="18288">
+          <a:bodyPr wrap="square" lIns="45720" tIns="18288" rIns="45720" bIns="18288">
             <a:spAutoFit/>
           </a:bodyPr>
           <a:lstStyle/>
@@ -19820,7 +20272,7 @@
           <a:noFill/>
         </p:spPr>
         <p:txBody>
-          <a:bodyPr wrap="square" lIns="45720" rIns="45720" tIns="18288" bIns="18288">
+          <a:bodyPr wrap="square" lIns="45720" tIns="18288" rIns="45720" bIns="18288">
             <a:spAutoFit/>
           </a:bodyPr>
           <a:lstStyle/>
@@ -19855,7 +20307,7 @@
           <a:noFill/>
         </p:spPr>
         <p:txBody>
-          <a:bodyPr wrap="square" lIns="45720" rIns="45720" tIns="18288" bIns="18288">
+          <a:bodyPr wrap="square" lIns="45720" tIns="18288" rIns="45720" bIns="18288">
             <a:spAutoFit/>
           </a:bodyPr>
           <a:lstStyle/>
@@ -19916,6 +20368,7 @@
           <a:lstStyle/>
           <a:p>
             <a:pPr algn="ctr"/>
+            <a:endParaRPr/>
           </a:p>
         </p:txBody>
       </p:sp>
@@ -19962,6 +20415,7 @@
           <a:lstStyle/>
           <a:p>
             <a:pPr algn="ctr"/>
+            <a:endParaRPr/>
           </a:p>
         </p:txBody>
       </p:sp>
@@ -20008,6 +20462,7 @@
           <a:lstStyle/>
           <a:p>
             <a:pPr algn="ctr"/>
+            <a:endParaRPr/>
           </a:p>
         </p:txBody>
       </p:sp>
@@ -20054,6 +20509,7 @@
           <a:lstStyle/>
           <a:p>
             <a:pPr algn="ctr"/>
+            <a:endParaRPr/>
           </a:p>
         </p:txBody>
       </p:sp>
@@ -20100,6 +20556,7 @@
           <a:lstStyle/>
           <a:p>
             <a:pPr algn="ctr"/>
+            <a:endParaRPr/>
           </a:p>
         </p:txBody>
       </p:sp>
@@ -20146,6 +20603,7 @@
           <a:lstStyle/>
           <a:p>
             <a:pPr algn="ctr"/>
+            <a:endParaRPr/>
           </a:p>
         </p:txBody>
       </p:sp>
@@ -20166,7 +20624,7 @@
           <a:noFill/>
         </p:spPr>
         <p:txBody>
-          <a:bodyPr wrap="square" lIns="45720" rIns="45720" tIns="18288" bIns="18288">
+          <a:bodyPr wrap="square" lIns="45720" tIns="18288" rIns="45720" bIns="18288">
             <a:spAutoFit/>
           </a:bodyPr>
           <a:lstStyle/>
@@ -20201,7 +20659,7 @@
           <a:noFill/>
         </p:spPr>
         <p:txBody>
-          <a:bodyPr wrap="square" lIns="45720" rIns="45720" tIns="18288" bIns="18288">
+          <a:bodyPr wrap="square" lIns="45720" tIns="18288" rIns="45720" bIns="18288">
             <a:spAutoFit/>
           </a:bodyPr>
           <a:lstStyle/>
@@ -20236,7 +20694,7 @@
           <a:noFill/>
         </p:spPr>
         <p:txBody>
-          <a:bodyPr wrap="square" lIns="45720" rIns="45720" tIns="18288" bIns="18288">
+          <a:bodyPr wrap="square" lIns="45720" tIns="18288" rIns="45720" bIns="18288">
             <a:spAutoFit/>
           </a:bodyPr>
           <a:lstStyle/>
@@ -20271,7 +20729,7 @@
           <a:noFill/>
         </p:spPr>
         <p:txBody>
-          <a:bodyPr wrap="square" lIns="45720" rIns="45720" tIns="18288" bIns="18288">
+          <a:bodyPr wrap="square" lIns="45720" tIns="18288" rIns="45720" bIns="18288">
             <a:spAutoFit/>
           </a:bodyPr>
           <a:lstStyle/>
@@ -20306,7 +20764,7 @@
           <a:noFill/>
         </p:spPr>
         <p:txBody>
-          <a:bodyPr wrap="square" lIns="45720" rIns="45720" tIns="18288" bIns="18288">
+          <a:bodyPr wrap="square" lIns="45720" tIns="18288" rIns="45720" bIns="18288">
             <a:spAutoFit/>
           </a:bodyPr>
           <a:lstStyle/>
@@ -20341,7 +20799,7 @@
           <a:noFill/>
         </p:spPr>
         <p:txBody>
-          <a:bodyPr wrap="square" lIns="45720" rIns="45720" tIns="18288" bIns="18288">
+          <a:bodyPr wrap="square" lIns="45720" tIns="18288" rIns="45720" bIns="18288">
             <a:spAutoFit/>
           </a:bodyPr>
           <a:lstStyle/>
@@ -20402,6 +20860,7 @@
           <a:lstStyle/>
           <a:p>
             <a:pPr algn="ctr"/>
+            <a:endParaRPr/>
           </a:p>
         </p:txBody>
       </p:sp>
@@ -20448,6 +20907,7 @@
           <a:lstStyle/>
           <a:p>
             <a:pPr algn="ctr"/>
+            <a:endParaRPr/>
           </a:p>
         </p:txBody>
       </p:sp>
@@ -20494,6 +20954,7 @@
           <a:lstStyle/>
           <a:p>
             <a:pPr algn="ctr"/>
+            <a:endParaRPr/>
           </a:p>
         </p:txBody>
       </p:sp>
@@ -20540,6 +21001,7 @@
           <a:lstStyle/>
           <a:p>
             <a:pPr algn="ctr"/>
+            <a:endParaRPr/>
           </a:p>
         </p:txBody>
       </p:sp>
@@ -20586,6 +21048,7 @@
           <a:lstStyle/>
           <a:p>
             <a:pPr algn="ctr"/>
+            <a:endParaRPr/>
           </a:p>
         </p:txBody>
       </p:sp>
@@ -20632,6 +21095,7 @@
           <a:lstStyle/>
           <a:p>
             <a:pPr algn="ctr"/>
+            <a:endParaRPr/>
           </a:p>
         </p:txBody>
       </p:sp>
@@ -20652,7 +21116,7 @@
           <a:noFill/>
         </p:spPr>
         <p:txBody>
-          <a:bodyPr wrap="square" lIns="45720" rIns="45720" tIns="18288" bIns="18288">
+          <a:bodyPr wrap="square" lIns="45720" tIns="18288" rIns="45720" bIns="18288">
             <a:spAutoFit/>
           </a:bodyPr>
           <a:lstStyle/>
@@ -20687,7 +21151,7 @@
           <a:noFill/>
         </p:spPr>
         <p:txBody>
-          <a:bodyPr wrap="square" lIns="45720" rIns="45720" tIns="18288" bIns="18288">
+          <a:bodyPr wrap="square" lIns="45720" tIns="18288" rIns="45720" bIns="18288">
             <a:spAutoFit/>
           </a:bodyPr>
           <a:lstStyle/>
@@ -20722,7 +21186,7 @@
           <a:noFill/>
         </p:spPr>
         <p:txBody>
-          <a:bodyPr wrap="square" lIns="45720" rIns="45720" tIns="18288" bIns="18288">
+          <a:bodyPr wrap="square" lIns="45720" tIns="18288" rIns="45720" bIns="18288">
             <a:spAutoFit/>
           </a:bodyPr>
           <a:lstStyle/>
@@ -20757,7 +21221,7 @@
           <a:noFill/>
         </p:spPr>
         <p:txBody>
-          <a:bodyPr wrap="square" lIns="45720" rIns="45720" tIns="18288" bIns="18288">
+          <a:bodyPr wrap="square" lIns="45720" tIns="18288" rIns="45720" bIns="18288">
             <a:spAutoFit/>
           </a:bodyPr>
           <a:lstStyle/>
@@ -20792,7 +21256,7 @@
           <a:noFill/>
         </p:spPr>
         <p:txBody>
-          <a:bodyPr wrap="square" lIns="45720" rIns="45720" tIns="18288" bIns="18288">
+          <a:bodyPr wrap="square" lIns="45720" tIns="18288" rIns="45720" bIns="18288">
             <a:spAutoFit/>
           </a:bodyPr>
           <a:lstStyle/>
@@ -20827,7 +21291,7 @@
           <a:noFill/>
         </p:spPr>
         <p:txBody>
-          <a:bodyPr wrap="square" lIns="45720" rIns="45720" tIns="18288" bIns="18288">
+          <a:bodyPr wrap="square" lIns="45720" tIns="18288" rIns="45720" bIns="18288">
             <a:spAutoFit/>
           </a:bodyPr>
           <a:lstStyle/>
@@ -20888,6 +21352,7 @@
           <a:lstStyle/>
           <a:p>
             <a:pPr algn="ctr"/>
+            <a:endParaRPr/>
           </a:p>
         </p:txBody>
       </p:sp>
@@ -20934,6 +21399,7 @@
           <a:lstStyle/>
           <a:p>
             <a:pPr algn="ctr"/>
+            <a:endParaRPr/>
           </a:p>
         </p:txBody>
       </p:sp>
@@ -20980,6 +21446,7 @@
           <a:lstStyle/>
           <a:p>
             <a:pPr algn="ctr"/>
+            <a:endParaRPr/>
           </a:p>
         </p:txBody>
       </p:sp>
@@ -21026,6 +21493,7 @@
           <a:lstStyle/>
           <a:p>
             <a:pPr algn="ctr"/>
+            <a:endParaRPr/>
           </a:p>
         </p:txBody>
       </p:sp>
@@ -21072,6 +21540,7 @@
           <a:lstStyle/>
           <a:p>
             <a:pPr algn="ctr"/>
+            <a:endParaRPr/>
           </a:p>
         </p:txBody>
       </p:sp>
@@ -21118,6 +21587,7 @@
           <a:lstStyle/>
           <a:p>
             <a:pPr algn="ctr"/>
+            <a:endParaRPr/>
           </a:p>
         </p:txBody>
       </p:sp>
@@ -21138,7 +21608,7 @@
           <a:noFill/>
         </p:spPr>
         <p:txBody>
-          <a:bodyPr wrap="square" lIns="45720" rIns="45720" tIns="18288" bIns="18288">
+          <a:bodyPr wrap="square" lIns="45720" tIns="18288" rIns="45720" bIns="18288">
             <a:spAutoFit/>
           </a:bodyPr>
           <a:lstStyle/>
@@ -21173,7 +21643,7 @@
           <a:noFill/>
         </p:spPr>
         <p:txBody>
-          <a:bodyPr wrap="square" lIns="45720" rIns="45720" tIns="18288" bIns="18288">
+          <a:bodyPr wrap="square" lIns="45720" tIns="18288" rIns="45720" bIns="18288">
             <a:spAutoFit/>
           </a:bodyPr>
           <a:lstStyle/>
@@ -21208,7 +21678,7 @@
           <a:noFill/>
         </p:spPr>
         <p:txBody>
-          <a:bodyPr wrap="square" lIns="45720" rIns="45720" tIns="18288" bIns="18288">
+          <a:bodyPr wrap="square" lIns="45720" tIns="18288" rIns="45720" bIns="18288">
             <a:spAutoFit/>
           </a:bodyPr>
           <a:lstStyle/>
@@ -21243,7 +21713,7 @@
           <a:noFill/>
         </p:spPr>
         <p:txBody>
-          <a:bodyPr wrap="square" lIns="45720" rIns="45720" tIns="18288" bIns="18288">
+          <a:bodyPr wrap="square" lIns="45720" tIns="18288" rIns="45720" bIns="18288">
             <a:spAutoFit/>
           </a:bodyPr>
           <a:lstStyle/>
@@ -21278,7 +21748,7 @@
           <a:noFill/>
         </p:spPr>
         <p:txBody>
-          <a:bodyPr wrap="square" lIns="45720" rIns="45720" tIns="18288" bIns="18288">
+          <a:bodyPr wrap="square" lIns="45720" tIns="18288" rIns="45720" bIns="18288">
             <a:spAutoFit/>
           </a:bodyPr>
           <a:lstStyle/>
@@ -21313,7 +21783,7 @@
           <a:noFill/>
         </p:spPr>
         <p:txBody>
-          <a:bodyPr wrap="square" lIns="45720" rIns="45720" tIns="18288" bIns="18288">
+          <a:bodyPr wrap="square" lIns="45720" tIns="18288" rIns="45720" bIns="18288">
             <a:spAutoFit/>
           </a:bodyPr>
           <a:lstStyle/>
@@ -21374,6 +21844,7 @@
           <a:lstStyle/>
           <a:p>
             <a:pPr algn="ctr"/>
+            <a:endParaRPr/>
           </a:p>
         </p:txBody>
       </p:sp>
@@ -21420,6 +21891,7 @@
           <a:lstStyle/>
           <a:p>
             <a:pPr algn="ctr"/>
+            <a:endParaRPr/>
           </a:p>
         </p:txBody>
       </p:sp>
@@ -21466,6 +21938,7 @@
           <a:lstStyle/>
           <a:p>
             <a:pPr algn="ctr"/>
+            <a:endParaRPr/>
           </a:p>
         </p:txBody>
       </p:sp>
@@ -21512,6 +21985,7 @@
           <a:lstStyle/>
           <a:p>
             <a:pPr algn="ctr"/>
+            <a:endParaRPr/>
           </a:p>
         </p:txBody>
       </p:sp>
@@ -21558,6 +22032,7 @@
           <a:lstStyle/>
           <a:p>
             <a:pPr algn="ctr"/>
+            <a:endParaRPr/>
           </a:p>
         </p:txBody>
       </p:sp>
@@ -21604,6 +22079,7 @@
           <a:lstStyle/>
           <a:p>
             <a:pPr algn="ctr"/>
+            <a:endParaRPr/>
           </a:p>
         </p:txBody>
       </p:sp>
@@ -21624,7 +22100,7 @@
           <a:noFill/>
         </p:spPr>
         <p:txBody>
-          <a:bodyPr wrap="square" lIns="45720" rIns="45720" tIns="18288" bIns="18288">
+          <a:bodyPr wrap="square" lIns="45720" tIns="18288" rIns="45720" bIns="18288">
             <a:spAutoFit/>
           </a:bodyPr>
           <a:lstStyle/>
@@ -21659,7 +22135,7 @@
           <a:noFill/>
         </p:spPr>
         <p:txBody>
-          <a:bodyPr wrap="square" lIns="45720" rIns="45720" tIns="18288" bIns="18288">
+          <a:bodyPr wrap="square" lIns="45720" tIns="18288" rIns="45720" bIns="18288">
             <a:spAutoFit/>
           </a:bodyPr>
           <a:lstStyle/>
@@ -21694,7 +22170,7 @@
           <a:noFill/>
         </p:spPr>
         <p:txBody>
-          <a:bodyPr wrap="square" lIns="45720" rIns="45720" tIns="18288" bIns="18288">
+          <a:bodyPr wrap="square" lIns="45720" tIns="18288" rIns="45720" bIns="18288">
             <a:spAutoFit/>
           </a:bodyPr>
           <a:lstStyle/>
@@ -21729,7 +22205,7 @@
           <a:noFill/>
         </p:spPr>
         <p:txBody>
-          <a:bodyPr wrap="square" lIns="45720" rIns="45720" tIns="18288" bIns="18288">
+          <a:bodyPr wrap="square" lIns="45720" tIns="18288" rIns="45720" bIns="18288">
             <a:spAutoFit/>
           </a:bodyPr>
           <a:lstStyle/>
@@ -21764,7 +22240,7 @@
           <a:noFill/>
         </p:spPr>
         <p:txBody>
-          <a:bodyPr wrap="square" lIns="45720" rIns="45720" tIns="18288" bIns="18288">
+          <a:bodyPr wrap="square" lIns="45720" tIns="18288" rIns="45720" bIns="18288">
             <a:spAutoFit/>
           </a:bodyPr>
           <a:lstStyle/>
@@ -21799,7 +22275,7 @@
           <a:noFill/>
         </p:spPr>
         <p:txBody>
-          <a:bodyPr wrap="square" lIns="45720" rIns="45720" tIns="18288" bIns="18288">
+          <a:bodyPr wrap="square" lIns="45720" tIns="18288" rIns="45720" bIns="18288">
             <a:spAutoFit/>
           </a:bodyPr>
           <a:lstStyle/>
@@ -21860,6 +22336,7 @@
           <a:lstStyle/>
           <a:p>
             <a:pPr algn="ctr"/>
+            <a:endParaRPr/>
           </a:p>
         </p:txBody>
       </p:sp>
@@ -21906,6 +22383,7 @@
           <a:lstStyle/>
           <a:p>
             <a:pPr algn="ctr"/>
+            <a:endParaRPr/>
           </a:p>
         </p:txBody>
       </p:sp>
@@ -21952,6 +22430,7 @@
           <a:lstStyle/>
           <a:p>
             <a:pPr algn="ctr"/>
+            <a:endParaRPr/>
           </a:p>
         </p:txBody>
       </p:sp>
@@ -21998,6 +22477,7 @@
           <a:lstStyle/>
           <a:p>
             <a:pPr algn="ctr"/>
+            <a:endParaRPr/>
           </a:p>
         </p:txBody>
       </p:sp>
@@ -22044,6 +22524,7 @@
           <a:lstStyle/>
           <a:p>
             <a:pPr algn="ctr"/>
+            <a:endParaRPr/>
           </a:p>
         </p:txBody>
       </p:sp>
@@ -22090,6 +22571,7 @@
           <a:lstStyle/>
           <a:p>
             <a:pPr algn="ctr"/>
+            <a:endParaRPr/>
           </a:p>
         </p:txBody>
       </p:sp>
@@ -22110,7 +22592,7 @@
           <a:noFill/>
         </p:spPr>
         <p:txBody>
-          <a:bodyPr wrap="square" lIns="45720" rIns="45720" tIns="18288" bIns="18288">
+          <a:bodyPr wrap="square" lIns="45720" tIns="18288" rIns="45720" bIns="18288">
             <a:spAutoFit/>
           </a:bodyPr>
           <a:lstStyle/>
@@ -22145,7 +22627,7 @@
           <a:noFill/>
         </p:spPr>
         <p:txBody>
-          <a:bodyPr wrap="square" lIns="45720" rIns="45720" tIns="18288" bIns="18288">
+          <a:bodyPr wrap="square" lIns="45720" tIns="18288" rIns="45720" bIns="18288">
             <a:spAutoFit/>
           </a:bodyPr>
           <a:lstStyle/>
@@ -22180,7 +22662,7 @@
           <a:noFill/>
         </p:spPr>
         <p:txBody>
-          <a:bodyPr wrap="square" lIns="45720" rIns="45720" tIns="18288" bIns="18288">
+          <a:bodyPr wrap="square" lIns="45720" tIns="18288" rIns="45720" bIns="18288">
             <a:spAutoFit/>
           </a:bodyPr>
           <a:lstStyle/>
@@ -22215,7 +22697,7 @@
           <a:noFill/>
         </p:spPr>
         <p:txBody>
-          <a:bodyPr wrap="square" lIns="45720" rIns="45720" tIns="18288" bIns="18288">
+          <a:bodyPr wrap="square" lIns="45720" tIns="18288" rIns="45720" bIns="18288">
             <a:spAutoFit/>
           </a:bodyPr>
           <a:lstStyle/>
@@ -22250,7 +22732,7 @@
           <a:noFill/>
         </p:spPr>
         <p:txBody>
-          <a:bodyPr wrap="square" lIns="45720" rIns="45720" tIns="18288" bIns="18288">
+          <a:bodyPr wrap="square" lIns="45720" tIns="18288" rIns="45720" bIns="18288">
             <a:spAutoFit/>
           </a:bodyPr>
           <a:lstStyle/>
@@ -22285,7 +22767,7 @@
           <a:noFill/>
         </p:spPr>
         <p:txBody>
-          <a:bodyPr wrap="square" lIns="45720" rIns="45720" tIns="18288" bIns="18288">
+          <a:bodyPr wrap="square" lIns="45720" tIns="18288" rIns="45720" bIns="18288">
             <a:spAutoFit/>
           </a:bodyPr>
           <a:lstStyle/>
@@ -22346,6 +22828,7 @@
           <a:lstStyle/>
           <a:p>
             <a:pPr algn="ctr"/>
+            <a:endParaRPr/>
           </a:p>
         </p:txBody>
       </p:sp>
@@ -22392,6 +22875,7 @@
           <a:lstStyle/>
           <a:p>
             <a:pPr algn="ctr"/>
+            <a:endParaRPr/>
           </a:p>
         </p:txBody>
       </p:sp>
@@ -22438,6 +22922,7 @@
           <a:lstStyle/>
           <a:p>
             <a:pPr algn="ctr"/>
+            <a:endParaRPr/>
           </a:p>
         </p:txBody>
       </p:sp>
@@ -22484,6 +22969,7 @@
           <a:lstStyle/>
           <a:p>
             <a:pPr algn="ctr"/>
+            <a:endParaRPr/>
           </a:p>
         </p:txBody>
       </p:sp>
@@ -22530,6 +23016,7 @@
           <a:lstStyle/>
           <a:p>
             <a:pPr algn="ctr"/>
+            <a:endParaRPr/>
           </a:p>
         </p:txBody>
       </p:sp>
@@ -22576,6 +23063,7 @@
           <a:lstStyle/>
           <a:p>
             <a:pPr algn="ctr"/>
+            <a:endParaRPr/>
           </a:p>
         </p:txBody>
       </p:sp>
@@ -22596,7 +23084,7 @@
           <a:noFill/>
         </p:spPr>
         <p:txBody>
-          <a:bodyPr wrap="square" lIns="45720" rIns="45720" tIns="18288" bIns="18288">
+          <a:bodyPr wrap="square" lIns="45720" tIns="18288" rIns="45720" bIns="18288">
             <a:spAutoFit/>
           </a:bodyPr>
           <a:lstStyle/>
@@ -22631,7 +23119,7 @@
           <a:noFill/>
         </p:spPr>
         <p:txBody>
-          <a:bodyPr wrap="square" lIns="45720" rIns="45720" tIns="18288" bIns="18288">
+          <a:bodyPr wrap="square" lIns="45720" tIns="18288" rIns="45720" bIns="18288">
             <a:spAutoFit/>
           </a:bodyPr>
           <a:lstStyle/>
@@ -22666,7 +23154,7 @@
           <a:noFill/>
         </p:spPr>
         <p:txBody>
-          <a:bodyPr wrap="square" lIns="45720" rIns="45720" tIns="18288" bIns="18288">
+          <a:bodyPr wrap="square" lIns="45720" tIns="18288" rIns="45720" bIns="18288">
             <a:spAutoFit/>
           </a:bodyPr>
           <a:lstStyle/>
@@ -22701,7 +23189,7 @@
           <a:noFill/>
         </p:spPr>
         <p:txBody>
-          <a:bodyPr wrap="square" lIns="45720" rIns="45720" tIns="18288" bIns="18288">
+          <a:bodyPr wrap="square" lIns="45720" tIns="18288" rIns="45720" bIns="18288">
             <a:spAutoFit/>
           </a:bodyPr>
           <a:lstStyle/>
@@ -22736,7 +23224,7 @@
           <a:noFill/>
         </p:spPr>
         <p:txBody>
-          <a:bodyPr wrap="square" lIns="45720" rIns="45720" tIns="18288" bIns="18288">
+          <a:bodyPr wrap="square" lIns="45720" tIns="18288" rIns="45720" bIns="18288">
             <a:spAutoFit/>
           </a:bodyPr>
           <a:lstStyle/>
@@ -22771,7 +23259,7 @@
           <a:noFill/>
         </p:spPr>
         <p:txBody>
-          <a:bodyPr wrap="square" lIns="45720" rIns="45720" tIns="18288" bIns="18288">
+          <a:bodyPr wrap="square" lIns="45720" tIns="18288" rIns="45720" bIns="18288">
             <a:spAutoFit/>
           </a:bodyPr>
           <a:lstStyle/>
@@ -22832,6 +23320,7 @@
           <a:lstStyle/>
           <a:p>
             <a:pPr algn="ctr"/>
+            <a:endParaRPr/>
           </a:p>
         </p:txBody>
       </p:sp>
@@ -22878,6 +23367,7 @@
           <a:lstStyle/>
           <a:p>
             <a:pPr algn="ctr"/>
+            <a:endParaRPr/>
           </a:p>
         </p:txBody>
       </p:sp>
@@ -22924,6 +23414,7 @@
           <a:lstStyle/>
           <a:p>
             <a:pPr algn="ctr"/>
+            <a:endParaRPr/>
           </a:p>
         </p:txBody>
       </p:sp>
@@ -22970,6 +23461,7 @@
           <a:lstStyle/>
           <a:p>
             <a:pPr algn="ctr"/>
+            <a:endParaRPr/>
           </a:p>
         </p:txBody>
       </p:sp>
@@ -23016,6 +23508,7 @@
           <a:lstStyle/>
           <a:p>
             <a:pPr algn="ctr"/>
+            <a:endParaRPr/>
           </a:p>
         </p:txBody>
       </p:sp>
@@ -23062,6 +23555,7 @@
           <a:lstStyle/>
           <a:p>
             <a:pPr algn="ctr"/>
+            <a:endParaRPr/>
           </a:p>
         </p:txBody>
       </p:sp>
@@ -23082,7 +23576,7 @@
           <a:noFill/>
         </p:spPr>
         <p:txBody>
-          <a:bodyPr wrap="square" lIns="45720" rIns="45720" tIns="18288" bIns="18288">
+          <a:bodyPr wrap="square" lIns="45720" tIns="18288" rIns="45720" bIns="18288">
             <a:spAutoFit/>
           </a:bodyPr>
           <a:lstStyle/>
@@ -23117,7 +23611,7 @@
           <a:noFill/>
         </p:spPr>
         <p:txBody>
-          <a:bodyPr wrap="square" lIns="45720" rIns="45720" tIns="18288" bIns="18288">
+          <a:bodyPr wrap="square" lIns="45720" tIns="18288" rIns="45720" bIns="18288">
             <a:spAutoFit/>
           </a:bodyPr>
           <a:lstStyle/>
@@ -23152,7 +23646,7 @@
           <a:noFill/>
         </p:spPr>
         <p:txBody>
-          <a:bodyPr wrap="square" lIns="45720" rIns="45720" tIns="18288" bIns="18288">
+          <a:bodyPr wrap="square" lIns="45720" tIns="18288" rIns="45720" bIns="18288">
             <a:spAutoFit/>
           </a:bodyPr>
           <a:lstStyle/>
@@ -23187,7 +23681,7 @@
           <a:noFill/>
         </p:spPr>
         <p:txBody>
-          <a:bodyPr wrap="square" lIns="45720" rIns="45720" tIns="18288" bIns="18288">
+          <a:bodyPr wrap="square" lIns="45720" tIns="18288" rIns="45720" bIns="18288">
             <a:spAutoFit/>
           </a:bodyPr>
           <a:lstStyle/>
@@ -23222,7 +23716,7 @@
           <a:noFill/>
         </p:spPr>
         <p:txBody>
-          <a:bodyPr wrap="square" lIns="45720" rIns="45720" tIns="18288" bIns="18288">
+          <a:bodyPr wrap="square" lIns="45720" tIns="18288" rIns="45720" bIns="18288">
             <a:spAutoFit/>
           </a:bodyPr>
           <a:lstStyle/>
@@ -23257,7 +23751,7 @@
           <a:noFill/>
         </p:spPr>
         <p:txBody>
-          <a:bodyPr wrap="square" lIns="45720" rIns="45720" tIns="18288" bIns="18288">
+          <a:bodyPr wrap="square" lIns="45720" tIns="18288" rIns="45720" bIns="18288">
             <a:spAutoFit/>
           </a:bodyPr>
           <a:lstStyle/>
@@ -23318,6 +23812,7 @@
           <a:lstStyle/>
           <a:p>
             <a:pPr algn="ctr"/>
+            <a:endParaRPr/>
           </a:p>
         </p:txBody>
       </p:sp>
@@ -23364,6 +23859,7 @@
           <a:lstStyle/>
           <a:p>
             <a:pPr algn="ctr"/>
+            <a:endParaRPr/>
           </a:p>
         </p:txBody>
       </p:sp>
@@ -23410,6 +23906,7 @@
           <a:lstStyle/>
           <a:p>
             <a:pPr algn="ctr"/>
+            <a:endParaRPr/>
           </a:p>
         </p:txBody>
       </p:sp>
@@ -23456,6 +23953,7 @@
           <a:lstStyle/>
           <a:p>
             <a:pPr algn="ctr"/>
+            <a:endParaRPr/>
           </a:p>
         </p:txBody>
       </p:sp>
@@ -23502,6 +24000,7 @@
           <a:lstStyle/>
           <a:p>
             <a:pPr algn="ctr"/>
+            <a:endParaRPr/>
           </a:p>
         </p:txBody>
       </p:sp>
@@ -23548,6 +24047,7 @@
           <a:lstStyle/>
           <a:p>
             <a:pPr algn="ctr"/>
+            <a:endParaRPr/>
           </a:p>
         </p:txBody>
       </p:sp>
@@ -23568,7 +24068,7 @@
           <a:noFill/>
         </p:spPr>
         <p:txBody>
-          <a:bodyPr wrap="square" lIns="45720" rIns="45720" tIns="18288" bIns="18288">
+          <a:bodyPr wrap="square" lIns="45720" tIns="18288" rIns="45720" bIns="18288">
             <a:spAutoFit/>
           </a:bodyPr>
           <a:lstStyle/>
@@ -23603,7 +24103,7 @@
           <a:noFill/>
         </p:spPr>
         <p:txBody>
-          <a:bodyPr wrap="square" lIns="45720" rIns="45720" tIns="18288" bIns="18288">
+          <a:bodyPr wrap="square" lIns="45720" tIns="18288" rIns="45720" bIns="18288">
             <a:spAutoFit/>
           </a:bodyPr>
           <a:lstStyle/>
@@ -23638,7 +24138,7 @@
           <a:noFill/>
         </p:spPr>
         <p:txBody>
-          <a:bodyPr wrap="square" lIns="45720" rIns="45720" tIns="18288" bIns="18288">
+          <a:bodyPr wrap="square" lIns="45720" tIns="18288" rIns="45720" bIns="18288">
             <a:spAutoFit/>
           </a:bodyPr>
           <a:lstStyle/>
@@ -23673,7 +24173,7 @@
           <a:noFill/>
         </p:spPr>
         <p:txBody>
-          <a:bodyPr wrap="square" lIns="45720" rIns="45720" tIns="18288" bIns="18288">
+          <a:bodyPr wrap="square" lIns="45720" tIns="18288" rIns="45720" bIns="18288">
             <a:spAutoFit/>
           </a:bodyPr>
           <a:lstStyle/>
@@ -23708,7 +24208,7 @@
           <a:noFill/>
         </p:spPr>
         <p:txBody>
-          <a:bodyPr wrap="square" lIns="45720" rIns="45720" tIns="18288" bIns="18288">
+          <a:bodyPr wrap="square" lIns="45720" tIns="18288" rIns="45720" bIns="18288">
             <a:spAutoFit/>
           </a:bodyPr>
           <a:lstStyle/>
@@ -23743,7 +24243,7 @@
           <a:noFill/>
         </p:spPr>
         <p:txBody>
-          <a:bodyPr wrap="square" lIns="45720" rIns="45720" tIns="18288" bIns="18288">
+          <a:bodyPr wrap="square" lIns="45720" tIns="18288" rIns="45720" bIns="18288">
             <a:spAutoFit/>
           </a:bodyPr>
           <a:lstStyle/>
@@ -23804,6 +24304,7 @@
           <a:lstStyle/>
           <a:p>
             <a:pPr algn="ctr"/>
+            <a:endParaRPr/>
           </a:p>
         </p:txBody>
       </p:sp>
@@ -23850,6 +24351,7 @@
           <a:lstStyle/>
           <a:p>
             <a:pPr algn="ctr"/>
+            <a:endParaRPr/>
           </a:p>
         </p:txBody>
       </p:sp>
@@ -23896,6 +24398,7 @@
           <a:lstStyle/>
           <a:p>
             <a:pPr algn="ctr"/>
+            <a:endParaRPr/>
           </a:p>
         </p:txBody>
       </p:sp>
@@ -23942,6 +24445,7 @@
           <a:lstStyle/>
           <a:p>
             <a:pPr algn="ctr"/>
+            <a:endParaRPr/>
           </a:p>
         </p:txBody>
       </p:sp>
@@ -23988,6 +24492,7 @@
           <a:lstStyle/>
           <a:p>
             <a:pPr algn="ctr"/>
+            <a:endParaRPr/>
           </a:p>
         </p:txBody>
       </p:sp>
@@ -24034,6 +24539,7 @@
           <a:lstStyle/>
           <a:p>
             <a:pPr algn="ctr"/>
+            <a:endParaRPr/>
           </a:p>
         </p:txBody>
       </p:sp>
@@ -24054,7 +24560,7 @@
           <a:noFill/>
         </p:spPr>
         <p:txBody>
-          <a:bodyPr wrap="square" lIns="45720" rIns="45720" tIns="18288" bIns="18288">
+          <a:bodyPr wrap="square" lIns="45720" tIns="18288" rIns="45720" bIns="18288">
             <a:spAutoFit/>
           </a:bodyPr>
           <a:lstStyle/>
@@ -24089,7 +24595,7 @@
           <a:noFill/>
         </p:spPr>
         <p:txBody>
-          <a:bodyPr wrap="square" lIns="45720" rIns="45720" tIns="18288" bIns="18288">
+          <a:bodyPr wrap="square" lIns="45720" tIns="18288" rIns="45720" bIns="18288">
             <a:spAutoFit/>
           </a:bodyPr>
           <a:lstStyle/>
@@ -24124,7 +24630,7 @@
           <a:noFill/>
         </p:spPr>
         <p:txBody>
-          <a:bodyPr wrap="square" lIns="45720" rIns="45720" tIns="18288" bIns="18288">
+          <a:bodyPr wrap="square" lIns="45720" tIns="18288" rIns="45720" bIns="18288">
             <a:spAutoFit/>
           </a:bodyPr>
           <a:lstStyle/>
@@ -24159,7 +24665,7 @@
           <a:noFill/>
         </p:spPr>
         <p:txBody>
-          <a:bodyPr wrap="square" lIns="45720" rIns="45720" tIns="18288" bIns="18288">
+          <a:bodyPr wrap="square" lIns="45720" tIns="18288" rIns="45720" bIns="18288">
             <a:spAutoFit/>
           </a:bodyPr>
           <a:lstStyle/>
@@ -24194,7 +24700,7 @@
           <a:noFill/>
         </p:spPr>
         <p:txBody>
-          <a:bodyPr wrap="square" lIns="45720" rIns="45720" tIns="18288" bIns="18288">
+          <a:bodyPr wrap="square" lIns="45720" tIns="18288" rIns="45720" bIns="18288">
             <a:spAutoFit/>
           </a:bodyPr>
           <a:lstStyle/>
@@ -24229,7 +24735,7 @@
           <a:noFill/>
         </p:spPr>
         <p:txBody>
-          <a:bodyPr wrap="square" lIns="45720" rIns="45720" tIns="18288" bIns="18288">
+          <a:bodyPr wrap="square" lIns="45720" tIns="18288" rIns="45720" bIns="18288">
             <a:spAutoFit/>
           </a:bodyPr>
           <a:lstStyle/>
@@ -24264,7 +24770,7 @@
           <a:noFill/>
         </p:spPr>
         <p:txBody>
-          <a:bodyPr wrap="square" lIns="45720" rIns="45720" tIns="18288" bIns="18288">
+          <a:bodyPr wrap="square" lIns="45720" tIns="18288" rIns="45720" bIns="18288">
             <a:spAutoFit/>
           </a:bodyPr>
           <a:lstStyle/>
@@ -24299,7 +24805,7 @@
           <a:noFill/>
         </p:spPr>
         <p:txBody>
-          <a:bodyPr wrap="square" lIns="45720" rIns="45720" tIns="18288" bIns="18288">
+          <a:bodyPr wrap="square" lIns="45720" tIns="18288" rIns="45720" bIns="18288">
             <a:spAutoFit/>
           </a:bodyPr>
           <a:lstStyle/>
@@ -24326,7 +24832,7 @@
 </file>
 
 <file path=ppt/slides/slide8.xml><?xml version="1.0" encoding="utf-8"?>
-<p:sld xmlns:a="http://schemas.openxmlformats.org/drawingml/2006/main" xmlns:p="http://schemas.openxmlformats.org/presentationml/2006/main" xmlns:r="http://schemas.openxmlformats.org/officeDocument/2006/relationships">
+<p:sld xmlns:a="http://schemas.openxmlformats.org/drawingml/2006/main" xmlns:r="http://schemas.openxmlformats.org/officeDocument/2006/relationships" xmlns:p="http://schemas.openxmlformats.org/presentationml/2006/main">
   <p:cSld>
     <p:spTree>
       <p:nvGrpSpPr>
@@ -24334,7 +24840,14 @@
         <p:cNvGrpSpPr/>
         <p:nvPr/>
       </p:nvGrpSpPr>
-      <p:grpSpPr/>
+      <p:grpSpPr>
+        <a:xfrm>
+          <a:off x="0" y="0"/>
+          <a:ext cx="0" cy="0"/>
+          <a:chOff x="0" y="0"/>
+          <a:chExt cx="0" cy="0"/>
+        </a:xfrm>
+      </p:grpSpPr>
       <p:sp>
         <p:nvSpPr>
           <p:cNvPr id="2" name="Rectangle 1"/>
@@ -24376,6 +24889,7 @@
           <a:lstStyle/>
           <a:p>
             <a:pPr algn="ctr"/>
+            <a:endParaRPr/>
           </a:p>
         </p:txBody>
       </p:sp>
@@ -24420,6 +24934,7 @@
           <a:lstStyle/>
           <a:p>
             <a:pPr algn="ctr"/>
+            <a:endParaRPr/>
           </a:p>
         </p:txBody>
       </p:sp>
@@ -24440,7 +24955,7 @@
           <a:noFill/>
         </p:spPr>
         <p:txBody>
-          <a:bodyPr wrap="square" lIns="45720" rIns="45720" tIns="18288" bIns="18288">
+          <a:bodyPr wrap="square" lIns="45720" tIns="18288" rIns="45720" bIns="18288">
             <a:spAutoFit/>
           </a:bodyPr>
           <a:lstStyle/>
@@ -24475,7 +24990,7 @@
           <a:noFill/>
         </p:spPr>
         <p:txBody>
-          <a:bodyPr wrap="square" lIns="45720" rIns="45720" tIns="18288" bIns="18288">
+          <a:bodyPr wrap="square" lIns="45720" tIns="18288" rIns="45720" bIns="18288">
             <a:spAutoFit/>
           </a:bodyPr>
           <a:lstStyle/>
@@ -24510,7 +25025,7 @@
           <a:noFill/>
         </p:spPr>
         <p:txBody>
-          <a:bodyPr wrap="square" lIns="45720" rIns="45720" tIns="18288" bIns="18288">
+          <a:bodyPr wrap="square" lIns="45720" tIns="18288" rIns="45720" bIns="18288">
             <a:spAutoFit/>
           </a:bodyPr>
           <a:lstStyle/>
@@ -24569,6 +25084,7 @@
           <a:lstStyle/>
           <a:p>
             <a:pPr algn="ctr"/>
+            <a:endParaRPr/>
           </a:p>
         </p:txBody>
       </p:sp>
@@ -24589,7 +25105,7 @@
           <a:noFill/>
         </p:spPr>
         <p:txBody>
-          <a:bodyPr wrap="square" lIns="45720" rIns="45720" tIns="18288" bIns="18288">
+          <a:bodyPr wrap="square" lIns="45720" tIns="18288" rIns="45720" bIns="18288">
             <a:spAutoFit/>
           </a:bodyPr>
           <a:lstStyle/>
@@ -24761,6 +25277,7 @@
           <a:lstStyle/>
           <a:p>
             <a:pPr algn="ctr"/>
+            <a:endParaRPr/>
           </a:p>
         </p:txBody>
       </p:sp>
@@ -24781,7 +25298,7 @@
           <a:noFill/>
         </p:spPr>
         <p:txBody>
-          <a:bodyPr wrap="square" lIns="45720" rIns="45720" tIns="18288" bIns="18288">
+          <a:bodyPr wrap="square" lIns="45720" tIns="18288" rIns="45720" bIns="18288">
             <a:spAutoFit/>
           </a:bodyPr>
           <a:lstStyle/>
@@ -24842,6 +25359,7 @@
           <a:lstStyle/>
           <a:p>
             <a:pPr algn="ctr"/>
+            <a:endParaRPr/>
           </a:p>
         </p:txBody>
       </p:sp>
@@ -24888,6 +25406,7 @@
           <a:lstStyle/>
           <a:p>
             <a:pPr algn="ctr"/>
+            <a:endParaRPr/>
           </a:p>
         </p:txBody>
       </p:sp>
@@ -24934,6 +25453,7 @@
           <a:lstStyle/>
           <a:p>
             <a:pPr algn="ctr"/>
+            <a:endParaRPr/>
           </a:p>
         </p:txBody>
       </p:sp>
@@ -24980,6 +25500,7 @@
           <a:lstStyle/>
           <a:p>
             <a:pPr algn="ctr"/>
+            <a:endParaRPr/>
           </a:p>
         </p:txBody>
       </p:sp>
@@ -25000,7 +25521,7 @@
           <a:noFill/>
         </p:spPr>
         <p:txBody>
-          <a:bodyPr wrap="square" lIns="45720" rIns="45720" tIns="18288" bIns="18288">
+          <a:bodyPr wrap="square" lIns="45720" tIns="18288" rIns="45720" bIns="18288">
             <a:spAutoFit/>
           </a:bodyPr>
           <a:lstStyle/>
@@ -25035,7 +25556,7 @@
           <a:noFill/>
         </p:spPr>
         <p:txBody>
-          <a:bodyPr wrap="square" lIns="45720" rIns="45720" tIns="18288" bIns="18288">
+          <a:bodyPr wrap="square" lIns="45720" tIns="18288" rIns="45720" bIns="18288">
             <a:spAutoFit/>
           </a:bodyPr>
           <a:lstStyle/>
@@ -25070,7 +25591,7 @@
           <a:noFill/>
         </p:spPr>
         <p:txBody>
-          <a:bodyPr wrap="square" lIns="45720" rIns="45720" tIns="18288" bIns="18288">
+          <a:bodyPr wrap="square" lIns="45720" tIns="18288" rIns="45720" bIns="18288">
             <a:spAutoFit/>
           </a:bodyPr>
           <a:lstStyle/>
@@ -25105,7 +25626,7 @@
           <a:noFill/>
         </p:spPr>
         <p:txBody>
-          <a:bodyPr wrap="square" lIns="45720" rIns="45720" tIns="18288" bIns="18288">
+          <a:bodyPr wrap="square" lIns="45720" tIns="18288" rIns="45720" bIns="18288">
             <a:spAutoFit/>
           </a:bodyPr>
           <a:lstStyle/>
@@ -25166,6 +25687,7 @@
           <a:lstStyle/>
           <a:p>
             <a:pPr algn="ctr"/>
+            <a:endParaRPr/>
           </a:p>
         </p:txBody>
       </p:sp>
@@ -25212,6 +25734,7 @@
           <a:lstStyle/>
           <a:p>
             <a:pPr algn="ctr"/>
+            <a:endParaRPr/>
           </a:p>
         </p:txBody>
       </p:sp>
@@ -25258,6 +25781,7 @@
           <a:lstStyle/>
           <a:p>
             <a:pPr algn="ctr"/>
+            <a:endParaRPr/>
           </a:p>
         </p:txBody>
       </p:sp>
@@ -25304,6 +25828,7 @@
           <a:lstStyle/>
           <a:p>
             <a:pPr algn="ctr"/>
+            <a:endParaRPr/>
           </a:p>
         </p:txBody>
       </p:sp>
@@ -25324,7 +25849,7 @@
           <a:noFill/>
         </p:spPr>
         <p:txBody>
-          <a:bodyPr wrap="square" lIns="45720" rIns="45720" tIns="18288" bIns="18288">
+          <a:bodyPr wrap="square" lIns="45720" tIns="18288" rIns="45720" bIns="18288">
             <a:spAutoFit/>
           </a:bodyPr>
           <a:lstStyle/>
@@ -25359,7 +25884,7 @@
           <a:noFill/>
         </p:spPr>
         <p:txBody>
-          <a:bodyPr wrap="square" lIns="45720" rIns="45720" tIns="18288" bIns="18288">
+          <a:bodyPr wrap="square" lIns="45720" tIns="18288" rIns="45720" bIns="18288">
             <a:spAutoFit/>
           </a:bodyPr>
           <a:lstStyle/>
@@ -25394,7 +25919,7 @@
           <a:noFill/>
         </p:spPr>
         <p:txBody>
-          <a:bodyPr wrap="square" lIns="45720" rIns="45720" tIns="18288" bIns="18288">
+          <a:bodyPr wrap="square" lIns="45720" tIns="18288" rIns="45720" bIns="18288">
             <a:spAutoFit/>
           </a:bodyPr>
           <a:lstStyle/>
@@ -25429,7 +25954,7 @@
           <a:noFill/>
         </p:spPr>
         <p:txBody>
-          <a:bodyPr wrap="square" lIns="45720" rIns="45720" tIns="18288" bIns="18288">
+          <a:bodyPr wrap="square" lIns="45720" tIns="18288" rIns="45720" bIns="18288">
             <a:spAutoFit/>
           </a:bodyPr>
           <a:lstStyle/>
@@ -25490,6 +26015,7 @@
           <a:lstStyle/>
           <a:p>
             <a:pPr algn="ctr"/>
+            <a:endParaRPr/>
           </a:p>
         </p:txBody>
       </p:sp>
@@ -25536,6 +26062,7 @@
           <a:lstStyle/>
           <a:p>
             <a:pPr algn="ctr"/>
+            <a:endParaRPr/>
           </a:p>
         </p:txBody>
       </p:sp>
@@ -25582,6 +26109,7 @@
           <a:lstStyle/>
           <a:p>
             <a:pPr algn="ctr"/>
+            <a:endParaRPr/>
           </a:p>
         </p:txBody>
       </p:sp>
@@ -25628,6 +26156,7 @@
           <a:lstStyle/>
           <a:p>
             <a:pPr algn="ctr"/>
+            <a:endParaRPr/>
           </a:p>
         </p:txBody>
       </p:sp>
@@ -25648,7 +26177,7 @@
           <a:noFill/>
         </p:spPr>
         <p:txBody>
-          <a:bodyPr wrap="square" lIns="45720" rIns="45720" tIns="18288" bIns="18288">
+          <a:bodyPr wrap="square" lIns="45720" tIns="18288" rIns="45720" bIns="18288">
             <a:spAutoFit/>
           </a:bodyPr>
           <a:lstStyle/>
@@ -25683,7 +26212,7 @@
           <a:noFill/>
         </p:spPr>
         <p:txBody>
-          <a:bodyPr wrap="square" lIns="45720" rIns="45720" tIns="18288" bIns="18288">
+          <a:bodyPr wrap="square" lIns="45720" tIns="18288" rIns="45720" bIns="18288">
             <a:spAutoFit/>
           </a:bodyPr>
           <a:lstStyle/>
@@ -25718,7 +26247,7 @@
           <a:noFill/>
         </p:spPr>
         <p:txBody>
-          <a:bodyPr wrap="square" lIns="45720" rIns="45720" tIns="18288" bIns="18288">
+          <a:bodyPr wrap="square" lIns="45720" tIns="18288" rIns="45720" bIns="18288">
             <a:spAutoFit/>
           </a:bodyPr>
           <a:lstStyle/>
@@ -25753,7 +26282,7 @@
           <a:noFill/>
         </p:spPr>
         <p:txBody>
-          <a:bodyPr wrap="square" lIns="45720" rIns="45720" tIns="18288" bIns="18288">
+          <a:bodyPr wrap="square" lIns="45720" tIns="18288" rIns="45720" bIns="18288">
             <a:spAutoFit/>
           </a:bodyPr>
           <a:lstStyle/>
@@ -25814,6 +26343,7 @@
           <a:lstStyle/>
           <a:p>
             <a:pPr algn="ctr"/>
+            <a:endParaRPr/>
           </a:p>
         </p:txBody>
       </p:sp>
@@ -25860,6 +26390,7 @@
           <a:lstStyle/>
           <a:p>
             <a:pPr algn="ctr"/>
+            <a:endParaRPr/>
           </a:p>
         </p:txBody>
       </p:sp>
@@ -25906,6 +26437,7 @@
           <a:lstStyle/>
           <a:p>
             <a:pPr algn="ctr"/>
+            <a:endParaRPr/>
           </a:p>
         </p:txBody>
       </p:sp>
@@ -25952,6 +26484,7 @@
           <a:lstStyle/>
           <a:p>
             <a:pPr algn="ctr"/>
+            <a:endParaRPr/>
           </a:p>
         </p:txBody>
       </p:sp>
@@ -25972,7 +26505,7 @@
           <a:noFill/>
         </p:spPr>
         <p:txBody>
-          <a:bodyPr wrap="square" lIns="45720" rIns="45720" tIns="18288" bIns="18288">
+          <a:bodyPr wrap="square" lIns="45720" tIns="18288" rIns="45720" bIns="18288">
             <a:spAutoFit/>
           </a:bodyPr>
           <a:lstStyle/>
@@ -26007,7 +26540,7 @@
           <a:noFill/>
         </p:spPr>
         <p:txBody>
-          <a:bodyPr wrap="square" lIns="45720" rIns="45720" tIns="18288" bIns="18288">
+          <a:bodyPr wrap="square" lIns="45720" tIns="18288" rIns="45720" bIns="18288">
             <a:spAutoFit/>
           </a:bodyPr>
           <a:lstStyle/>
@@ -26042,7 +26575,7 @@
           <a:noFill/>
         </p:spPr>
         <p:txBody>
-          <a:bodyPr wrap="square" lIns="45720" rIns="45720" tIns="18288" bIns="18288">
+          <a:bodyPr wrap="square" lIns="45720" tIns="18288" rIns="45720" bIns="18288">
             <a:spAutoFit/>
           </a:bodyPr>
           <a:lstStyle/>
@@ -26077,7 +26610,7 @@
           <a:noFill/>
         </p:spPr>
         <p:txBody>
-          <a:bodyPr wrap="square" lIns="45720" rIns="45720" tIns="18288" bIns="18288">
+          <a:bodyPr wrap="square" lIns="45720" tIns="18288" rIns="45720" bIns="18288">
             <a:spAutoFit/>
           </a:bodyPr>
           <a:lstStyle/>
@@ -26138,6 +26671,7 @@
           <a:lstStyle/>
           <a:p>
             <a:pPr algn="ctr"/>
+            <a:endParaRPr/>
           </a:p>
         </p:txBody>
       </p:sp>
@@ -26184,6 +26718,7 @@
           <a:lstStyle/>
           <a:p>
             <a:pPr algn="ctr"/>
+            <a:endParaRPr/>
           </a:p>
         </p:txBody>
       </p:sp>
@@ -26230,6 +26765,7 @@
           <a:lstStyle/>
           <a:p>
             <a:pPr algn="ctr"/>
+            <a:endParaRPr/>
           </a:p>
         </p:txBody>
       </p:sp>
@@ -26276,6 +26812,7 @@
           <a:lstStyle/>
           <a:p>
             <a:pPr algn="ctr"/>
+            <a:endParaRPr/>
           </a:p>
         </p:txBody>
       </p:sp>
@@ -26296,7 +26833,7 @@
           <a:noFill/>
         </p:spPr>
         <p:txBody>
-          <a:bodyPr wrap="square" lIns="45720" rIns="45720" tIns="18288" bIns="18288">
+          <a:bodyPr wrap="square" lIns="45720" tIns="18288" rIns="45720" bIns="18288">
             <a:spAutoFit/>
           </a:bodyPr>
           <a:lstStyle/>
@@ -26331,7 +26868,7 @@
           <a:noFill/>
         </p:spPr>
         <p:txBody>
-          <a:bodyPr wrap="square" lIns="45720" rIns="45720" tIns="18288" bIns="18288">
+          <a:bodyPr wrap="square" lIns="45720" tIns="18288" rIns="45720" bIns="18288">
             <a:spAutoFit/>
           </a:bodyPr>
           <a:lstStyle/>
@@ -26366,7 +26903,7 @@
           <a:noFill/>
         </p:spPr>
         <p:txBody>
-          <a:bodyPr wrap="square" lIns="45720" rIns="45720" tIns="18288" bIns="18288">
+          <a:bodyPr wrap="square" lIns="45720" tIns="18288" rIns="45720" bIns="18288">
             <a:spAutoFit/>
           </a:bodyPr>
           <a:lstStyle/>
@@ -26401,7 +26938,7 @@
           <a:noFill/>
         </p:spPr>
         <p:txBody>
-          <a:bodyPr wrap="square" lIns="45720" rIns="45720" tIns="18288" bIns="18288">
+          <a:bodyPr wrap="square" lIns="45720" tIns="18288" rIns="45720" bIns="18288">
             <a:spAutoFit/>
           </a:bodyPr>
           <a:lstStyle/>
@@ -26460,6 +26997,7 @@
           <a:lstStyle/>
           <a:p>
             <a:pPr algn="ctr"/>
+            <a:endParaRPr/>
           </a:p>
         </p:txBody>
       </p:sp>
@@ -26480,7 +27018,7 @@
           <a:noFill/>
         </p:spPr>
         <p:txBody>
-          <a:bodyPr wrap="square" lIns="45720" rIns="45720" tIns="18288" bIns="18288">
+          <a:bodyPr wrap="square" lIns="45720" tIns="18288" rIns="45720" bIns="18288">
             <a:spAutoFit/>
           </a:bodyPr>
           <a:lstStyle/>
@@ -26515,7 +27053,7 @@
           <a:noFill/>
         </p:spPr>
         <p:txBody>
-          <a:bodyPr wrap="square" lIns="45720" rIns="45720" tIns="18288" bIns="18288">
+          <a:bodyPr wrap="square" lIns="45720" tIns="18288" rIns="45720" bIns="18288">
             <a:spAutoFit/>
           </a:bodyPr>
           <a:lstStyle/>
@@ -26550,7 +27088,7 @@
           <a:noFill/>
         </p:spPr>
         <p:txBody>
-          <a:bodyPr wrap="square" lIns="45720" rIns="45720" tIns="18288" bIns="18288">
+          <a:bodyPr wrap="square" lIns="45720" tIns="18288" rIns="45720" bIns="18288">
             <a:spAutoFit/>
           </a:bodyPr>
           <a:lstStyle/>
@@ -26577,7 +27115,7 @@
 </file>
 
 <file path=ppt/slides/slide9.xml><?xml version="1.0" encoding="utf-8"?>
-<p:sld xmlns:a="http://schemas.openxmlformats.org/drawingml/2006/main" xmlns:p="http://schemas.openxmlformats.org/presentationml/2006/main" xmlns:r="http://schemas.openxmlformats.org/officeDocument/2006/relationships">
+<p:sld xmlns:a="http://schemas.openxmlformats.org/drawingml/2006/main" xmlns:r="http://schemas.openxmlformats.org/officeDocument/2006/relationships" xmlns:p="http://schemas.openxmlformats.org/presentationml/2006/main">
   <p:cSld>
     <p:spTree>
       <p:nvGrpSpPr>
@@ -26585,7 +27123,14 @@
         <p:cNvGrpSpPr/>
         <p:nvPr/>
       </p:nvGrpSpPr>
-      <p:grpSpPr/>
+      <p:grpSpPr>
+        <a:xfrm>
+          <a:off x="0" y="0"/>
+          <a:ext cx="0" cy="0"/>
+          <a:chOff x="0" y="0"/>
+          <a:chExt cx="0" cy="0"/>
+        </a:xfrm>
+      </p:grpSpPr>
       <p:sp>
         <p:nvSpPr>
           <p:cNvPr id="2" name="Rectangle 1"/>
@@ -26627,6 +27172,7 @@
           <a:lstStyle/>
           <a:p>
             <a:pPr algn="ctr"/>
+            <a:endParaRPr/>
           </a:p>
         </p:txBody>
       </p:sp>
@@ -26671,6 +27217,7 @@
           <a:lstStyle/>
           <a:p>
             <a:pPr algn="ctr"/>
+            <a:endParaRPr/>
           </a:p>
         </p:txBody>
       </p:sp>
@@ -26691,7 +27238,7 @@
           <a:noFill/>
         </p:spPr>
         <p:txBody>
-          <a:bodyPr wrap="square" lIns="45720" rIns="45720" tIns="18288" bIns="18288">
+          <a:bodyPr wrap="square" lIns="45720" tIns="18288" rIns="45720" bIns="18288">
             <a:spAutoFit/>
           </a:bodyPr>
           <a:lstStyle/>
@@ -26726,7 +27273,7 @@
           <a:noFill/>
         </p:spPr>
         <p:txBody>
-          <a:bodyPr wrap="square" lIns="45720" rIns="45720" tIns="18288" bIns="18288">
+          <a:bodyPr wrap="square" lIns="45720" tIns="18288" rIns="45720" bIns="18288">
             <a:spAutoFit/>
           </a:bodyPr>
           <a:lstStyle/>
@@ -26787,6 +27334,7 @@
           <a:lstStyle/>
           <a:p>
             <a:pPr algn="ctr"/>
+            <a:endParaRPr/>
           </a:p>
         </p:txBody>
       </p:sp>
@@ -26831,6 +27379,7 @@
           <a:lstStyle/>
           <a:p>
             <a:pPr algn="ctr"/>
+            <a:endParaRPr/>
           </a:p>
         </p:txBody>
       </p:sp>
@@ -26851,7 +27400,7 @@
           <a:noFill/>
         </p:spPr>
         <p:txBody>
-          <a:bodyPr wrap="square" lIns="45720" rIns="45720" tIns="18288" bIns="18288">
+          <a:bodyPr wrap="square" lIns="45720" tIns="18288" rIns="45720" bIns="18288">
             <a:spAutoFit/>
           </a:bodyPr>
           <a:lstStyle/>
@@ -26886,7 +27435,7 @@
           <a:noFill/>
         </p:spPr>
         <p:txBody>
-          <a:bodyPr wrap="square" lIns="45720" rIns="45720" tIns="18288" bIns="18288">
+          <a:bodyPr wrap="square" lIns="45720" tIns="18288" rIns="45720" bIns="18288">
             <a:spAutoFit/>
           </a:bodyPr>
           <a:lstStyle/>
@@ -26921,7 +27470,7 @@
           <a:noFill/>
         </p:spPr>
         <p:txBody>
-          <a:bodyPr wrap="square" lIns="45720" rIns="45720" tIns="18288" bIns="18288">
+          <a:bodyPr wrap="square" lIns="45720" tIns="18288" rIns="45720" bIns="18288">
             <a:spAutoFit/>
           </a:bodyPr>
           <a:lstStyle/>
@@ -26956,7 +27505,7 @@
           <a:noFill/>
         </p:spPr>
         <p:txBody>
-          <a:bodyPr wrap="square" lIns="45720" rIns="45720" tIns="18288" bIns="18288">
+          <a:bodyPr wrap="square" lIns="45720" tIns="18288" rIns="45720" bIns="18288">
             <a:spAutoFit/>
           </a:bodyPr>
           <a:lstStyle/>
@@ -27017,6 +27566,7 @@
           <a:lstStyle/>
           <a:p>
             <a:pPr algn="ctr"/>
+            <a:endParaRPr/>
           </a:p>
         </p:txBody>
       </p:sp>
@@ -27061,6 +27611,7 @@
           <a:lstStyle/>
           <a:p>
             <a:pPr algn="ctr"/>
+            <a:endParaRPr/>
           </a:p>
         </p:txBody>
       </p:sp>
@@ -27081,7 +27632,7 @@
           <a:noFill/>
         </p:spPr>
         <p:txBody>
-          <a:bodyPr wrap="square" lIns="45720" rIns="45720" tIns="18288" bIns="18288">
+          <a:bodyPr wrap="square" lIns="45720" tIns="18288" rIns="45720" bIns="18288">
             <a:spAutoFit/>
           </a:bodyPr>
           <a:lstStyle/>
@@ -27116,7 +27667,7 @@
           <a:noFill/>
         </p:spPr>
         <p:txBody>
-          <a:bodyPr wrap="square" lIns="45720" rIns="45720" tIns="18288" bIns="18288">
+          <a:bodyPr wrap="square" lIns="45720" tIns="18288" rIns="45720" bIns="18288">
             <a:spAutoFit/>
           </a:bodyPr>
           <a:lstStyle/>
@@ -27151,7 +27702,7 @@
           <a:noFill/>
         </p:spPr>
         <p:txBody>
-          <a:bodyPr wrap="square" lIns="45720" rIns="45720" tIns="18288" bIns="18288">
+          <a:bodyPr wrap="square" lIns="45720" tIns="18288" rIns="45720" bIns="18288">
             <a:spAutoFit/>
           </a:bodyPr>
           <a:lstStyle/>
@@ -27186,7 +27737,7 @@
           <a:noFill/>
         </p:spPr>
         <p:txBody>
-          <a:bodyPr wrap="square" lIns="45720" rIns="45720" tIns="18288" bIns="18288">
+          <a:bodyPr wrap="square" lIns="45720" tIns="18288" rIns="45720" bIns="18288">
             <a:spAutoFit/>
           </a:bodyPr>
           <a:lstStyle/>
@@ -27247,6 +27798,7 @@
           <a:lstStyle/>
           <a:p>
             <a:pPr algn="ctr"/>
+            <a:endParaRPr/>
           </a:p>
         </p:txBody>
       </p:sp>
@@ -27291,6 +27843,7 @@
           <a:lstStyle/>
           <a:p>
             <a:pPr algn="ctr"/>
+            <a:endParaRPr/>
           </a:p>
         </p:txBody>
       </p:sp>
@@ -27311,7 +27864,7 @@
           <a:noFill/>
         </p:spPr>
         <p:txBody>
-          <a:bodyPr wrap="square" lIns="45720" rIns="45720" tIns="18288" bIns="18288">
+          <a:bodyPr wrap="square" lIns="45720" tIns="18288" rIns="45720" bIns="18288">
             <a:spAutoFit/>
           </a:bodyPr>
           <a:lstStyle/>
@@ -27346,7 +27899,7 @@
           <a:noFill/>
         </p:spPr>
         <p:txBody>
-          <a:bodyPr wrap="square" lIns="45720" rIns="45720" tIns="18288" bIns="18288">
+          <a:bodyPr wrap="square" lIns="45720" tIns="18288" rIns="45720" bIns="18288">
             <a:spAutoFit/>
           </a:bodyPr>
           <a:lstStyle/>
@@ -27381,7 +27934,7 @@
           <a:noFill/>
         </p:spPr>
         <p:txBody>
-          <a:bodyPr wrap="square" lIns="45720" rIns="45720" tIns="18288" bIns="18288">
+          <a:bodyPr wrap="square" lIns="45720" tIns="18288" rIns="45720" bIns="18288">
             <a:spAutoFit/>
           </a:bodyPr>
           <a:lstStyle/>
@@ -27416,7 +27969,7 @@
           <a:noFill/>
         </p:spPr>
         <p:txBody>
-          <a:bodyPr wrap="square" lIns="45720" rIns="45720" tIns="18288" bIns="18288">
+          <a:bodyPr wrap="square" lIns="45720" tIns="18288" rIns="45720" bIns="18288">
             <a:spAutoFit/>
           </a:bodyPr>
           <a:lstStyle/>
@@ -27477,6 +28030,7 @@
           <a:lstStyle/>
           <a:p>
             <a:pPr algn="ctr"/>
+            <a:endParaRPr/>
           </a:p>
         </p:txBody>
       </p:sp>
@@ -27521,6 +28075,7 @@
           <a:lstStyle/>
           <a:p>
             <a:pPr algn="ctr"/>
+            <a:endParaRPr/>
           </a:p>
         </p:txBody>
       </p:sp>
@@ -27541,7 +28096,7 @@
           <a:noFill/>
         </p:spPr>
         <p:txBody>
-          <a:bodyPr wrap="square" lIns="45720" rIns="45720" tIns="18288" bIns="18288">
+          <a:bodyPr wrap="square" lIns="45720" tIns="18288" rIns="45720" bIns="18288">
             <a:spAutoFit/>
           </a:bodyPr>
           <a:lstStyle/>
@@ -27576,7 +28131,7 @@
           <a:noFill/>
         </p:spPr>
         <p:txBody>
-          <a:bodyPr wrap="square" lIns="45720" rIns="45720" tIns="18288" bIns="18288">
+          <a:bodyPr wrap="square" lIns="45720" tIns="18288" rIns="45720" bIns="18288">
             <a:spAutoFit/>
           </a:bodyPr>
           <a:lstStyle/>
@@ -27611,7 +28166,7 @@
           <a:noFill/>
         </p:spPr>
         <p:txBody>
-          <a:bodyPr wrap="square" lIns="45720" rIns="45720" tIns="18288" bIns="18288">
+          <a:bodyPr wrap="square" lIns="45720" tIns="18288" rIns="45720" bIns="18288">
             <a:spAutoFit/>
           </a:bodyPr>
           <a:lstStyle/>
@@ -27646,7 +28201,7 @@
           <a:noFill/>
         </p:spPr>
         <p:txBody>
-          <a:bodyPr wrap="square" lIns="45720" rIns="45720" tIns="18288" bIns="18288">
+          <a:bodyPr wrap="square" lIns="45720" tIns="18288" rIns="45720" bIns="18288">
             <a:spAutoFit/>
           </a:bodyPr>
           <a:lstStyle/>
@@ -27707,6 +28262,7 @@
           <a:lstStyle/>
           <a:p>
             <a:pPr algn="ctr"/>
+            <a:endParaRPr/>
           </a:p>
         </p:txBody>
       </p:sp>
@@ -27751,6 +28307,7 @@
           <a:lstStyle/>
           <a:p>
             <a:pPr algn="ctr"/>
+            <a:endParaRPr/>
           </a:p>
         </p:txBody>
       </p:sp>
@@ -27771,7 +28328,7 @@
           <a:noFill/>
         </p:spPr>
         <p:txBody>
-          <a:bodyPr wrap="square" lIns="45720" rIns="45720" tIns="18288" bIns="18288">
+          <a:bodyPr wrap="square" lIns="45720" tIns="18288" rIns="45720" bIns="18288">
             <a:spAutoFit/>
           </a:bodyPr>
           <a:lstStyle/>
@@ -27806,7 +28363,7 @@
           <a:noFill/>
         </p:spPr>
         <p:txBody>
-          <a:bodyPr wrap="square" lIns="45720" rIns="45720" tIns="18288" bIns="18288">
+          <a:bodyPr wrap="square" lIns="45720" tIns="18288" rIns="45720" bIns="18288">
             <a:spAutoFit/>
           </a:bodyPr>
           <a:lstStyle/>
@@ -27841,7 +28398,7 @@
           <a:noFill/>
         </p:spPr>
         <p:txBody>
-          <a:bodyPr wrap="square" lIns="45720" rIns="45720" tIns="18288" bIns="18288">
+          <a:bodyPr wrap="square" lIns="45720" tIns="18288" rIns="45720" bIns="18288">
             <a:spAutoFit/>
           </a:bodyPr>
           <a:lstStyle/>
@@ -27876,7 +28433,7 @@
           <a:noFill/>
         </p:spPr>
         <p:txBody>
-          <a:bodyPr wrap="square" lIns="45720" rIns="45720" tIns="18288" bIns="18288">
+          <a:bodyPr wrap="square" lIns="45720" tIns="18288" rIns="45720" bIns="18288">
             <a:spAutoFit/>
           </a:bodyPr>
           <a:lstStyle/>
@@ -27911,7 +28468,7 @@
           <a:noFill/>
         </p:spPr>
         <p:txBody>
-          <a:bodyPr wrap="square" lIns="45720" rIns="45720" tIns="18288" bIns="18288">
+          <a:bodyPr wrap="square" lIns="45720" tIns="18288" rIns="45720" bIns="18288">
             <a:spAutoFit/>
           </a:bodyPr>
           <a:lstStyle/>
@@ -27946,7 +28503,7 @@
           <a:noFill/>
         </p:spPr>
         <p:txBody>
-          <a:bodyPr wrap="square" lIns="45720" rIns="45720" tIns="18288" bIns="18288">
+          <a:bodyPr wrap="square" lIns="45720" tIns="18288" rIns="45720" bIns="18288">
             <a:spAutoFit/>
           </a:bodyPr>
           <a:lstStyle/>
